--- a/stakeholder_presentation/stakeholder_presentation.pptx
+++ b/stakeholder_presentation/stakeholder_presentation.pptx
@@ -20,9 +20,10 @@
     <p:sldId id="268" r:id="rId14"/>
     <p:sldId id="269" r:id="rId15"/>
     <p:sldId id="270" r:id="rId16"/>
+    <p:sldId id="271" r:id="rId17"/>
   </p:sldIdLst>
   <p:notesMasterIdLst>
-    <p:notesMasterId r:id="rId17"/>
+    <p:notesMasterId r:id="rId18"/>
   </p:notesMasterIdLst>
   <p:sldSz cx="12192000" cy="6858000"/>
   <p:notesSz cx="6858000" cy="12192000"/>
@@ -121,35 +122,36 @@
   <p:extLst>
     <p:ext uri="{521415D9-36F7-43E2-AB2F-B90AF26B5E84}">
       <p14:sectionLst xmlns:p14="http://schemas.microsoft.com/office/powerpoint/2010/main">
-        <p14:section name="Why creators need a success forecast" id="{b480eb71-5b12-86ec-f801-8012cfbb578b}">
+        <p14:section name="Why creators need a success forecast" id="{802754aa-7969-f187-da1f-c55b755ec1a1}">
           <p14:sldIdLst>
             <p14:sldId id="256"/>
             <p14:sldId id="257"/>
             <p14:sldId id="258"/>
+            <p14:sldId id="259"/>
           </p14:sldIdLst>
         </p14:section>
-        <p14:section name="What 331,675 past campaigns tell us" id="{35072359-90d8-7289-5378-c9f2facfa2e2}">
+        <p14:section name="What 331,675 past campaigns tell us" id="{829639e6-7c0a-f8dc-d617-e00a802f1a16}">
           <p14:sldIdLst>
-            <p14:sldId id="259"/>
             <p14:sldId id="260"/>
             <p14:sldId id="261"/>
+            <p14:sldId id="262"/>
           </p14:sldIdLst>
         </p14:section>
-        <p14:section name="How we built and tested the model" id="{69edc609-174b-66a9-f064-3f14fc8da338}">
+        <p14:section name="How we built and tested the model" id="{f2ab4ae3-98f4-3f3d-5e1c-931acdaafe80}">
           <p14:sldIdLst>
-            <p14:sldId id="262"/>
             <p14:sldId id="263"/>
             <p14:sldId id="264"/>
             <p14:sldId id="265"/>
             <p14:sldId id="266"/>
+            <p14:sldId id="267"/>
           </p14:sldIdLst>
         </p14:section>
-        <p14:section name="What creators should do next" id="{c8b11911-b9bf-7671-e91c-af9321cc0be1}">
+        <p14:section name="What creators should do next" id="{f3324c3f-f290-b927-2463-2dea3dc1bb67}">
           <p14:sldIdLst>
-            <p14:sldId id="267"/>
             <p14:sldId id="268"/>
             <p14:sldId id="269"/>
             <p14:sldId id="270"/>
+            <p14:sldId id="271"/>
           </p14:sldIdLst>
         </p14:section>
       </p14:sectionLst>
@@ -2312,7 +2314,7 @@
           <a:p>
             <a:r>
               <a:rPr lang="en-US" dirty="0"/>
-              <a:t>Here is what the model gets right and wrong. It finds 83 percent of the campaigns that really succeeded. The price is false hope: about 45 percent of its “likely success” calls end up failing, because many failed campaigns look exactly like successful ones on paper. The good news: its percentages are honest. When it says 60 percent, about 60 out of 100 such campaigns really succeed. Its biggest mistakes are tiny board game campaigns that failed and huge technology or food campaigns that succeeded. What explains them, like product quality or an existing fan base, is not in our data.</a:t>
+              <a:t>How good is the model? We tested it once, on 66,335 campaigns it had never seen. Our main score is called ROC-AUC. In simple words: if you show the model one successful and one failed campaign, how often does it give the successful one the higher chance? Guessing gets 0.5. The simple goal rule gets 0.63. Our model gets 0.77, so about three out of four pairs are ranked correctly. In practice: of the ten percent of campaigns the model rates most promising, 77 percent really succeeded. Of the ten percent it rates most risky, only 5 percent did.</a:t>
             </a:r>
             <a:endParaRPr lang="en-US" dirty="0"/>
           </a:p>
@@ -2400,7 +2402,7 @@
           <a:p>
             <a:r>
               <a:rPr lang="en-US" dirty="0"/>
-              <a:t>Which information does the model use most? We tested this by scrambling one piece of information at a time and measuring how much worse the model gets. The sub-category, for example board games or indie rock, and the funding goal are by far the most important. The launch year and the campaign length follow. Details like the title length, the launch hour or the country matter only a little.</a:t>
+              <a:t>Here is what the model gets right and wrong. It finds 83 percent of the campaigns that really succeeded. The price is false hope: about 45 percent of its “likely success” calls end up failing, because many failed campaigns look exactly like successful ones on paper. The good news: its percentages are honest. When it says 60 percent, about 60 out of 100 such campaigns really succeed. Its biggest mistakes are tiny board game campaigns that failed and huge technology or food campaigns that succeeded. What explains them, like product quality or an existing fan base, is not in our data.</a:t>
             </a:r>
             <a:endParaRPr lang="en-US" dirty="0"/>
           </a:p>
@@ -2488,7 +2490,7 @@
           <a:p>
             <a:r>
               <a:rPr lang="en-US" dirty="0"/>
-              <a:t>What does this mean for creators? Three decisions to make before launch. One: ask for less. Set the lowest goal that really funds the project and use stretch goals for the extras. Two: plan the length on purpose. Campaigns that kept the 30-day default did worse than most others, and 60-day campaigns did worst. Three: know your category. In hard categories like technology, food or fashion, build an audience before you launch. Remember, these are patterns from past campaigns, not guarantees.</a:t>
+              <a:t>Which information does the model use most? We tested this by scrambling one piece of information at a time and measuring how much worse the model gets. The sub-category, for example board games or indie rock, and the funding goal are by far the most important. The launch year and the campaign length follow. Details like the title length, the launch hour or the country matter only a little.</a:t>
             </a:r>
             <a:endParaRPr lang="en-US" dirty="0"/>
           </a:p>
@@ -2576,7 +2578,7 @@
           <a:p>
             <a:r>
               <a:rPr lang="en-US" dirty="0"/>
-              <a:t>Our data product idea is the Campaign Checker. A creator enters the campaign plan and gets an honest probability of success. Then they can compare: how did similar campaigns with a lower goal or a different length do? The table shows the model's estimates for a US board game. At five thousand dollars and 21 days, 93 percent. At fifty thousand dollars and 60 days, only 27 percent. Kickstarter itself could also use it, for example to coach creators before launch. One caveat: these are patterns from the past, not promises.</a:t>
+              <a:t>What does this mean for creators? Three decisions to make before launch. One: ask for less. Set the lowest goal that really funds the project and use stretch goals for the extras. Two: plan the length on purpose. Campaigns that kept the 30-day default did worse than most others, and 60-day campaigns did worst. Three: know your category. In hard categories like technology, food or fashion, build an audience before you launch. Remember, these are patterns from past campaigns, not guarantees.</a:t>
             </a:r>
             <a:endParaRPr lang="en-US" dirty="0"/>
           </a:p>
@@ -2664,7 +2666,7 @@
           <a:p>
             <a:r>
               <a:rPr lang="en-US" dirty="0"/>
-              <a:t>Every model has limits. Ours finds patterns, not causes. It cannot see the product, the video, the rewards or the creator's fan base, which explains many of its mistakes. The data ends in early 2018, so the platform may have changed. And almost half of its “likely success” calls still fail. Next, we would add richer data like the creator's history and the campaign description, test the model on the newest campaigns, refresh the data, and build the Campaign Checker as a web tool while tracking its accuracy.</a:t>
+              <a:t>Our data product idea is the Campaign Checker. A creator enters the campaign plan and gets an honest probability of success. Then they can compare: how did similar campaigns with a lower goal or a different length do? The table shows the model's estimates for a US board game. At five thousand dollars and 21 days, 93 percent. At fifty thousand dollars and 60 days, only 27 percent. Kickstarter itself could also use it, for example to coach creators before launch. One caveat: these are patterns from the past, not promises.</a:t>
             </a:r>
             <a:endParaRPr lang="en-US" dirty="0"/>
           </a:p>
@@ -2752,7 +2754,7 @@
           <a:p>
             <a:r>
               <a:rPr lang="en-US" dirty="0"/>
-              <a:t>Thank you for listening. In one sentence: ask for less, plan your campaign length, know your category, and check your odds before you launch. We are happy to take your questions.</a:t>
+              <a:t>Every model has limits. Ours finds patterns, not causes. It cannot see the product, the video, the rewards or the creator's fan base, which explains many of its mistakes. The data ends in early 2018, so the platform may have changed. And almost half of its “likely success” calls still fail. Next, we would add richer data like the creator's history and the campaign description, test the model on the newest campaigns, refresh the data, and build the Campaign Checker as a web tool while tracking its accuracy.</a:t>
             </a:r>
             <a:endParaRPr lang="en-US" dirty="0"/>
           </a:p>
@@ -2776,6 +2778,94 @@
             <a:fld id="{F7021451-1387-4CA6-816F-3879F97B5CBC}" type="slidenum">
               <a:rPr lang="en-US"/>
               <a:t>15</a:t>
+            </a:fld>
+            <a:endParaRPr lang="en-US"/>
+          </a:p>
+        </p:txBody>
+      </p:sp>
+    </p:spTree>
+    <p:extLst>
+      <p:ext uri="{BB962C8B-B14F-4D97-AF65-F5344CB8AC3E}">
+        <p14:creationId xmlns:p14="http://schemas.microsoft.com/office/powerpoint/2010/main" val="1024086991"/>
+      </p:ext>
+    </p:extLst>
+  </p:cSld>
+  <p:clrMapOvr>
+    <a:masterClrMapping/>
+  </p:clrMapOvr>
+</p:notes>
+</file>
+
+<file path=ppt/notesSlides/notesSlide16.xml><?xml version="1.0" encoding="utf-8"?>
+<p:notes xmlns:a="http://schemas.openxmlformats.org/drawingml/2006/main" xmlns:r="http://schemas.openxmlformats.org/officeDocument/2006/relationships" xmlns:p="http://schemas.openxmlformats.org/presentationml/2006/main">
+  <p:cSld>
+    <p:spTree>
+      <p:nvGrpSpPr>
+        <p:cNvPr id="1" name=""/>
+        <p:cNvGrpSpPr/>
+        <p:nvPr/>
+      </p:nvGrpSpPr>
+      <p:grpSpPr>
+        <a:xfrm>
+          <a:off x="0" y="0"/>
+          <a:ext cx="0" cy="0"/>
+          <a:chOff x="0" y="0"/>
+          <a:chExt cx="0" cy="0"/>
+        </a:xfrm>
+      </p:grpSpPr>
+      <p:sp>
+        <p:nvSpPr>
+          <p:cNvPr id="2" name="Slide Image Placeholder 1"/>
+          <p:cNvSpPr>
+            <a:spLocks noGrp="1" noRot="1" noChangeAspect="1"/>
+          </p:cNvSpPr>
+          <p:nvPr>
+            <p:ph type="sldImg"/>
+          </p:nvPr>
+        </p:nvSpPr>
+        <p:spPr/>
+      </p:sp>
+      <p:sp>
+        <p:nvSpPr>
+          <p:cNvPr id="3" name="Notes Placeholder 2"/>
+          <p:cNvSpPr>
+            <a:spLocks noGrp="1"/>
+          </p:cNvSpPr>
+          <p:nvPr>
+            <p:ph type="body" idx="1"/>
+          </p:nvPr>
+        </p:nvSpPr>
+        <p:spPr/>
+        <p:txBody>
+          <a:bodyPr/>
+          <a:lstStyle/>
+          <a:p>
+            <a:r>
+              <a:rPr lang="en-US" dirty="0"/>
+              <a:t>Thank you for listening. In one sentence: ask for less, plan your campaign length, know your category, and check your odds before you launch. We are happy to take your questions.</a:t>
+            </a:r>
+            <a:endParaRPr lang="en-US" dirty="0"/>
+          </a:p>
+        </p:txBody>
+      </p:sp>
+      <p:sp>
+        <p:nvSpPr>
+          <p:cNvPr id="4" name="Slide Number Placeholder 3"/>
+          <p:cNvSpPr>
+            <a:spLocks noGrp="1"/>
+          </p:cNvSpPr>
+          <p:nvPr>
+            <p:ph type="sldNum" sz="quarter" idx="10"/>
+          </p:nvPr>
+        </p:nvSpPr>
+        <p:spPr/>
+        <p:txBody>
+          <a:bodyPr/>
+          <a:lstStyle/>
+          <a:p>
+            <a:fld id="{F7021451-1387-4CA6-816F-3879F97B5CBC}" type="slidenum">
+              <a:rPr lang="en-US"/>
+              <a:t>16</a:t>
             </a:fld>
             <a:endParaRPr lang="en-US"/>
           </a:p>
@@ -2840,7 +2930,7 @@
           <a:p>
             <a:r>
               <a:rPr lang="en-US" dirty="0"/>
-              <a:t>Kickstarter is all or nothing. If you miss your goal, even by one dollar, you get nothing. And most campaigns do miss: 6 out of 10 finished campaigns failed. Creators make their key decisions, like how much money to ask for and how long to run, before launch and without data. That is the gap we want to close.</a:t>
+              <a:t>We are a team of three. Kashif Kazmi is our project manager, who planned the milestones, ran our Kanban board and kept the team on track. Christian Balan is our design thinker, who framed the problem from the creator’s point of view and shaped the story you will hear. Furkan Yepette is our data scientist, who cleaned and explored the data and built the prediction model.</a:t>
             </a:r>
             <a:endParaRPr lang="en-US" dirty="0"/>
           </a:p>
@@ -2928,7 +3018,7 @@
           <a:p>
             <a:r>
               <a:rPr lang="en-US" dirty="0"/>
-              <a:t>Our question is simple: before launch, how likely is a campaign to succeed? We used 331,675 campaigns that finished as either successful or failed. The model gets the campaign plan as input: the goal, the category, the country, how long it runs, when it starts and the title. It returns a chance of success between 0 and 100 percent.</a:t>
+              <a:t>Kickstarter is all or nothing. If you miss your goal, even by one dollar, you get nothing. And most campaigns do miss: 6 out of 10 finished campaigns failed. Creators make their key decisions, like how much money to ask for and how long to run, before launch and without data. That is the gap we want to close.</a:t>
             </a:r>
             <a:endParaRPr lang="en-US" dirty="0"/>
           </a:p>
@@ -3016,7 +3106,7 @@
           <a:p>
             <a:r>
               <a:rPr lang="en-US" dirty="0"/>
-              <a:t>Our first and strongest finding: the size of the goal. Campaigns asking for less than one thousand dollars succeed 55 percent of the time. Above fifty thousand dollars, only 15 percent succeed. In every category, successful projects asked for less than failed ones, typically half to two thirds as much. The goal is the biggest lever a creator controls.</a:t>
+              <a:t>Our question is simple: before launch, how likely is a campaign to succeed? We used 331,675 campaigns that finished as either successful or failed. The model gets the campaign plan as input: the goal, the category, the country, how long it runs, when it starts and the title. It returns a chance of success between 0 and 100 percent.</a:t>
             </a:r>
             <a:endParaRPr lang="en-US" dirty="0"/>
           </a:p>
@@ -3104,7 +3194,7 @@
           <a:p>
             <a:r>
               <a:rPr lang="en-US" dirty="0"/>
-              <a:t>Second finding: the category matters a lot. Dance, theater and comics projects succeed about two times out of three. Technology and journalism succeed only about one time in four. One reason: tech projects ask for much more money. The typical successful tech project asked for ten thousand dollars, a failed one twenty thousand. Arts projects often have a loyal community behind them.</a:t>
+              <a:t>Our first and strongest finding: the size of the goal. Campaigns asking for less than one thousand dollars succeed 55 percent of the time. Above fifty thousand dollars, only 15 percent succeed. In every category, successful projects asked for less than failed ones, typically half to two thirds as much. The goal is the biggest lever a creator controls.</a:t>
             </a:r>
             <a:endParaRPr lang="en-US" dirty="0"/>
           </a:p>
@@ -3192,7 +3282,7 @@
           <a:p>
             <a:r>
               <a:rPr lang="en-US" dirty="0"/>
-              <a:t>Third finding: timing. Half of all campaigns simply keep the 30-day default, and only 38 percent of those succeed. Campaigns under four weeks and of 32 to 44 days do clearly better, and campaigns of 60 days or more do worst, with only one in four succeeding. This is probably about who chooses: creators who plan carefully also pick the length on purpose. It is a pattern, not proof of cause. Also, the year matters: in 2014 the number of campaigns jumped by 44 percent and success rates fell, probably because there was more competition and less selection. Since 2015 success rates have been recovering.</a:t>
+              <a:t>Second finding: the category matters a lot. Dance, theater and comics projects succeed about two times out of three. Technology and journalism succeed only about one time in four. One reason: tech projects ask for much more money. The typical successful tech project asked for ten thousand dollars, a failed one twenty thousand. Arts projects often have a loyal community behind them.</a:t>
             </a:r>
             <a:endParaRPr lang="en-US" dirty="0"/>
           </a:p>
@@ -3280,7 +3370,7 @@
           <a:p>
             <a:r>
               <a:rPr lang="en-US" dirty="0"/>
-              <a:t>A key step was spotting target leakage. The data also contains the money pledged and the number of backers. Those numbers already contain the answer: the rule “pledged at least the goal” matches the outcome in 99.997 percent of cases. But a creator does not know them before launch. A model that used them would look perfect in testing and be useless in real life, so we removed them.</a:t>
+              <a:t>Third finding: timing. Half of all campaigns simply keep the 30-day default, and only 38 percent of those succeed. Campaigns under four weeks and of 32 to 44 days do clearly better, and campaigns of 60 days or more do worst, with only one in four succeeding. This is probably about who chooses: creators who plan carefully also pick the length on purpose. It is a pattern, not proof of cause. Also, the year matters: in 2014 the number of campaigns jumped by 44 percent and success rates fell, probably because there was more competition and less selection. Since 2015 success rates have been recovering.</a:t>
             </a:r>
             <a:endParaRPr lang="en-US" dirty="0"/>
           </a:p>
@@ -3368,7 +3458,7 @@
           <a:p>
             <a:r>
               <a:rPr lang="en-US" dirty="0"/>
-              <a:t>Here is our process in five steps. First we cleaned the data and removed the future information. Second, we locked away 20 percent of the campaigns as a test set, like a final exam the model never sees while learning. Third, we set a simple rule as the score to beat. Fourth, we compared three different kinds of models using cross-validation, which means we split the training data into five parts, train on four and check on the fifth, five times. Fifth, we tuned the best model and took the final exam once.</a:t>
+              <a:t>A key step was spotting target leakage. The data also contains the money pledged and the number of backers. Those numbers already contain the answer: the rule “pledged at least the goal” matches the outcome in 99.997 percent of cases. But a creator does not know them before launch. A model that used them would look perfect in testing and be useless in real life, so we removed them.</a:t>
             </a:r>
             <a:endParaRPr lang="en-US" dirty="0"/>
           </a:p>
@@ -3456,7 +3546,7 @@
           <a:p>
             <a:r>
               <a:rPr lang="en-US" dirty="0"/>
-              <a:t>How good is the model? We tested it once, on 66,335 campaigns it had never seen. Our main score is called ROC-AUC. In simple words: if you show the model one successful and one failed campaign, how often does it give the successful one the higher chance? Guessing gets 0.5. The simple goal rule gets 0.63. Our model gets 0.77, so about three out of four pairs are ranked correctly. In practice: of the ten percent of campaigns the model rates most promising, 77 percent really succeeded. Of the ten percent it rates most risky, only 5 percent did.</a:t>
+              <a:t>Here is our process in five steps. First we cleaned the data and removed the future information. Second, we locked away 20 percent of the campaigns as a test set, like a final exam the model never sees while learning. Third, we set a simple rule as the score to beat. Fourth, we compared three different kinds of models using cross-validation, which means we split the training data into five parts, train on four and check on the fifth, five times. Fifth, we tuned the best model and took the final exam once.</a:t>
             </a:r>
             <a:endParaRPr lang="en-US" dirty="0"/>
           </a:p>
@@ -4787,7 +4877,7 @@
                   <a:srgbClr val="C8D0DD"/>
                 </a:solidFill>
               </a:rPr>
-              <a:t>[Team names] · Data Science Bootcamp · October 2026</a:t>
+              <a:t>Kashif Kazmi · Christian Balan · Furkan Yepette · Data Science Bootcamp · October 2026</a:t>
             </a:r>
             <a:endParaRPr lang="en-US" sz="1200" dirty="0"/>
           </a:p>
@@ -4850,7 +4940,7 @@
                   <a:schemeClr val="accent3"/>
                 </a:solidFill>
               </a:rPr>
-              <a:t>STRENGTHS AND WEAKNESSES</a:t>
+              <a:t>RESULT · TESTED ON 66,335 UNSEEN CAMPAIGNS</a:t>
             </a:r>
             <a:endParaRPr lang="en-US" sz="1200" dirty="0"/>
           </a:p>
@@ -4888,26 +4978,109 @@
                   <a:schemeClr val="tx1"/>
                 </a:solidFill>
               </a:rPr>
-              <a:t>What it gets right, and where it fails</a:t>
+              <a:t>The model separates risky from promising</a:t>
             </a:r>
             <a:endParaRPr lang="en-US" sz="3400" dirty="0"/>
           </a:p>
         </p:txBody>
       </p:sp>
-      <p:sp>
-        <p:nvSpPr>
-          <p:cNvPr id="5" name="Card: of successful campaigns found"/>
+      <p:graphicFrame>
+        <p:nvGraphicFramePr>
+          <p:cNvPr id="5" name="Ranking score (ROC-AUC)" descr=""/>
+          <p:cNvGraphicFramePr/>
+          <p:nvPr/>
+        </p:nvGraphicFramePr>
+        <p:xfrm>
+          <a:off x="548640" y="1645920"/>
+          <a:ext cx="6766560" cy="2926080"/>
+        </p:xfrm>
+        <a:graphic xmlns:a="http://schemas.openxmlformats.org/drawingml/2006/main">
+          <a:graphicData uri="http://schemas.openxmlformats.org/drawingml/2006/chart">
+            <c:chart xmlns:c="http://schemas.openxmlformats.org/drawingml/2006/chart" r:id="rId1"/>
+          </a:graphicData>
+        </a:graphic>
+      </p:graphicFrame>
+      <p:sp>
+        <p:nvSpPr>
+          <p:cNvPr id="6" name="Text 2"/>
+          <p:cNvSpPr txBox="1"/>
+          <p:nvPr/>
+        </p:nvSpPr>
+        <p:spPr>
+          <a:xfrm>
+            <a:off x="548640" y="4754880"/>
+            <a:ext cx="6583680" cy="822960"/>
+          </a:xfrm>
+          <a:prstGeom prst="rect">
+            <a:avLst/>
+          </a:prstGeom>
+          <a:noFill/>
+          <a:ln/>
+        </p:spPr>
+        <p:txBody>
+          <a:bodyPr wrap="square" lIns="0" tIns="0" rIns="0" bIns="0" rtlCol="0" anchor="t"/>
+          <a:lstStyle/>
+          <a:p>
+            <a:pPr indent="0" marL="0">
+              <a:buNone/>
+            </a:pPr>
+            <a:r>
+              <a:rPr lang="en-US" sz="1600" dirty="0">
+                <a:solidFill>
+                  <a:schemeClr val="tx2"/>
+                </a:solidFill>
+                <a:latin typeface="Calibri" pitchFamily="34" charset="0"/>
+                <a:ea typeface="Calibri" pitchFamily="34" charset="-122"/>
+                <a:cs typeface="Calibri" pitchFamily="34" charset="-120"/>
+              </a:rPr>
+              <a:t>Show the model one successful and one failed campaign: it ranks the successful one higher in about </a:t>
+            </a:r>
+            <a:pPr indent="0" marL="0">
+              <a:buNone/>
+            </a:pPr>
+            <a:r>
+              <a:rPr lang="en-US" sz="1600" b="1" dirty="0">
+                <a:solidFill>
+                  <a:srgbClr val="14213D"/>
+                </a:solidFill>
+                <a:latin typeface="Calibri" pitchFamily="34" charset="0"/>
+                <a:ea typeface="Calibri" pitchFamily="34" charset="-122"/>
+                <a:cs typeface="Calibri" pitchFamily="34" charset="-120"/>
+              </a:rPr>
+              <a:t>3 out of 4</a:t>
+            </a:r>
+            <a:pPr indent="0" marL="0">
+              <a:buNone/>
+            </a:pPr>
+            <a:r>
+              <a:rPr lang="en-US" sz="1600" dirty="0">
+                <a:solidFill>
+                  <a:schemeClr val="tx2"/>
+                </a:solidFill>
+                <a:latin typeface="Calibri" pitchFamily="34" charset="0"/>
+                <a:ea typeface="Calibri" pitchFamily="34" charset="-122"/>
+                <a:cs typeface="Calibri" pitchFamily="34" charset="-120"/>
+              </a:rPr>
+              <a:t> pairs.</a:t>
+            </a:r>
+            <a:endParaRPr lang="en-US" sz="1600" dirty="0"/>
+          </a:p>
+        </p:txBody>
+      </p:sp>
+      <p:sp>
+        <p:nvSpPr>
+          <p:cNvPr id="7" name="Card: most promising"/>
           <p:cNvSpPr/>
           <p:nvPr/>
         </p:nvSpPr>
         <p:spPr>
           <a:xfrm>
-            <a:off x="548640" y="1691640"/>
-            <a:ext cx="3484778" cy="2926080"/>
+            <a:off x="7863840" y="1645920"/>
+            <a:ext cx="3779215" cy="1965960"/>
           </a:xfrm>
           <a:prstGeom prst="roundRect">
             <a:avLst>
-              <a:gd name="adj" fmla="val 3750"/>
+              <a:gd name="adj" fmla="val 5581"/>
             </a:avLst>
           </a:prstGeom>
           <a:solidFill>
@@ -4923,14 +5096,14 @@
       </p:sp>
       <p:sp>
         <p:nvSpPr>
-          <p:cNvPr id="6" name="Text 3"/>
+          <p:cNvPr id="8" name="Text 4"/>
           <p:cNvSpPr txBox="1"/>
           <p:nvPr/>
         </p:nvSpPr>
         <p:spPr>
           <a:xfrm>
-            <a:off x="868680" y="1920240"/>
-            <a:ext cx="2844698" cy="868680"/>
+            <a:off x="8183880" y="1783080"/>
+            <a:ext cx="3139135" cy="868680"/>
           </a:xfrm>
           <a:prstGeom prst="rect">
             <a:avLst/>
@@ -4946,7 +5119,7 @@
               <a:buNone/>
             </a:pPr>
             <a:r>
-              <a:rPr lang="en-US" sz="5400" b="1" dirty="0">
+              <a:rPr lang="en-US" sz="4800" b="1" dirty="0">
                 <a:solidFill>
                   <a:schemeClr val="accent3"/>
                 </a:solidFill>
@@ -4954,22 +5127,22 @@
                 <a:ea typeface="Arial" pitchFamily="34" charset="-122"/>
                 <a:cs typeface="Arial" pitchFamily="34" charset="-120"/>
               </a:rPr>
-              <a:t>83%</a:t>
-            </a:r>
-            <a:endParaRPr lang="en-US" sz="5400" dirty="0"/>
-          </a:p>
-        </p:txBody>
-      </p:sp>
-      <p:sp>
-        <p:nvSpPr>
-          <p:cNvPr id="7" name="Text 4"/>
+              <a:t>77%</a:t>
+            </a:r>
+            <a:endParaRPr lang="en-US" sz="4800" dirty="0"/>
+          </a:p>
+        </p:txBody>
+      </p:sp>
+      <p:sp>
+        <p:nvSpPr>
+          <p:cNvPr id="9" name="Text 5"/>
           <p:cNvSpPr txBox="1"/>
           <p:nvPr/>
         </p:nvSpPr>
         <p:spPr>
           <a:xfrm>
-            <a:off x="868680" y="2834640"/>
-            <a:ext cx="2844698" cy="685800"/>
+            <a:off x="8183880" y="2697480"/>
+            <a:ext cx="3139135" cy="685800"/>
           </a:xfrm>
           <a:prstGeom prst="rect">
             <a:avLst/>
@@ -4993,7 +5166,7 @@
                 <a:ea typeface="Calibri" pitchFamily="34" charset="-122"/>
                 <a:cs typeface="Calibri" pitchFamily="34" charset="-120"/>
               </a:rPr>
-              <a:t>of successful campaigns found</a:t>
+              <a:t>succeeded among the 10% rated most promising</a:t>
             </a:r>
             <a:endParaRPr lang="en-US" sz="1800" dirty="0"/>
           </a:p>
@@ -5001,57 +5174,18 @@
       </p:sp>
       <p:sp>
         <p:nvSpPr>
-          <p:cNvPr id="8" name="Text 5"/>
-          <p:cNvSpPr txBox="1"/>
-          <p:nvPr/>
-        </p:nvSpPr>
-        <p:spPr>
-          <a:xfrm>
-            <a:off x="868680" y="3520440"/>
-            <a:ext cx="2844698" cy="822960"/>
-          </a:xfrm>
-          <a:prstGeom prst="rect">
-            <a:avLst/>
-          </a:prstGeom>
-          <a:noFill/>
-          <a:ln/>
-        </p:spPr>
-        <p:txBody>
-          <a:bodyPr wrap="square" lIns="0" tIns="0" rIns="0" bIns="0" rtlCol="0" anchor="t"/>
-          <a:lstStyle/>
-          <a:p>
-            <a:pPr indent="0" marL="0">
-              <a:buNone/>
-            </a:pPr>
-            <a:r>
-              <a:rPr lang="en-US" sz="1500" dirty="0">
-                <a:solidFill>
-                  <a:schemeClr val="tx2"/>
-                </a:solidFill>
-                <a:latin typeface="Calibri" pitchFamily="34" charset="0"/>
-                <a:ea typeface="Calibri" pitchFamily="34" charset="-122"/>
-                <a:cs typeface="Calibri" pitchFamily="34" charset="-120"/>
-              </a:rPr>
-              <a:t>22,266 of 26,791 successful test campaigns were called “likely to succeed”.</a:t>
-            </a:r>
-            <a:endParaRPr lang="en-US" sz="1500" dirty="0"/>
-          </a:p>
-        </p:txBody>
-      </p:sp>
-      <p:sp>
-        <p:nvSpPr>
-          <p:cNvPr id="9" name="Card: of “success” calls are false hope"/>
+          <p:cNvPr id="10" name="Card: most risky"/>
           <p:cNvSpPr/>
           <p:nvPr/>
         </p:nvSpPr>
         <p:spPr>
           <a:xfrm>
-            <a:off x="4353458" y="1691640"/>
-            <a:ext cx="3484778" cy="2926080"/>
+            <a:off x="7863840" y="3794760"/>
+            <a:ext cx="3779215" cy="1965960"/>
           </a:xfrm>
           <a:prstGeom prst="roundRect">
             <a:avLst>
-              <a:gd name="adj" fmla="val 3750"/>
+              <a:gd name="adj" fmla="val 5581"/>
             </a:avLst>
           </a:prstGeom>
           <a:solidFill>
@@ -5067,14 +5201,14 @@
       </p:sp>
       <p:sp>
         <p:nvSpPr>
-          <p:cNvPr id="10" name="Text 7"/>
+          <p:cNvPr id="11" name="Text 7"/>
           <p:cNvSpPr txBox="1"/>
           <p:nvPr/>
         </p:nvSpPr>
         <p:spPr>
           <a:xfrm>
-            <a:off x="4673498" y="1920240"/>
-            <a:ext cx="2844698" cy="868680"/>
+            <a:off x="8183880" y="3931920"/>
+            <a:ext cx="3139135" cy="868680"/>
           </a:xfrm>
           <a:prstGeom prst="rect">
             <a:avLst/>
@@ -5090,7 +5224,7 @@
               <a:buNone/>
             </a:pPr>
             <a:r>
-              <a:rPr lang="en-US" sz="5400" b="1" dirty="0">
+              <a:rPr lang="en-US" sz="4800" b="1" dirty="0">
                 <a:solidFill>
                   <a:schemeClr val="accent4"/>
                 </a:solidFill>
@@ -5098,22 +5232,22 @@
                 <a:ea typeface="Arial" pitchFamily="34" charset="-122"/>
                 <a:cs typeface="Arial" pitchFamily="34" charset="-120"/>
               </a:rPr>
-              <a:t>45%</a:t>
-            </a:r>
-            <a:endParaRPr lang="en-US" sz="5400" dirty="0"/>
-          </a:p>
-        </p:txBody>
-      </p:sp>
-      <p:sp>
-        <p:nvSpPr>
-          <p:cNvPr id="11" name="Text 8"/>
+              <a:t>5%</a:t>
+            </a:r>
+            <a:endParaRPr lang="en-US" sz="4800" dirty="0"/>
+          </a:p>
+        </p:txBody>
+      </p:sp>
+      <p:sp>
+        <p:nvSpPr>
+          <p:cNvPr id="12" name="Text 8"/>
           <p:cNvSpPr txBox="1"/>
           <p:nvPr/>
         </p:nvSpPr>
         <p:spPr>
           <a:xfrm>
-            <a:off x="4673498" y="2834640"/>
-            <a:ext cx="2844698" cy="685800"/>
+            <a:off x="8183880" y="4846320"/>
+            <a:ext cx="3139135" cy="685800"/>
           </a:xfrm>
           <a:prstGeom prst="rect">
             <a:avLst/>
@@ -5137,7 +5271,7 @@
                 <a:ea typeface="Calibri" pitchFamily="34" charset="-122"/>
                 <a:cs typeface="Calibri" pitchFamily="34" charset="-120"/>
               </a:rPr>
-              <a:t>of “success” calls are false hope</a:t>
+              <a:t>succeeded among the 10% rated most risky</a:t>
             </a:r>
             <a:endParaRPr lang="en-US" sz="1800" dirty="0"/>
           </a:p>
@@ -5145,229 +5279,7 @@
       </p:sp>
       <p:sp>
         <p:nvSpPr>
-          <p:cNvPr id="12" name="Text 9"/>
-          <p:cNvSpPr txBox="1"/>
-          <p:nvPr/>
-        </p:nvSpPr>
-        <p:spPr>
-          <a:xfrm>
-            <a:off x="4673498" y="3520440"/>
-            <a:ext cx="2844698" cy="822960"/>
-          </a:xfrm>
-          <a:prstGeom prst="rect">
-            <a:avLst/>
-          </a:prstGeom>
-          <a:noFill/>
-          <a:ln/>
-        </p:spPr>
-        <p:txBody>
-          <a:bodyPr wrap="square" lIns="0" tIns="0" rIns="0" bIns="0" rtlCol="0" anchor="t"/>
-          <a:lstStyle/>
-          <a:p>
-            <a:pPr indent="0" marL="0">
-              <a:buNone/>
-            </a:pPr>
-            <a:r>
-              <a:rPr lang="en-US" sz="1500" dirty="0">
-                <a:solidFill>
-                  <a:schemeClr val="tx2"/>
-                </a:solidFill>
-                <a:latin typeface="Calibri" pitchFamily="34" charset="0"/>
-                <a:ea typeface="Calibri" pitchFamily="34" charset="-122"/>
-                <a:cs typeface="Calibri" pitchFamily="34" charset="-120"/>
-              </a:rPr>
-              <a:t>18,279 failed campaigns looked promising on paper.</a:t>
-            </a:r>
-            <a:endParaRPr lang="en-US" sz="1500" dirty="0"/>
-          </a:p>
-        </p:txBody>
-      </p:sp>
-      <p:sp>
-        <p:nvSpPr>
-          <p:cNvPr id="13" name="Card: chances you can trust"/>
-          <p:cNvSpPr/>
-          <p:nvPr/>
-        </p:nvSpPr>
-        <p:spPr>
-          <a:xfrm>
-            <a:off x="8158277" y="1691640"/>
-            <a:ext cx="3484778" cy="2926080"/>
-          </a:xfrm>
-          <a:prstGeom prst="roundRect">
-            <a:avLst>
-              <a:gd name="adj" fmla="val 3750"/>
-            </a:avLst>
-          </a:prstGeom>
-          <a:solidFill>
-            <a:srgbClr val="F2F4F8"/>
-          </a:solidFill>
-          <a:ln w="12700">
-            <a:solidFill>
-              <a:srgbClr val="F2F4F8"/>
-            </a:solidFill>
-            <a:prstDash val="solid"/>
-          </a:ln>
-        </p:spPr>
-      </p:sp>
-      <p:sp>
-        <p:nvSpPr>
-          <p:cNvPr id="14" name="Text 11"/>
-          <p:cNvSpPr txBox="1"/>
-          <p:nvPr/>
-        </p:nvSpPr>
-        <p:spPr>
-          <a:xfrm>
-            <a:off x="8478317" y="1920240"/>
-            <a:ext cx="2844698" cy="868680"/>
-          </a:xfrm>
-          <a:prstGeom prst="rect">
-            <a:avLst/>
-          </a:prstGeom>
-          <a:noFill/>
-          <a:ln/>
-        </p:spPr>
-        <p:txBody>
-          <a:bodyPr wrap="square" lIns="0" tIns="0" rIns="0" bIns="0" rtlCol="0" anchor="t"/>
-          <a:lstStyle/>
-          <a:p>
-            <a:pPr indent="0" marL="0">
-              <a:buNone/>
-            </a:pPr>
-            <a:r>
-              <a:rPr lang="en-US" sz="5400" b="1" dirty="0">
-                <a:solidFill>
-                  <a:schemeClr val="accent3"/>
-                </a:solidFill>
-                <a:latin typeface="Arial" pitchFamily="34" charset="0"/>
-                <a:ea typeface="Arial" pitchFamily="34" charset="-122"/>
-                <a:cs typeface="Arial" pitchFamily="34" charset="-120"/>
-              </a:rPr>
-              <a:t>Honest</a:t>
-            </a:r>
-            <a:endParaRPr lang="en-US" sz="5400" dirty="0"/>
-          </a:p>
-        </p:txBody>
-      </p:sp>
-      <p:sp>
-        <p:nvSpPr>
-          <p:cNvPr id="15" name="Text 12"/>
-          <p:cNvSpPr txBox="1"/>
-          <p:nvPr/>
-        </p:nvSpPr>
-        <p:spPr>
-          <a:xfrm>
-            <a:off x="8478317" y="2834640"/>
-            <a:ext cx="2844698" cy="685800"/>
-          </a:xfrm>
-          <a:prstGeom prst="rect">
-            <a:avLst/>
-          </a:prstGeom>
-          <a:noFill/>
-          <a:ln/>
-        </p:spPr>
-        <p:txBody>
-          <a:bodyPr wrap="square" lIns="0" tIns="0" rIns="0" bIns="0" rtlCol="0" anchor="t"/>
-          <a:lstStyle/>
-          <a:p>
-            <a:pPr indent="0" marL="0">
-              <a:buNone/>
-            </a:pPr>
-            <a:r>
-              <a:rPr lang="en-US" sz="1800" b="1" dirty="0">
-                <a:solidFill>
-                  <a:schemeClr val="tx1"/>
-                </a:solidFill>
-                <a:latin typeface="Calibri" pitchFamily="34" charset="0"/>
-                <a:ea typeface="Calibri" pitchFamily="34" charset="-122"/>
-                <a:cs typeface="Calibri" pitchFamily="34" charset="-120"/>
-              </a:rPr>
-              <a:t>chances you can trust</a:t>
-            </a:r>
-            <a:endParaRPr lang="en-US" sz="1800" dirty="0"/>
-          </a:p>
-        </p:txBody>
-      </p:sp>
-      <p:sp>
-        <p:nvSpPr>
-          <p:cNvPr id="16" name="Text 13"/>
-          <p:cNvSpPr txBox="1"/>
-          <p:nvPr/>
-        </p:nvSpPr>
-        <p:spPr>
-          <a:xfrm>
-            <a:off x="8478317" y="3520440"/>
-            <a:ext cx="2844698" cy="822960"/>
-          </a:xfrm>
-          <a:prstGeom prst="rect">
-            <a:avLst/>
-          </a:prstGeom>
-          <a:noFill/>
-          <a:ln/>
-        </p:spPr>
-        <p:txBody>
-          <a:bodyPr wrap="square" lIns="0" tIns="0" rIns="0" bIns="0" rtlCol="0" anchor="t"/>
-          <a:lstStyle/>
-          <a:p>
-            <a:pPr indent="0" marL="0">
-              <a:buNone/>
-            </a:pPr>
-            <a:r>
-              <a:rPr lang="en-US" sz="1500" dirty="0">
-                <a:solidFill>
-                  <a:schemeClr val="tx2"/>
-                </a:solidFill>
-                <a:latin typeface="Calibri" pitchFamily="34" charset="0"/>
-                <a:ea typeface="Calibri" pitchFamily="34" charset="-122"/>
-                <a:cs typeface="Calibri" pitchFamily="34" charset="-120"/>
-              </a:rPr>
-              <a:t>When the model says 60%, about 60 in 100 such campaigns succeed.</a:t>
-            </a:r>
-            <a:endParaRPr lang="en-US" sz="1500" dirty="0"/>
-          </a:p>
-        </p:txBody>
-      </p:sp>
-      <p:sp>
-        <p:nvSpPr>
-          <p:cNvPr id="17" name="Text 14"/>
-          <p:cNvSpPr txBox="1"/>
-          <p:nvPr/>
-        </p:nvSpPr>
-        <p:spPr>
-          <a:xfrm>
-            <a:off x="548640" y="4937760"/>
-            <a:ext cx="11094415" cy="822960"/>
-          </a:xfrm>
-          <a:prstGeom prst="rect">
-            <a:avLst/>
-          </a:prstGeom>
-          <a:noFill/>
-          <a:ln/>
-        </p:spPr>
-        <p:txBody>
-          <a:bodyPr wrap="square" lIns="0" tIns="0" rIns="0" bIns="0" rtlCol="0" anchor="t"/>
-          <a:lstStyle/>
-          <a:p>
-            <a:pPr indent="0" marL="0">
-              <a:buNone/>
-            </a:pPr>
-            <a:r>
-              <a:rPr lang="en-US" sz="1600" dirty="0">
-                <a:solidFill>
-                  <a:schemeClr val="tx2"/>
-                </a:solidFill>
-                <a:latin typeface="Calibri" pitchFamily="34" charset="0"/>
-                <a:ea typeface="Calibri" pitchFamily="34" charset="-122"/>
-                <a:cs typeface="Calibri" pitchFamily="34" charset="-120"/>
-              </a:rPr>
-              <a:t>Biggest misses: tiny board game campaigns that failed, and huge tech and food campaigns that succeeded. The reasons (product quality, audience, marketing) are not in the data.</a:t>
-            </a:r>
-            <a:endParaRPr lang="en-US" sz="1600" dirty="0"/>
-          </a:p>
-        </p:txBody>
-      </p:sp>
-      <p:sp>
-        <p:nvSpPr>
-          <p:cNvPr id="18" name="Text 0"/>
+          <p:cNvPr id="13" name="Text 0"/>
           <p:cNvSpPr/>
           <p:nvPr>
             <p:ph idx="102" type="body" hasCustomPrompt="1"/>
@@ -5497,7 +5409,7 @@
                   <a:schemeClr val="accent3"/>
                 </a:solidFill>
               </a:rPr>
-              <a:t>WHAT THE MODEL LOOKS AT</a:t>
+              <a:t>STRENGTHS AND WEAKNESSES</a:t>
             </a:r>
             <a:endParaRPr lang="en-US" sz="1200" dirty="0"/>
           </a:p>
@@ -5535,42 +5447,26 @@
                   <a:schemeClr val="tx1"/>
                 </a:solidFill>
               </a:rPr>
-              <a:t>Category and goal drive the prediction</a:t>
+              <a:t>What it gets right, and where it fails</a:t>
             </a:r>
             <a:endParaRPr lang="en-US" sz="3400" dirty="0"/>
           </a:p>
         </p:txBody>
       </p:sp>
-      <p:graphicFrame>
-        <p:nvGraphicFramePr>
-          <p:cNvPr id="5" name="Feature importance" descr=""/>
-          <p:cNvGraphicFramePr/>
-          <p:nvPr/>
-        </p:nvGraphicFramePr>
-        <p:xfrm>
-          <a:off x="548640" y="1600200"/>
-          <a:ext cx="7589520" cy="4389120"/>
-        </p:xfrm>
-        <a:graphic xmlns:a="http://schemas.openxmlformats.org/drawingml/2006/main">
-          <a:graphicData uri="http://schemas.openxmlformats.org/drawingml/2006/chart">
-            <c:chart xmlns:c="http://schemas.openxmlformats.org/drawingml/2006/chart" r:id="rId1"/>
-          </a:graphicData>
-        </a:graphic>
-      </p:graphicFrame>
-      <p:sp>
-        <p:nvSpPr>
-          <p:cNvPr id="6" name="Card: how to read"/>
+      <p:sp>
+        <p:nvSpPr>
+          <p:cNvPr id="5" name="Card: of successful campaigns found"/>
           <p:cNvSpPr/>
           <p:nvPr/>
         </p:nvSpPr>
         <p:spPr>
           <a:xfrm>
-            <a:off x="8503920" y="1828800"/>
-            <a:ext cx="3139135" cy="3108960"/>
+            <a:off x="548640" y="1691640"/>
+            <a:ext cx="3484778" cy="2926080"/>
           </a:xfrm>
           <a:prstGeom prst="roundRect">
             <a:avLst>
-              <a:gd name="adj" fmla="val 3529"/>
+              <a:gd name="adj" fmla="val 3750"/>
             </a:avLst>
           </a:prstGeom>
           <a:solidFill>
@@ -5586,30 +5482,69 @@
       </p:sp>
       <p:sp>
         <p:nvSpPr>
-          <p:cNvPr id="7" name="Text 3"/>
+          <p:cNvPr id="6" name="Text 3"/>
           <p:cNvSpPr txBox="1"/>
           <p:nvPr/>
         </p:nvSpPr>
         <p:spPr>
           <a:xfrm>
-            <a:off x="8823960" y="2103120"/>
-            <a:ext cx="2499055" cy="457200"/>
-          </a:xfrm>
-          <a:prstGeom prst="rect">
-            <a:avLst/>
-          </a:prstGeom>
-          <a:noFill/>
-          <a:ln/>
-        </p:spPr>
-        <p:txBody>
-          <a:bodyPr wrap="square" lIns="0" tIns="0" rIns="0" bIns="0" rtlCol="0" anchor="ctr"/>
+            <a:off x="868680" y="1920240"/>
+            <a:ext cx="2844698" cy="868680"/>
+          </a:xfrm>
+          <a:prstGeom prst="rect">
+            <a:avLst/>
+          </a:prstGeom>
+          <a:noFill/>
+          <a:ln/>
+        </p:spPr>
+        <p:txBody>
+          <a:bodyPr wrap="square" lIns="0" tIns="0" rIns="0" bIns="0" rtlCol="0" anchor="t"/>
           <a:lstStyle/>
           <a:p>
             <a:pPr indent="0" marL="0">
               <a:buNone/>
             </a:pPr>
             <a:r>
-              <a:rPr lang="en-US" sz="2000" b="1" dirty="0">
+              <a:rPr lang="en-US" sz="5400" b="1" dirty="0">
+                <a:solidFill>
+                  <a:schemeClr val="accent3"/>
+                </a:solidFill>
+                <a:latin typeface="Arial" pitchFamily="34" charset="0"/>
+                <a:ea typeface="Arial" pitchFamily="34" charset="-122"/>
+                <a:cs typeface="Arial" pitchFamily="34" charset="-120"/>
+              </a:rPr>
+              <a:t>83%</a:t>
+            </a:r>
+            <a:endParaRPr lang="en-US" sz="5400" dirty="0"/>
+          </a:p>
+        </p:txBody>
+      </p:sp>
+      <p:sp>
+        <p:nvSpPr>
+          <p:cNvPr id="7" name="Text 4"/>
+          <p:cNvSpPr txBox="1"/>
+          <p:nvPr/>
+        </p:nvSpPr>
+        <p:spPr>
+          <a:xfrm>
+            <a:off x="868680" y="2834640"/>
+            <a:ext cx="2844698" cy="685800"/>
+          </a:xfrm>
+          <a:prstGeom prst="rect">
+            <a:avLst/>
+          </a:prstGeom>
+          <a:noFill/>
+          <a:ln/>
+        </p:spPr>
+        <p:txBody>
+          <a:bodyPr wrap="square" lIns="0" tIns="0" rIns="0" bIns="0" rtlCol="0" anchor="t"/>
+          <a:lstStyle/>
+          <a:p>
+            <a:pPr indent="0" marL="0">
+              <a:buNone/>
+            </a:pPr>
+            <a:r>
+              <a:rPr lang="en-US" sz="1800" b="1" dirty="0">
                 <a:solidFill>
                   <a:schemeClr val="tx1"/>
                 </a:solidFill>
@@ -5617,22 +5552,22 @@
                 <a:ea typeface="Calibri" pitchFamily="34" charset="-122"/>
                 <a:cs typeface="Calibri" pitchFamily="34" charset="-120"/>
               </a:rPr>
-              <a:t>How to read it</a:t>
-            </a:r>
-            <a:endParaRPr lang="en-US" sz="2000" dirty="0"/>
-          </a:p>
-        </p:txBody>
-      </p:sp>
-      <p:sp>
-        <p:nvSpPr>
-          <p:cNvPr id="8" name="Text 4"/>
+              <a:t>of successful campaigns found</a:t>
+            </a:r>
+            <a:endParaRPr lang="en-US" sz="1800" dirty="0"/>
+          </a:p>
+        </p:txBody>
+      </p:sp>
+      <p:sp>
+        <p:nvSpPr>
+          <p:cNvPr id="8" name="Text 5"/>
           <p:cNvSpPr txBox="1"/>
           <p:nvPr/>
         </p:nvSpPr>
         <p:spPr>
           <a:xfrm>
-            <a:off x="8823960" y="2606040"/>
-            <a:ext cx="2499055" cy="2103120"/>
+            <a:off x="868680" y="3520440"/>
+            <a:ext cx="2844698" cy="822960"/>
           </a:xfrm>
           <a:prstGeom prst="rect">
             <a:avLst/>
@@ -5648,7 +5583,7 @@
               <a:buNone/>
             </a:pPr>
             <a:r>
-              <a:rPr lang="en-US" sz="1600" dirty="0">
+              <a:rPr lang="en-US" sz="1500" dirty="0">
                 <a:solidFill>
                   <a:schemeClr val="tx2"/>
                 </a:solidFill>
@@ -5656,7 +5591,334 @@
                 <a:ea typeface="Calibri" pitchFamily="34" charset="-122"/>
                 <a:cs typeface="Calibri" pitchFamily="34" charset="-120"/>
               </a:rPr>
-              <a:t>We scrambled one piece of information at a time and measured how much worse the model got. The most important one is set to 100.</a:t>
+              <a:t>22,266 of 26,791 successful test campaigns were called “likely to succeed”.</a:t>
+            </a:r>
+            <a:endParaRPr lang="en-US" sz="1500" dirty="0"/>
+          </a:p>
+        </p:txBody>
+      </p:sp>
+      <p:sp>
+        <p:nvSpPr>
+          <p:cNvPr id="9" name="Card: of “success” calls are false hope"/>
+          <p:cNvSpPr/>
+          <p:nvPr/>
+        </p:nvSpPr>
+        <p:spPr>
+          <a:xfrm>
+            <a:off x="4353458" y="1691640"/>
+            <a:ext cx="3484778" cy="2926080"/>
+          </a:xfrm>
+          <a:prstGeom prst="roundRect">
+            <a:avLst>
+              <a:gd name="adj" fmla="val 3750"/>
+            </a:avLst>
+          </a:prstGeom>
+          <a:solidFill>
+            <a:srgbClr val="F2F4F8"/>
+          </a:solidFill>
+          <a:ln w="12700">
+            <a:solidFill>
+              <a:srgbClr val="F2F4F8"/>
+            </a:solidFill>
+            <a:prstDash val="solid"/>
+          </a:ln>
+        </p:spPr>
+      </p:sp>
+      <p:sp>
+        <p:nvSpPr>
+          <p:cNvPr id="10" name="Text 7"/>
+          <p:cNvSpPr txBox="1"/>
+          <p:nvPr/>
+        </p:nvSpPr>
+        <p:spPr>
+          <a:xfrm>
+            <a:off x="4673498" y="1920240"/>
+            <a:ext cx="2844698" cy="868680"/>
+          </a:xfrm>
+          <a:prstGeom prst="rect">
+            <a:avLst/>
+          </a:prstGeom>
+          <a:noFill/>
+          <a:ln/>
+        </p:spPr>
+        <p:txBody>
+          <a:bodyPr wrap="square" lIns="0" tIns="0" rIns="0" bIns="0" rtlCol="0" anchor="t"/>
+          <a:lstStyle/>
+          <a:p>
+            <a:pPr indent="0" marL="0">
+              <a:buNone/>
+            </a:pPr>
+            <a:r>
+              <a:rPr lang="en-US" sz="5400" b="1" dirty="0">
+                <a:solidFill>
+                  <a:schemeClr val="accent4"/>
+                </a:solidFill>
+                <a:latin typeface="Arial" pitchFamily="34" charset="0"/>
+                <a:ea typeface="Arial" pitchFamily="34" charset="-122"/>
+                <a:cs typeface="Arial" pitchFamily="34" charset="-120"/>
+              </a:rPr>
+              <a:t>45%</a:t>
+            </a:r>
+            <a:endParaRPr lang="en-US" sz="5400" dirty="0"/>
+          </a:p>
+        </p:txBody>
+      </p:sp>
+      <p:sp>
+        <p:nvSpPr>
+          <p:cNvPr id="11" name="Text 8"/>
+          <p:cNvSpPr txBox="1"/>
+          <p:nvPr/>
+        </p:nvSpPr>
+        <p:spPr>
+          <a:xfrm>
+            <a:off x="4673498" y="2834640"/>
+            <a:ext cx="2844698" cy="685800"/>
+          </a:xfrm>
+          <a:prstGeom prst="rect">
+            <a:avLst/>
+          </a:prstGeom>
+          <a:noFill/>
+          <a:ln/>
+        </p:spPr>
+        <p:txBody>
+          <a:bodyPr wrap="square" lIns="0" tIns="0" rIns="0" bIns="0" rtlCol="0" anchor="t"/>
+          <a:lstStyle/>
+          <a:p>
+            <a:pPr indent="0" marL="0">
+              <a:buNone/>
+            </a:pPr>
+            <a:r>
+              <a:rPr lang="en-US" sz="1800" b="1" dirty="0">
+                <a:solidFill>
+                  <a:schemeClr val="tx1"/>
+                </a:solidFill>
+                <a:latin typeface="Calibri" pitchFamily="34" charset="0"/>
+                <a:ea typeface="Calibri" pitchFamily="34" charset="-122"/>
+                <a:cs typeface="Calibri" pitchFamily="34" charset="-120"/>
+              </a:rPr>
+              <a:t>of “success” calls are false hope</a:t>
+            </a:r>
+            <a:endParaRPr lang="en-US" sz="1800" dirty="0"/>
+          </a:p>
+        </p:txBody>
+      </p:sp>
+      <p:sp>
+        <p:nvSpPr>
+          <p:cNvPr id="12" name="Text 9"/>
+          <p:cNvSpPr txBox="1"/>
+          <p:nvPr/>
+        </p:nvSpPr>
+        <p:spPr>
+          <a:xfrm>
+            <a:off x="4673498" y="3520440"/>
+            <a:ext cx="2844698" cy="822960"/>
+          </a:xfrm>
+          <a:prstGeom prst="rect">
+            <a:avLst/>
+          </a:prstGeom>
+          <a:noFill/>
+          <a:ln/>
+        </p:spPr>
+        <p:txBody>
+          <a:bodyPr wrap="square" lIns="0" tIns="0" rIns="0" bIns="0" rtlCol="0" anchor="t"/>
+          <a:lstStyle/>
+          <a:p>
+            <a:pPr indent="0" marL="0">
+              <a:buNone/>
+            </a:pPr>
+            <a:r>
+              <a:rPr lang="en-US" sz="1500" dirty="0">
+                <a:solidFill>
+                  <a:schemeClr val="tx2"/>
+                </a:solidFill>
+                <a:latin typeface="Calibri" pitchFamily="34" charset="0"/>
+                <a:ea typeface="Calibri" pitchFamily="34" charset="-122"/>
+                <a:cs typeface="Calibri" pitchFamily="34" charset="-120"/>
+              </a:rPr>
+              <a:t>18,279 failed campaigns looked promising on paper.</a:t>
+            </a:r>
+            <a:endParaRPr lang="en-US" sz="1500" dirty="0"/>
+          </a:p>
+        </p:txBody>
+      </p:sp>
+      <p:sp>
+        <p:nvSpPr>
+          <p:cNvPr id="13" name="Card: chances you can trust"/>
+          <p:cNvSpPr/>
+          <p:nvPr/>
+        </p:nvSpPr>
+        <p:spPr>
+          <a:xfrm>
+            <a:off x="8158277" y="1691640"/>
+            <a:ext cx="3484778" cy="2926080"/>
+          </a:xfrm>
+          <a:prstGeom prst="roundRect">
+            <a:avLst>
+              <a:gd name="adj" fmla="val 3750"/>
+            </a:avLst>
+          </a:prstGeom>
+          <a:solidFill>
+            <a:srgbClr val="F2F4F8"/>
+          </a:solidFill>
+          <a:ln w="12700">
+            <a:solidFill>
+              <a:srgbClr val="F2F4F8"/>
+            </a:solidFill>
+            <a:prstDash val="solid"/>
+          </a:ln>
+        </p:spPr>
+      </p:sp>
+      <p:sp>
+        <p:nvSpPr>
+          <p:cNvPr id="14" name="Text 11"/>
+          <p:cNvSpPr txBox="1"/>
+          <p:nvPr/>
+        </p:nvSpPr>
+        <p:spPr>
+          <a:xfrm>
+            <a:off x="8478317" y="1920240"/>
+            <a:ext cx="2844698" cy="868680"/>
+          </a:xfrm>
+          <a:prstGeom prst="rect">
+            <a:avLst/>
+          </a:prstGeom>
+          <a:noFill/>
+          <a:ln/>
+        </p:spPr>
+        <p:txBody>
+          <a:bodyPr wrap="square" lIns="0" tIns="0" rIns="0" bIns="0" rtlCol="0" anchor="t"/>
+          <a:lstStyle/>
+          <a:p>
+            <a:pPr indent="0" marL="0">
+              <a:buNone/>
+            </a:pPr>
+            <a:r>
+              <a:rPr lang="en-US" sz="5400" b="1" dirty="0">
+                <a:solidFill>
+                  <a:schemeClr val="accent3"/>
+                </a:solidFill>
+                <a:latin typeface="Arial" pitchFamily="34" charset="0"/>
+                <a:ea typeface="Arial" pitchFamily="34" charset="-122"/>
+                <a:cs typeface="Arial" pitchFamily="34" charset="-120"/>
+              </a:rPr>
+              <a:t>Honest</a:t>
+            </a:r>
+            <a:endParaRPr lang="en-US" sz="5400" dirty="0"/>
+          </a:p>
+        </p:txBody>
+      </p:sp>
+      <p:sp>
+        <p:nvSpPr>
+          <p:cNvPr id="15" name="Text 12"/>
+          <p:cNvSpPr txBox="1"/>
+          <p:nvPr/>
+        </p:nvSpPr>
+        <p:spPr>
+          <a:xfrm>
+            <a:off x="8478317" y="2834640"/>
+            <a:ext cx="2844698" cy="685800"/>
+          </a:xfrm>
+          <a:prstGeom prst="rect">
+            <a:avLst/>
+          </a:prstGeom>
+          <a:noFill/>
+          <a:ln/>
+        </p:spPr>
+        <p:txBody>
+          <a:bodyPr wrap="square" lIns="0" tIns="0" rIns="0" bIns="0" rtlCol="0" anchor="t"/>
+          <a:lstStyle/>
+          <a:p>
+            <a:pPr indent="0" marL="0">
+              <a:buNone/>
+            </a:pPr>
+            <a:r>
+              <a:rPr lang="en-US" sz="1800" b="1" dirty="0">
+                <a:solidFill>
+                  <a:schemeClr val="tx1"/>
+                </a:solidFill>
+                <a:latin typeface="Calibri" pitchFamily="34" charset="0"/>
+                <a:ea typeface="Calibri" pitchFamily="34" charset="-122"/>
+                <a:cs typeface="Calibri" pitchFamily="34" charset="-120"/>
+              </a:rPr>
+              <a:t>chances you can trust</a:t>
+            </a:r>
+            <a:endParaRPr lang="en-US" sz="1800" dirty="0"/>
+          </a:p>
+        </p:txBody>
+      </p:sp>
+      <p:sp>
+        <p:nvSpPr>
+          <p:cNvPr id="16" name="Text 13"/>
+          <p:cNvSpPr txBox="1"/>
+          <p:nvPr/>
+        </p:nvSpPr>
+        <p:spPr>
+          <a:xfrm>
+            <a:off x="8478317" y="3520440"/>
+            <a:ext cx="2844698" cy="822960"/>
+          </a:xfrm>
+          <a:prstGeom prst="rect">
+            <a:avLst/>
+          </a:prstGeom>
+          <a:noFill/>
+          <a:ln/>
+        </p:spPr>
+        <p:txBody>
+          <a:bodyPr wrap="square" lIns="0" tIns="0" rIns="0" bIns="0" rtlCol="0" anchor="t"/>
+          <a:lstStyle/>
+          <a:p>
+            <a:pPr indent="0" marL="0">
+              <a:buNone/>
+            </a:pPr>
+            <a:r>
+              <a:rPr lang="en-US" sz="1500" dirty="0">
+                <a:solidFill>
+                  <a:schemeClr val="tx2"/>
+                </a:solidFill>
+                <a:latin typeface="Calibri" pitchFamily="34" charset="0"/>
+                <a:ea typeface="Calibri" pitchFamily="34" charset="-122"/>
+                <a:cs typeface="Calibri" pitchFamily="34" charset="-120"/>
+              </a:rPr>
+              <a:t>When the model says 60%, about 60 in 100 such campaigns succeed.</a:t>
+            </a:r>
+            <a:endParaRPr lang="en-US" sz="1500" dirty="0"/>
+          </a:p>
+        </p:txBody>
+      </p:sp>
+      <p:sp>
+        <p:nvSpPr>
+          <p:cNvPr id="17" name="Text 14"/>
+          <p:cNvSpPr txBox="1"/>
+          <p:nvPr/>
+        </p:nvSpPr>
+        <p:spPr>
+          <a:xfrm>
+            <a:off x="548640" y="4937760"/>
+            <a:ext cx="11094415" cy="822960"/>
+          </a:xfrm>
+          <a:prstGeom prst="rect">
+            <a:avLst/>
+          </a:prstGeom>
+          <a:noFill/>
+          <a:ln/>
+        </p:spPr>
+        <p:txBody>
+          <a:bodyPr wrap="square" lIns="0" tIns="0" rIns="0" bIns="0" rtlCol="0" anchor="t"/>
+          <a:lstStyle/>
+          <a:p>
+            <a:pPr indent="0" marL="0">
+              <a:buNone/>
+            </a:pPr>
+            <a:r>
+              <a:rPr lang="en-US" sz="1600" dirty="0">
+                <a:solidFill>
+                  <a:schemeClr val="tx2"/>
+                </a:solidFill>
+                <a:latin typeface="Calibri" pitchFamily="34" charset="0"/>
+                <a:ea typeface="Calibri" pitchFamily="34" charset="-122"/>
+                <a:cs typeface="Calibri" pitchFamily="34" charset="-120"/>
+              </a:rPr>
+              <a:t>Biggest misses: tiny board game campaigns that failed, and huge tech and food campaigns that succeeded. The reasons (product quality, audience, marketing) are not in the data.</a:t>
             </a:r>
             <a:endParaRPr lang="en-US" sz="1600" dirty="0"/>
           </a:p>
@@ -5664,7 +5926,7 @@
       </p:sp>
       <p:sp>
         <p:nvSpPr>
-          <p:cNvPr id="9" name="Text 0"/>
+          <p:cNvPr id="18" name="Text 0"/>
           <p:cNvSpPr/>
           <p:nvPr>
             <p:ph idx="102" type="body" hasCustomPrompt="1"/>
@@ -5688,14 +5950,6 @@
             <a:pPr indent="0" marL="0">
               <a:buNone/>
             </a:pPr>
-            <a:r>
-              <a:rPr lang="en-US" sz="1100" dirty="0">
-                <a:solidFill>
-                  <a:srgbClr val="5B6472"/>
-                </a:solidFill>
-              </a:rPr>
-              <a:t>Permutation importance on the test set, scaled so the top feature = 100</a:t>
-            </a:r>
             <a:endParaRPr lang="en-US" sz="1100" dirty="0"/>
           </a:p>
         </p:txBody>
@@ -5799,10 +6053,10 @@
             <a:r>
               <a:rPr lang="en-US" sz="1200" b="1" spc="200" kern="0" dirty="0">
                 <a:solidFill>
-                  <a:srgbClr val="CDE2FB"/>
-                </a:solidFill>
-              </a:rPr>
-              <a:t>RECOMMENDATIONS FOR CREATORS</a:t>
+                  <a:schemeClr val="accent3"/>
+                </a:solidFill>
+              </a:rPr>
+              <a:t>WHAT THE MODEL LOOKS AT</a:t>
             </a:r>
             <a:endParaRPr lang="en-US" sz="1200" dirty="0"/>
           </a:p>
@@ -5837,37 +6091,53 @@
             <a:r>
               <a:rPr lang="en-US" sz="3400" b="1" dirty="0">
                 <a:solidFill>
-                  <a:schemeClr val="bg1"/>
-                </a:solidFill>
-              </a:rPr>
-              <a:t>Three things to decide before launch</a:t>
+                  <a:schemeClr val="tx1"/>
+                </a:solidFill>
+              </a:rPr>
+              <a:t>Category and goal drive the prediction</a:t>
             </a:r>
             <a:endParaRPr lang="en-US" sz="3400" dirty="0"/>
           </a:p>
         </p:txBody>
       </p:sp>
-      <p:sp>
-        <p:nvSpPr>
-          <p:cNvPr id="5" name="Recommendation 1"/>
+      <p:graphicFrame>
+        <p:nvGraphicFramePr>
+          <p:cNvPr id="5" name="Feature importance" descr=""/>
+          <p:cNvGraphicFramePr/>
+          <p:nvPr/>
+        </p:nvGraphicFramePr>
+        <p:xfrm>
+          <a:off x="548640" y="1600200"/>
+          <a:ext cx="7589520" cy="4389120"/>
+        </p:xfrm>
+        <a:graphic xmlns:a="http://schemas.openxmlformats.org/drawingml/2006/main">
+          <a:graphicData uri="http://schemas.openxmlformats.org/drawingml/2006/chart">
+            <c:chart xmlns:c="http://schemas.openxmlformats.org/drawingml/2006/chart" r:id="rId1"/>
+          </a:graphicData>
+        </a:graphic>
+      </p:graphicFrame>
+      <p:sp>
+        <p:nvSpPr>
+          <p:cNvPr id="6" name="Card: how to read"/>
           <p:cNvSpPr/>
           <p:nvPr/>
         </p:nvSpPr>
         <p:spPr>
           <a:xfrm>
-            <a:off x="548640" y="1828800"/>
-            <a:ext cx="3484778" cy="3291840"/>
+            <a:off x="8503920" y="1828800"/>
+            <a:ext cx="3139135" cy="3108960"/>
           </a:xfrm>
           <a:prstGeom prst="roundRect">
             <a:avLst>
-              <a:gd name="adj" fmla="val 3333"/>
+              <a:gd name="adj" fmla="val 3529"/>
             </a:avLst>
           </a:prstGeom>
           <a:solidFill>
-            <a:srgbClr val="174E93"/>
+            <a:srgbClr val="F2F4F8"/>
           </a:solidFill>
           <a:ln w="12700">
             <a:solidFill>
-              <a:srgbClr val="174E93"/>
+              <a:srgbClr val="F2F4F8"/>
             </a:solidFill>
             <a:prstDash val="solid"/>
           </a:ln>
@@ -5875,39 +6145,14 @@
       </p:sp>
       <p:sp>
         <p:nvSpPr>
-          <p:cNvPr id="6" name="Recommendation number 1"/>
-          <p:cNvSpPr/>
-          <p:nvPr/>
-        </p:nvSpPr>
-        <p:spPr>
-          <a:xfrm>
-            <a:off x="914400" y="2148840"/>
-            <a:ext cx="731520" cy="731520"/>
-          </a:xfrm>
-          <a:prstGeom prst="ellipse">
-            <a:avLst/>
-          </a:prstGeom>
-          <a:solidFill>
-            <a:srgbClr val="FFFFFF"/>
-          </a:solidFill>
-          <a:ln w="12700">
-            <a:solidFill>
-              <a:srgbClr val="FFFFFF"/>
-            </a:solidFill>
-            <a:prstDash val="solid"/>
-          </a:ln>
-        </p:spPr>
-      </p:sp>
-      <p:sp>
-        <p:nvSpPr>
-          <p:cNvPr id="7" name="Text 4"/>
+          <p:cNvPr id="7" name="Text 3"/>
           <p:cNvSpPr txBox="1"/>
           <p:nvPr/>
         </p:nvSpPr>
         <p:spPr>
           <a:xfrm>
-            <a:off x="914400" y="2148840"/>
-            <a:ext cx="731520" cy="731520"/>
+            <a:off x="8823960" y="2103120"/>
+            <a:ext cx="2499055" cy="457200"/>
           </a:xfrm>
           <a:prstGeom prst="rect">
             <a:avLst/>
@@ -5919,97 +6164,58 @@
           <a:bodyPr wrap="square" lIns="0" tIns="0" rIns="0" bIns="0" rtlCol="0" anchor="ctr"/>
           <a:lstStyle/>
           <a:p>
-            <a:pPr algn="ctr" indent="0" marL="0">
-              <a:buNone/>
-            </a:pPr>
-            <a:r>
-              <a:rPr lang="en-US" sz="2800" b="1" dirty="0">
-                <a:solidFill>
-                  <a:schemeClr val="accent3"/>
+            <a:pPr indent="0" marL="0">
+              <a:buNone/>
+            </a:pPr>
+            <a:r>
+              <a:rPr lang="en-US" sz="2000" b="1" dirty="0">
+                <a:solidFill>
+                  <a:schemeClr val="tx1"/>
                 </a:solidFill>
                 <a:latin typeface="Calibri" pitchFamily="34" charset="0"/>
                 <a:ea typeface="Calibri" pitchFamily="34" charset="-122"/>
                 <a:cs typeface="Calibri" pitchFamily="34" charset="-120"/>
               </a:rPr>
-              <a:t>1</a:t>
-            </a:r>
-            <a:endParaRPr lang="en-US" sz="2800" dirty="0"/>
-          </a:p>
-        </p:txBody>
-      </p:sp>
-      <p:sp>
-        <p:nvSpPr>
-          <p:cNvPr id="8" name="Text 5"/>
+              <a:t>How to read it</a:t>
+            </a:r>
+            <a:endParaRPr lang="en-US" sz="2000" dirty="0"/>
+          </a:p>
+        </p:txBody>
+      </p:sp>
+      <p:sp>
+        <p:nvSpPr>
+          <p:cNvPr id="8" name="Text 4"/>
           <p:cNvSpPr txBox="1"/>
           <p:nvPr/>
         </p:nvSpPr>
         <p:spPr>
           <a:xfrm>
-            <a:off x="914400" y="3154680"/>
-            <a:ext cx="2753258" cy="548640"/>
-          </a:xfrm>
-          <a:prstGeom prst="rect">
-            <a:avLst/>
-          </a:prstGeom>
-          <a:noFill/>
-          <a:ln/>
-        </p:spPr>
-        <p:txBody>
-          <a:bodyPr wrap="square" lIns="0" tIns="0" rIns="0" bIns="0" rtlCol="0" anchor="ctr"/>
+            <a:off x="8823960" y="2606040"/>
+            <a:ext cx="2499055" cy="2103120"/>
+          </a:xfrm>
+          <a:prstGeom prst="rect">
+            <a:avLst/>
+          </a:prstGeom>
+          <a:noFill/>
+          <a:ln/>
+        </p:spPr>
+        <p:txBody>
+          <a:bodyPr wrap="square" lIns="0" tIns="0" rIns="0" bIns="0" rtlCol="0" anchor="t"/>
           <a:lstStyle/>
           <a:p>
             <a:pPr indent="0" marL="0">
               <a:buNone/>
             </a:pPr>
             <a:r>
-              <a:rPr lang="en-US" sz="2400" b="1" dirty="0">
-                <a:solidFill>
-                  <a:schemeClr val="bg1"/>
+              <a:rPr lang="en-US" sz="1600" dirty="0">
+                <a:solidFill>
+                  <a:schemeClr val="tx2"/>
                 </a:solidFill>
                 <a:latin typeface="Calibri" pitchFamily="34" charset="0"/>
                 <a:ea typeface="Calibri" pitchFamily="34" charset="-122"/>
                 <a:cs typeface="Calibri" pitchFamily="34" charset="-120"/>
               </a:rPr>
-              <a:t>Ask for less</a:t>
-            </a:r>
-            <a:endParaRPr lang="en-US" sz="2400" dirty="0"/>
-          </a:p>
-        </p:txBody>
-      </p:sp>
-      <p:sp>
-        <p:nvSpPr>
-          <p:cNvPr id="9" name="Text 6"/>
-          <p:cNvSpPr txBox="1"/>
-          <p:nvPr/>
-        </p:nvSpPr>
-        <p:spPr>
-          <a:xfrm>
-            <a:off x="914400" y="3749040"/>
-            <a:ext cx="2753258" cy="1188720"/>
-          </a:xfrm>
-          <a:prstGeom prst="rect">
-            <a:avLst/>
-          </a:prstGeom>
-          <a:noFill/>
-          <a:ln/>
-        </p:spPr>
-        <p:txBody>
-          <a:bodyPr wrap="square" lIns="0" tIns="0" rIns="0" bIns="0" rtlCol="0" anchor="t"/>
-          <a:lstStyle/>
-          <a:p>
-            <a:pPr indent="0" marL="0">
-              <a:buNone/>
-            </a:pPr>
-            <a:r>
-              <a:rPr lang="en-US" sz="1600" dirty="0">
-                <a:solidFill>
-                  <a:srgbClr val="DCE7F7"/>
-                </a:solidFill>
-                <a:latin typeface="Calibri" pitchFamily="34" charset="0"/>
-                <a:ea typeface="Calibri" pitchFamily="34" charset="-122"/>
-                <a:cs typeface="Calibri" pitchFamily="34" charset="-120"/>
-              </a:rPr>
-              <a:t>Set the lowest goal that really funds the project. Add extras as stretch goals.</a:t>
+              <a:t>We scrambled one piece of information at a time and measured how much worse the model got. The most important one is set to 100.</a:t>
             </a:r>
             <a:endParaRPr lang="en-US" sz="1600" dirty="0"/>
           </a:p>
@@ -6017,384 +6223,7 @@
       </p:sp>
       <p:sp>
         <p:nvSpPr>
-          <p:cNvPr id="10" name="Recommendation 2"/>
-          <p:cNvSpPr/>
-          <p:nvPr/>
-        </p:nvSpPr>
-        <p:spPr>
-          <a:xfrm>
-            <a:off x="4353458" y="1828800"/>
-            <a:ext cx="3484778" cy="3291840"/>
-          </a:xfrm>
-          <a:prstGeom prst="roundRect">
-            <a:avLst>
-              <a:gd name="adj" fmla="val 3333"/>
-            </a:avLst>
-          </a:prstGeom>
-          <a:solidFill>
-            <a:srgbClr val="174E93"/>
-          </a:solidFill>
-          <a:ln w="12700">
-            <a:solidFill>
-              <a:srgbClr val="174E93"/>
-            </a:solidFill>
-            <a:prstDash val="solid"/>
-          </a:ln>
-        </p:spPr>
-      </p:sp>
-      <p:sp>
-        <p:nvSpPr>
-          <p:cNvPr id="11" name="Recommendation number 2"/>
-          <p:cNvSpPr/>
-          <p:nvPr/>
-        </p:nvSpPr>
-        <p:spPr>
-          <a:xfrm>
-            <a:off x="4719218" y="2148840"/>
-            <a:ext cx="731520" cy="731520"/>
-          </a:xfrm>
-          <a:prstGeom prst="ellipse">
-            <a:avLst/>
-          </a:prstGeom>
-          <a:solidFill>
-            <a:srgbClr val="FFFFFF"/>
-          </a:solidFill>
-          <a:ln w="12700">
-            <a:solidFill>
-              <a:srgbClr val="FFFFFF"/>
-            </a:solidFill>
-            <a:prstDash val="solid"/>
-          </a:ln>
-        </p:spPr>
-      </p:sp>
-      <p:sp>
-        <p:nvSpPr>
-          <p:cNvPr id="12" name="Text 9"/>
-          <p:cNvSpPr txBox="1"/>
-          <p:nvPr/>
-        </p:nvSpPr>
-        <p:spPr>
-          <a:xfrm>
-            <a:off x="4719218" y="2148840"/>
-            <a:ext cx="731520" cy="731520"/>
-          </a:xfrm>
-          <a:prstGeom prst="rect">
-            <a:avLst/>
-          </a:prstGeom>
-          <a:noFill/>
-          <a:ln/>
-        </p:spPr>
-        <p:txBody>
-          <a:bodyPr wrap="square" lIns="0" tIns="0" rIns="0" bIns="0" rtlCol="0" anchor="ctr"/>
-          <a:lstStyle/>
-          <a:p>
-            <a:pPr algn="ctr" indent="0" marL="0">
-              <a:buNone/>
-            </a:pPr>
-            <a:r>
-              <a:rPr lang="en-US" sz="2800" b="1" dirty="0">
-                <a:solidFill>
-                  <a:schemeClr val="accent3"/>
-                </a:solidFill>
-                <a:latin typeface="Calibri" pitchFamily="34" charset="0"/>
-                <a:ea typeface="Calibri" pitchFamily="34" charset="-122"/>
-                <a:cs typeface="Calibri" pitchFamily="34" charset="-120"/>
-              </a:rPr>
-              <a:t>2</a:t>
-            </a:r>
-            <a:endParaRPr lang="en-US" sz="2800" dirty="0"/>
-          </a:p>
-        </p:txBody>
-      </p:sp>
-      <p:sp>
-        <p:nvSpPr>
-          <p:cNvPr id="13" name="Text 10"/>
-          <p:cNvSpPr txBox="1"/>
-          <p:nvPr/>
-        </p:nvSpPr>
-        <p:spPr>
-          <a:xfrm>
-            <a:off x="4719218" y="3154680"/>
-            <a:ext cx="2753258" cy="548640"/>
-          </a:xfrm>
-          <a:prstGeom prst="rect">
-            <a:avLst/>
-          </a:prstGeom>
-          <a:noFill/>
-          <a:ln/>
-        </p:spPr>
-        <p:txBody>
-          <a:bodyPr wrap="square" lIns="0" tIns="0" rIns="0" bIns="0" rtlCol="0" anchor="ctr"/>
-          <a:lstStyle/>
-          <a:p>
-            <a:pPr indent="0" marL="0">
-              <a:buNone/>
-            </a:pPr>
-            <a:r>
-              <a:rPr lang="en-US" sz="2400" b="1" dirty="0">
-                <a:solidFill>
-                  <a:schemeClr val="bg1"/>
-                </a:solidFill>
-                <a:latin typeface="Calibri" pitchFamily="34" charset="0"/>
-                <a:ea typeface="Calibri" pitchFamily="34" charset="-122"/>
-                <a:cs typeface="Calibri" pitchFamily="34" charset="-120"/>
-              </a:rPr>
-              <a:t>Plan the length</a:t>
-            </a:r>
-            <a:endParaRPr lang="en-US" sz="2400" dirty="0"/>
-          </a:p>
-        </p:txBody>
-      </p:sp>
-      <p:sp>
-        <p:nvSpPr>
-          <p:cNvPr id="14" name="Text 11"/>
-          <p:cNvSpPr txBox="1"/>
-          <p:nvPr/>
-        </p:nvSpPr>
-        <p:spPr>
-          <a:xfrm>
-            <a:off x="4719218" y="3749040"/>
-            <a:ext cx="2753258" cy="1188720"/>
-          </a:xfrm>
-          <a:prstGeom prst="rect">
-            <a:avLst/>
-          </a:prstGeom>
-          <a:noFill/>
-          <a:ln/>
-        </p:spPr>
-        <p:txBody>
-          <a:bodyPr wrap="square" lIns="0" tIns="0" rIns="0" bIns="0" rtlCol="0" anchor="t"/>
-          <a:lstStyle/>
-          <a:p>
-            <a:pPr indent="0" marL="0">
-              <a:buNone/>
-            </a:pPr>
-            <a:r>
-              <a:rPr lang="en-US" sz="1600" dirty="0">
-                <a:solidFill>
-                  <a:srgbClr val="DCE7F7"/>
-                </a:solidFill>
-                <a:latin typeface="Calibri" pitchFamily="34" charset="0"/>
-                <a:ea typeface="Calibri" pitchFamily="34" charset="-122"/>
-                <a:cs typeface="Calibri" pitchFamily="34" charset="-120"/>
-              </a:rPr>
-              <a:t>Don’t just keep the 30-day default, and avoid 60-day campaigns.</a:t>
-            </a:r>
-            <a:endParaRPr lang="en-US" sz="1600" dirty="0"/>
-          </a:p>
-        </p:txBody>
-      </p:sp>
-      <p:sp>
-        <p:nvSpPr>
-          <p:cNvPr id="15" name="Recommendation 3"/>
-          <p:cNvSpPr/>
-          <p:nvPr/>
-        </p:nvSpPr>
-        <p:spPr>
-          <a:xfrm>
-            <a:off x="8158277" y="1828800"/>
-            <a:ext cx="3484778" cy="3291840"/>
-          </a:xfrm>
-          <a:prstGeom prst="roundRect">
-            <a:avLst>
-              <a:gd name="adj" fmla="val 3333"/>
-            </a:avLst>
-          </a:prstGeom>
-          <a:solidFill>
-            <a:srgbClr val="174E93"/>
-          </a:solidFill>
-          <a:ln w="12700">
-            <a:solidFill>
-              <a:srgbClr val="174E93"/>
-            </a:solidFill>
-            <a:prstDash val="solid"/>
-          </a:ln>
-        </p:spPr>
-      </p:sp>
-      <p:sp>
-        <p:nvSpPr>
-          <p:cNvPr id="16" name="Recommendation number 3"/>
-          <p:cNvSpPr/>
-          <p:nvPr/>
-        </p:nvSpPr>
-        <p:spPr>
-          <a:xfrm>
-            <a:off x="8524037" y="2148840"/>
-            <a:ext cx="731520" cy="731520"/>
-          </a:xfrm>
-          <a:prstGeom prst="ellipse">
-            <a:avLst/>
-          </a:prstGeom>
-          <a:solidFill>
-            <a:srgbClr val="FFFFFF"/>
-          </a:solidFill>
-          <a:ln w="12700">
-            <a:solidFill>
-              <a:srgbClr val="FFFFFF"/>
-            </a:solidFill>
-            <a:prstDash val="solid"/>
-          </a:ln>
-        </p:spPr>
-      </p:sp>
-      <p:sp>
-        <p:nvSpPr>
-          <p:cNvPr id="17" name="Text 14"/>
-          <p:cNvSpPr txBox="1"/>
-          <p:nvPr/>
-        </p:nvSpPr>
-        <p:spPr>
-          <a:xfrm>
-            <a:off x="8524037" y="2148840"/>
-            <a:ext cx="731520" cy="731520"/>
-          </a:xfrm>
-          <a:prstGeom prst="rect">
-            <a:avLst/>
-          </a:prstGeom>
-          <a:noFill/>
-          <a:ln/>
-        </p:spPr>
-        <p:txBody>
-          <a:bodyPr wrap="square" lIns="0" tIns="0" rIns="0" bIns="0" rtlCol="0" anchor="ctr"/>
-          <a:lstStyle/>
-          <a:p>
-            <a:pPr algn="ctr" indent="0" marL="0">
-              <a:buNone/>
-            </a:pPr>
-            <a:r>
-              <a:rPr lang="en-US" sz="2800" b="1" dirty="0">
-                <a:solidFill>
-                  <a:schemeClr val="accent3"/>
-                </a:solidFill>
-                <a:latin typeface="Calibri" pitchFamily="34" charset="0"/>
-                <a:ea typeface="Calibri" pitchFamily="34" charset="-122"/>
-                <a:cs typeface="Calibri" pitchFamily="34" charset="-120"/>
-              </a:rPr>
-              <a:t>3</a:t>
-            </a:r>
-            <a:endParaRPr lang="en-US" sz="2800" dirty="0"/>
-          </a:p>
-        </p:txBody>
-      </p:sp>
-      <p:sp>
-        <p:nvSpPr>
-          <p:cNvPr id="18" name="Text 15"/>
-          <p:cNvSpPr txBox="1"/>
-          <p:nvPr/>
-        </p:nvSpPr>
-        <p:spPr>
-          <a:xfrm>
-            <a:off x="8524037" y="3154680"/>
-            <a:ext cx="2753258" cy="548640"/>
-          </a:xfrm>
-          <a:prstGeom prst="rect">
-            <a:avLst/>
-          </a:prstGeom>
-          <a:noFill/>
-          <a:ln/>
-        </p:spPr>
-        <p:txBody>
-          <a:bodyPr wrap="square" lIns="0" tIns="0" rIns="0" bIns="0" rtlCol="0" anchor="ctr"/>
-          <a:lstStyle/>
-          <a:p>
-            <a:pPr indent="0" marL="0">
-              <a:buNone/>
-            </a:pPr>
-            <a:r>
-              <a:rPr lang="en-US" sz="2400" b="1" dirty="0">
-                <a:solidFill>
-                  <a:schemeClr val="bg1"/>
-                </a:solidFill>
-                <a:latin typeface="Calibri" pitchFamily="34" charset="0"/>
-                <a:ea typeface="Calibri" pitchFamily="34" charset="-122"/>
-                <a:cs typeface="Calibri" pitchFamily="34" charset="-120"/>
-              </a:rPr>
-              <a:t>Know your category</a:t>
-            </a:r>
-            <a:endParaRPr lang="en-US" sz="2400" dirty="0"/>
-          </a:p>
-        </p:txBody>
-      </p:sp>
-      <p:sp>
-        <p:nvSpPr>
-          <p:cNvPr id="19" name="Text 16"/>
-          <p:cNvSpPr txBox="1"/>
-          <p:nvPr/>
-        </p:nvSpPr>
-        <p:spPr>
-          <a:xfrm>
-            <a:off x="8524037" y="3749040"/>
-            <a:ext cx="2753258" cy="1188720"/>
-          </a:xfrm>
-          <a:prstGeom prst="rect">
-            <a:avLst/>
-          </a:prstGeom>
-          <a:noFill/>
-          <a:ln/>
-        </p:spPr>
-        <p:txBody>
-          <a:bodyPr wrap="square" lIns="0" tIns="0" rIns="0" bIns="0" rtlCol="0" anchor="t"/>
-          <a:lstStyle/>
-          <a:p>
-            <a:pPr indent="0" marL="0">
-              <a:buNone/>
-            </a:pPr>
-            <a:r>
-              <a:rPr lang="en-US" sz="1600" dirty="0">
-                <a:solidFill>
-                  <a:srgbClr val="DCE7F7"/>
-                </a:solidFill>
-                <a:latin typeface="Calibri" pitchFamily="34" charset="0"/>
-                <a:ea typeface="Calibri" pitchFamily="34" charset="-122"/>
-                <a:cs typeface="Calibri" pitchFamily="34" charset="-120"/>
-              </a:rPr>
-              <a:t>In Technology, Food or Fashion, build an audience before you launch.</a:t>
-            </a:r>
-            <a:endParaRPr lang="en-US" sz="1600" dirty="0"/>
-          </a:p>
-        </p:txBody>
-      </p:sp>
-      <p:sp>
-        <p:nvSpPr>
-          <p:cNvPr id="20" name="Text 17"/>
-          <p:cNvSpPr txBox="1"/>
-          <p:nvPr/>
-        </p:nvSpPr>
-        <p:spPr>
-          <a:xfrm>
-            <a:off x="548640" y="5440680"/>
-            <a:ext cx="11094415" cy="457200"/>
-          </a:xfrm>
-          <a:prstGeom prst="rect">
-            <a:avLst/>
-          </a:prstGeom>
-          <a:noFill/>
-          <a:ln/>
-        </p:spPr>
-        <p:txBody>
-          <a:bodyPr wrap="square" lIns="0" tIns="0" rIns="0" bIns="0" rtlCol="0" anchor="ctr"/>
-          <a:lstStyle/>
-          <a:p>
-            <a:pPr indent="0" marL="0">
-              <a:buNone/>
-            </a:pPr>
-            <a:r>
-              <a:rPr lang="en-US" sz="1600" i="1" dirty="0">
-                <a:solidFill>
-                  <a:srgbClr val="DCE7F7"/>
-                </a:solidFill>
-                <a:latin typeface="Calibri" pitchFamily="34" charset="0"/>
-                <a:ea typeface="Calibri" pitchFamily="34" charset="-122"/>
-                <a:cs typeface="Calibri" pitchFamily="34" charset="-120"/>
-              </a:rPr>
-              <a:t>Patterns from past campaigns, not guarantees.</a:t>
-            </a:r>
-            <a:endParaRPr lang="en-US" sz="1600" dirty="0"/>
-          </a:p>
-        </p:txBody>
-      </p:sp>
-      <p:sp>
-        <p:nvSpPr>
-          <p:cNvPr id="21" name="Text 0"/>
+          <p:cNvPr id="9" name="Text 0"/>
           <p:cNvSpPr/>
           <p:nvPr>
             <p:ph idx="102" type="body" hasCustomPrompt="1"/>
@@ -6418,6 +6247,14 @@
             <a:pPr indent="0" marL="0">
               <a:buNone/>
             </a:pPr>
+            <a:r>
+              <a:rPr lang="en-US" sz="1100" dirty="0">
+                <a:solidFill>
+                  <a:srgbClr val="5B6472"/>
+                </a:solidFill>
+              </a:rPr>
+              <a:t>Permutation importance on the test set, scaled so the top feature = 100</a:t>
+            </a:r>
             <a:endParaRPr lang="en-US" sz="1100" dirty="0"/>
           </a:p>
         </p:txBody>
@@ -6452,7 +6289,7 @@
             <a:lvl1pPr>
               <a:defRPr sz="1100">
                 <a:solidFill>
-                  <a:srgbClr val="DCE7F7"/>
+                  <a:srgbClr val="5B6472"/>
                 </a:solidFill>
               </a:defRPr>
             </a:lvl1pPr>
@@ -6521,10 +6358,10 @@
             <a:r>
               <a:rPr lang="en-US" sz="1200" b="1" spc="200" kern="0" dirty="0">
                 <a:solidFill>
-                  <a:schemeClr val="accent3"/>
-                </a:solidFill>
-              </a:rPr>
-              <a:t>DATA PRODUCT</a:t>
+                  <a:srgbClr val="CDE2FB"/>
+                </a:solidFill>
+              </a:rPr>
+              <a:t>RECOMMENDATIONS FOR CREATORS</a:t>
             </a:r>
             <a:endParaRPr lang="en-US" sz="1200" dirty="0"/>
           </a:p>
@@ -6559,10 +6396,10 @@
             <a:r>
               <a:rPr lang="en-US" sz="3400" b="1" dirty="0">
                 <a:solidFill>
-                  <a:schemeClr val="tx1"/>
-                </a:solidFill>
-              </a:rPr>
-              <a:t>The Campaign Checker</a:t>
+                  <a:schemeClr val="bg1"/>
+                </a:solidFill>
+              </a:rPr>
+              <a:t>Three things to decide before launch</a:t>
             </a:r>
             <a:endParaRPr lang="en-US" sz="3400" dirty="0"/>
           </a:p>
@@ -6570,14 +6407,66 @@
       </p:sp>
       <p:sp>
         <p:nvSpPr>
-          <p:cNvPr id="5" name="Text 2"/>
+          <p:cNvPr id="5" name="Recommendation 1"/>
+          <p:cNvSpPr/>
+          <p:nvPr/>
+        </p:nvSpPr>
+        <p:spPr>
+          <a:xfrm>
+            <a:off x="548640" y="1828800"/>
+            <a:ext cx="3484778" cy="3291840"/>
+          </a:xfrm>
+          <a:prstGeom prst="roundRect">
+            <a:avLst>
+              <a:gd name="adj" fmla="val 3333"/>
+            </a:avLst>
+          </a:prstGeom>
+          <a:solidFill>
+            <a:srgbClr val="174E93"/>
+          </a:solidFill>
+          <a:ln w="12700">
+            <a:solidFill>
+              <a:srgbClr val="174E93"/>
+            </a:solidFill>
+            <a:prstDash val="solid"/>
+          </a:ln>
+        </p:spPr>
+      </p:sp>
+      <p:sp>
+        <p:nvSpPr>
+          <p:cNvPr id="6" name="Recommendation number 1"/>
+          <p:cNvSpPr/>
+          <p:nvPr/>
+        </p:nvSpPr>
+        <p:spPr>
+          <a:xfrm>
+            <a:off x="914400" y="2148840"/>
+            <a:ext cx="731520" cy="731520"/>
+          </a:xfrm>
+          <a:prstGeom prst="ellipse">
+            <a:avLst/>
+          </a:prstGeom>
+          <a:solidFill>
+            <a:srgbClr val="FFFFFF"/>
+          </a:solidFill>
+          <a:ln w="12700">
+            <a:solidFill>
+              <a:srgbClr val="FFFFFF"/>
+            </a:solidFill>
+            <a:prstDash val="solid"/>
+          </a:ln>
+        </p:spPr>
+      </p:sp>
+      <p:sp>
+        <p:nvSpPr>
+          <p:cNvPr id="7" name="Text 4"/>
           <p:cNvSpPr txBox="1"/>
           <p:nvPr/>
         </p:nvSpPr>
         <p:spPr>
           <a:xfrm>
-            <a:off x="548640" y="1600200"/>
-            <a:ext cx="6583680" cy="411480"/>
+            <a:off x="914400" y="2148840"/>
+            <a:ext cx="731520" cy="731520"/>
           </a:xfrm>
           <a:prstGeom prst="rect">
             <a:avLst/>
@@ -6589,18 +6478,688 @@
           <a:bodyPr wrap="square" lIns="0" tIns="0" rIns="0" bIns="0" rtlCol="0" anchor="ctr"/>
           <a:lstStyle/>
           <a:p>
-            <a:pPr indent="0" marL="0">
-              <a:buNone/>
-            </a:pPr>
-            <a:r>
-              <a:rPr lang="en-US" sz="1600" dirty="0">
-                <a:solidFill>
-                  <a:schemeClr val="tx2"/>
+            <a:pPr algn="ctr" indent="0" marL="0">
+              <a:buNone/>
+            </a:pPr>
+            <a:r>
+              <a:rPr lang="en-US" sz="2800" b="1" dirty="0">
+                <a:solidFill>
+                  <a:schemeClr val="accent3"/>
                 </a:solidFill>
                 <a:latin typeface="Calibri" pitchFamily="34" charset="0"/>
                 <a:ea typeface="Calibri" pitchFamily="34" charset="-122"/>
                 <a:cs typeface="Calibri" pitchFamily="34" charset="-120"/>
               </a:rPr>
+              <a:t>1</a:t>
+            </a:r>
+            <a:endParaRPr lang="en-US" sz="2800" dirty="0"/>
+          </a:p>
+        </p:txBody>
+      </p:sp>
+      <p:sp>
+        <p:nvSpPr>
+          <p:cNvPr id="8" name="Text 5"/>
+          <p:cNvSpPr txBox="1"/>
+          <p:nvPr/>
+        </p:nvSpPr>
+        <p:spPr>
+          <a:xfrm>
+            <a:off x="914400" y="3154680"/>
+            <a:ext cx="2753258" cy="548640"/>
+          </a:xfrm>
+          <a:prstGeom prst="rect">
+            <a:avLst/>
+          </a:prstGeom>
+          <a:noFill/>
+          <a:ln/>
+        </p:spPr>
+        <p:txBody>
+          <a:bodyPr wrap="square" lIns="0" tIns="0" rIns="0" bIns="0" rtlCol="0" anchor="ctr"/>
+          <a:lstStyle/>
+          <a:p>
+            <a:pPr indent="0" marL="0">
+              <a:buNone/>
+            </a:pPr>
+            <a:r>
+              <a:rPr lang="en-US" sz="2400" b="1" dirty="0">
+                <a:solidFill>
+                  <a:schemeClr val="bg1"/>
+                </a:solidFill>
+                <a:latin typeface="Calibri" pitchFamily="34" charset="0"/>
+                <a:ea typeface="Calibri" pitchFamily="34" charset="-122"/>
+                <a:cs typeface="Calibri" pitchFamily="34" charset="-120"/>
+              </a:rPr>
+              <a:t>Ask for less</a:t>
+            </a:r>
+            <a:endParaRPr lang="en-US" sz="2400" dirty="0"/>
+          </a:p>
+        </p:txBody>
+      </p:sp>
+      <p:sp>
+        <p:nvSpPr>
+          <p:cNvPr id="9" name="Text 6"/>
+          <p:cNvSpPr txBox="1"/>
+          <p:nvPr/>
+        </p:nvSpPr>
+        <p:spPr>
+          <a:xfrm>
+            <a:off x="914400" y="3749040"/>
+            <a:ext cx="2753258" cy="1188720"/>
+          </a:xfrm>
+          <a:prstGeom prst="rect">
+            <a:avLst/>
+          </a:prstGeom>
+          <a:noFill/>
+          <a:ln/>
+        </p:spPr>
+        <p:txBody>
+          <a:bodyPr wrap="square" lIns="0" tIns="0" rIns="0" bIns="0" rtlCol="0" anchor="t"/>
+          <a:lstStyle/>
+          <a:p>
+            <a:pPr indent="0" marL="0">
+              <a:buNone/>
+            </a:pPr>
+            <a:r>
+              <a:rPr lang="en-US" sz="1600" dirty="0">
+                <a:solidFill>
+                  <a:srgbClr val="DCE7F7"/>
+                </a:solidFill>
+                <a:latin typeface="Calibri" pitchFamily="34" charset="0"/>
+                <a:ea typeface="Calibri" pitchFamily="34" charset="-122"/>
+                <a:cs typeface="Calibri" pitchFamily="34" charset="-120"/>
+              </a:rPr>
+              <a:t>Set the lowest goal that really funds the project. Add extras as stretch goals.</a:t>
+            </a:r>
+            <a:endParaRPr lang="en-US" sz="1600" dirty="0"/>
+          </a:p>
+        </p:txBody>
+      </p:sp>
+      <p:sp>
+        <p:nvSpPr>
+          <p:cNvPr id="10" name="Recommendation 2"/>
+          <p:cNvSpPr/>
+          <p:nvPr/>
+        </p:nvSpPr>
+        <p:spPr>
+          <a:xfrm>
+            <a:off x="4353458" y="1828800"/>
+            <a:ext cx="3484778" cy="3291840"/>
+          </a:xfrm>
+          <a:prstGeom prst="roundRect">
+            <a:avLst>
+              <a:gd name="adj" fmla="val 3333"/>
+            </a:avLst>
+          </a:prstGeom>
+          <a:solidFill>
+            <a:srgbClr val="174E93"/>
+          </a:solidFill>
+          <a:ln w="12700">
+            <a:solidFill>
+              <a:srgbClr val="174E93"/>
+            </a:solidFill>
+            <a:prstDash val="solid"/>
+          </a:ln>
+        </p:spPr>
+      </p:sp>
+      <p:sp>
+        <p:nvSpPr>
+          <p:cNvPr id="11" name="Recommendation number 2"/>
+          <p:cNvSpPr/>
+          <p:nvPr/>
+        </p:nvSpPr>
+        <p:spPr>
+          <a:xfrm>
+            <a:off x="4719218" y="2148840"/>
+            <a:ext cx="731520" cy="731520"/>
+          </a:xfrm>
+          <a:prstGeom prst="ellipse">
+            <a:avLst/>
+          </a:prstGeom>
+          <a:solidFill>
+            <a:srgbClr val="FFFFFF"/>
+          </a:solidFill>
+          <a:ln w="12700">
+            <a:solidFill>
+              <a:srgbClr val="FFFFFF"/>
+            </a:solidFill>
+            <a:prstDash val="solid"/>
+          </a:ln>
+        </p:spPr>
+      </p:sp>
+      <p:sp>
+        <p:nvSpPr>
+          <p:cNvPr id="12" name="Text 9"/>
+          <p:cNvSpPr txBox="1"/>
+          <p:nvPr/>
+        </p:nvSpPr>
+        <p:spPr>
+          <a:xfrm>
+            <a:off x="4719218" y="2148840"/>
+            <a:ext cx="731520" cy="731520"/>
+          </a:xfrm>
+          <a:prstGeom prst="rect">
+            <a:avLst/>
+          </a:prstGeom>
+          <a:noFill/>
+          <a:ln/>
+        </p:spPr>
+        <p:txBody>
+          <a:bodyPr wrap="square" lIns="0" tIns="0" rIns="0" bIns="0" rtlCol="0" anchor="ctr"/>
+          <a:lstStyle/>
+          <a:p>
+            <a:pPr algn="ctr" indent="0" marL="0">
+              <a:buNone/>
+            </a:pPr>
+            <a:r>
+              <a:rPr lang="en-US" sz="2800" b="1" dirty="0">
+                <a:solidFill>
+                  <a:schemeClr val="accent3"/>
+                </a:solidFill>
+                <a:latin typeface="Calibri" pitchFamily="34" charset="0"/>
+                <a:ea typeface="Calibri" pitchFamily="34" charset="-122"/>
+                <a:cs typeface="Calibri" pitchFamily="34" charset="-120"/>
+              </a:rPr>
+              <a:t>2</a:t>
+            </a:r>
+            <a:endParaRPr lang="en-US" sz="2800" dirty="0"/>
+          </a:p>
+        </p:txBody>
+      </p:sp>
+      <p:sp>
+        <p:nvSpPr>
+          <p:cNvPr id="13" name="Text 10"/>
+          <p:cNvSpPr txBox="1"/>
+          <p:nvPr/>
+        </p:nvSpPr>
+        <p:spPr>
+          <a:xfrm>
+            <a:off x="4719218" y="3154680"/>
+            <a:ext cx="2753258" cy="548640"/>
+          </a:xfrm>
+          <a:prstGeom prst="rect">
+            <a:avLst/>
+          </a:prstGeom>
+          <a:noFill/>
+          <a:ln/>
+        </p:spPr>
+        <p:txBody>
+          <a:bodyPr wrap="square" lIns="0" tIns="0" rIns="0" bIns="0" rtlCol="0" anchor="ctr"/>
+          <a:lstStyle/>
+          <a:p>
+            <a:pPr indent="0" marL="0">
+              <a:buNone/>
+            </a:pPr>
+            <a:r>
+              <a:rPr lang="en-US" sz="2400" b="1" dirty="0">
+                <a:solidFill>
+                  <a:schemeClr val="bg1"/>
+                </a:solidFill>
+                <a:latin typeface="Calibri" pitchFamily="34" charset="0"/>
+                <a:ea typeface="Calibri" pitchFamily="34" charset="-122"/>
+                <a:cs typeface="Calibri" pitchFamily="34" charset="-120"/>
+              </a:rPr>
+              <a:t>Plan the length</a:t>
+            </a:r>
+            <a:endParaRPr lang="en-US" sz="2400" dirty="0"/>
+          </a:p>
+        </p:txBody>
+      </p:sp>
+      <p:sp>
+        <p:nvSpPr>
+          <p:cNvPr id="14" name="Text 11"/>
+          <p:cNvSpPr txBox="1"/>
+          <p:nvPr/>
+        </p:nvSpPr>
+        <p:spPr>
+          <a:xfrm>
+            <a:off x="4719218" y="3749040"/>
+            <a:ext cx="2753258" cy="1188720"/>
+          </a:xfrm>
+          <a:prstGeom prst="rect">
+            <a:avLst/>
+          </a:prstGeom>
+          <a:noFill/>
+          <a:ln/>
+        </p:spPr>
+        <p:txBody>
+          <a:bodyPr wrap="square" lIns="0" tIns="0" rIns="0" bIns="0" rtlCol="0" anchor="t"/>
+          <a:lstStyle/>
+          <a:p>
+            <a:pPr indent="0" marL="0">
+              <a:buNone/>
+            </a:pPr>
+            <a:r>
+              <a:rPr lang="en-US" sz="1600" dirty="0">
+                <a:solidFill>
+                  <a:srgbClr val="DCE7F7"/>
+                </a:solidFill>
+                <a:latin typeface="Calibri" pitchFamily="34" charset="0"/>
+                <a:ea typeface="Calibri" pitchFamily="34" charset="-122"/>
+                <a:cs typeface="Calibri" pitchFamily="34" charset="-120"/>
+              </a:rPr>
+              <a:t>Don’t just keep the 30-day default, and avoid 60-day campaigns.</a:t>
+            </a:r>
+            <a:endParaRPr lang="en-US" sz="1600" dirty="0"/>
+          </a:p>
+        </p:txBody>
+      </p:sp>
+      <p:sp>
+        <p:nvSpPr>
+          <p:cNvPr id="15" name="Recommendation 3"/>
+          <p:cNvSpPr/>
+          <p:nvPr/>
+        </p:nvSpPr>
+        <p:spPr>
+          <a:xfrm>
+            <a:off x="8158277" y="1828800"/>
+            <a:ext cx="3484778" cy="3291840"/>
+          </a:xfrm>
+          <a:prstGeom prst="roundRect">
+            <a:avLst>
+              <a:gd name="adj" fmla="val 3333"/>
+            </a:avLst>
+          </a:prstGeom>
+          <a:solidFill>
+            <a:srgbClr val="174E93"/>
+          </a:solidFill>
+          <a:ln w="12700">
+            <a:solidFill>
+              <a:srgbClr val="174E93"/>
+            </a:solidFill>
+            <a:prstDash val="solid"/>
+          </a:ln>
+        </p:spPr>
+      </p:sp>
+      <p:sp>
+        <p:nvSpPr>
+          <p:cNvPr id="16" name="Recommendation number 3"/>
+          <p:cNvSpPr/>
+          <p:nvPr/>
+        </p:nvSpPr>
+        <p:spPr>
+          <a:xfrm>
+            <a:off x="8524037" y="2148840"/>
+            <a:ext cx="731520" cy="731520"/>
+          </a:xfrm>
+          <a:prstGeom prst="ellipse">
+            <a:avLst/>
+          </a:prstGeom>
+          <a:solidFill>
+            <a:srgbClr val="FFFFFF"/>
+          </a:solidFill>
+          <a:ln w="12700">
+            <a:solidFill>
+              <a:srgbClr val="FFFFFF"/>
+            </a:solidFill>
+            <a:prstDash val="solid"/>
+          </a:ln>
+        </p:spPr>
+      </p:sp>
+      <p:sp>
+        <p:nvSpPr>
+          <p:cNvPr id="17" name="Text 14"/>
+          <p:cNvSpPr txBox="1"/>
+          <p:nvPr/>
+        </p:nvSpPr>
+        <p:spPr>
+          <a:xfrm>
+            <a:off x="8524037" y="2148840"/>
+            <a:ext cx="731520" cy="731520"/>
+          </a:xfrm>
+          <a:prstGeom prst="rect">
+            <a:avLst/>
+          </a:prstGeom>
+          <a:noFill/>
+          <a:ln/>
+        </p:spPr>
+        <p:txBody>
+          <a:bodyPr wrap="square" lIns="0" tIns="0" rIns="0" bIns="0" rtlCol="0" anchor="ctr"/>
+          <a:lstStyle/>
+          <a:p>
+            <a:pPr algn="ctr" indent="0" marL="0">
+              <a:buNone/>
+            </a:pPr>
+            <a:r>
+              <a:rPr lang="en-US" sz="2800" b="1" dirty="0">
+                <a:solidFill>
+                  <a:schemeClr val="accent3"/>
+                </a:solidFill>
+                <a:latin typeface="Calibri" pitchFamily="34" charset="0"/>
+                <a:ea typeface="Calibri" pitchFamily="34" charset="-122"/>
+                <a:cs typeface="Calibri" pitchFamily="34" charset="-120"/>
+              </a:rPr>
+              <a:t>3</a:t>
+            </a:r>
+            <a:endParaRPr lang="en-US" sz="2800" dirty="0"/>
+          </a:p>
+        </p:txBody>
+      </p:sp>
+      <p:sp>
+        <p:nvSpPr>
+          <p:cNvPr id="18" name="Text 15"/>
+          <p:cNvSpPr txBox="1"/>
+          <p:nvPr/>
+        </p:nvSpPr>
+        <p:spPr>
+          <a:xfrm>
+            <a:off x="8524037" y="3154680"/>
+            <a:ext cx="2753258" cy="548640"/>
+          </a:xfrm>
+          <a:prstGeom prst="rect">
+            <a:avLst/>
+          </a:prstGeom>
+          <a:noFill/>
+          <a:ln/>
+        </p:spPr>
+        <p:txBody>
+          <a:bodyPr wrap="square" lIns="0" tIns="0" rIns="0" bIns="0" rtlCol="0" anchor="ctr"/>
+          <a:lstStyle/>
+          <a:p>
+            <a:pPr indent="0" marL="0">
+              <a:buNone/>
+            </a:pPr>
+            <a:r>
+              <a:rPr lang="en-US" sz="2400" b="1" dirty="0">
+                <a:solidFill>
+                  <a:schemeClr val="bg1"/>
+                </a:solidFill>
+                <a:latin typeface="Calibri" pitchFamily="34" charset="0"/>
+                <a:ea typeface="Calibri" pitchFamily="34" charset="-122"/>
+                <a:cs typeface="Calibri" pitchFamily="34" charset="-120"/>
+              </a:rPr>
+              <a:t>Know your category</a:t>
+            </a:r>
+            <a:endParaRPr lang="en-US" sz="2400" dirty="0"/>
+          </a:p>
+        </p:txBody>
+      </p:sp>
+      <p:sp>
+        <p:nvSpPr>
+          <p:cNvPr id="19" name="Text 16"/>
+          <p:cNvSpPr txBox="1"/>
+          <p:nvPr/>
+        </p:nvSpPr>
+        <p:spPr>
+          <a:xfrm>
+            <a:off x="8524037" y="3749040"/>
+            <a:ext cx="2753258" cy="1188720"/>
+          </a:xfrm>
+          <a:prstGeom prst="rect">
+            <a:avLst/>
+          </a:prstGeom>
+          <a:noFill/>
+          <a:ln/>
+        </p:spPr>
+        <p:txBody>
+          <a:bodyPr wrap="square" lIns="0" tIns="0" rIns="0" bIns="0" rtlCol="0" anchor="t"/>
+          <a:lstStyle/>
+          <a:p>
+            <a:pPr indent="0" marL="0">
+              <a:buNone/>
+            </a:pPr>
+            <a:r>
+              <a:rPr lang="en-US" sz="1600" dirty="0">
+                <a:solidFill>
+                  <a:srgbClr val="DCE7F7"/>
+                </a:solidFill>
+                <a:latin typeface="Calibri" pitchFamily="34" charset="0"/>
+                <a:ea typeface="Calibri" pitchFamily="34" charset="-122"/>
+                <a:cs typeface="Calibri" pitchFamily="34" charset="-120"/>
+              </a:rPr>
+              <a:t>In Technology, Food or Fashion, build an audience before you launch.</a:t>
+            </a:r>
+            <a:endParaRPr lang="en-US" sz="1600" dirty="0"/>
+          </a:p>
+        </p:txBody>
+      </p:sp>
+      <p:sp>
+        <p:nvSpPr>
+          <p:cNvPr id="20" name="Text 17"/>
+          <p:cNvSpPr txBox="1"/>
+          <p:nvPr/>
+        </p:nvSpPr>
+        <p:spPr>
+          <a:xfrm>
+            <a:off x="548640" y="5440680"/>
+            <a:ext cx="11094415" cy="457200"/>
+          </a:xfrm>
+          <a:prstGeom prst="rect">
+            <a:avLst/>
+          </a:prstGeom>
+          <a:noFill/>
+          <a:ln/>
+        </p:spPr>
+        <p:txBody>
+          <a:bodyPr wrap="square" lIns="0" tIns="0" rIns="0" bIns="0" rtlCol="0" anchor="ctr"/>
+          <a:lstStyle/>
+          <a:p>
+            <a:pPr indent="0" marL="0">
+              <a:buNone/>
+            </a:pPr>
+            <a:r>
+              <a:rPr lang="en-US" sz="1600" i="1" dirty="0">
+                <a:solidFill>
+                  <a:srgbClr val="DCE7F7"/>
+                </a:solidFill>
+                <a:latin typeface="Calibri" pitchFamily="34" charset="0"/>
+                <a:ea typeface="Calibri" pitchFamily="34" charset="-122"/>
+                <a:cs typeface="Calibri" pitchFamily="34" charset="-120"/>
+              </a:rPr>
+              <a:t>Patterns from past campaigns, not guarantees.</a:t>
+            </a:r>
+            <a:endParaRPr lang="en-US" sz="1600" dirty="0"/>
+          </a:p>
+        </p:txBody>
+      </p:sp>
+      <p:sp>
+        <p:nvSpPr>
+          <p:cNvPr id="21" name="Text 0"/>
+          <p:cNvSpPr/>
+          <p:nvPr>
+            <p:ph idx="102" type="body" hasCustomPrompt="1"/>
+          </p:nvPr>
+        </p:nvSpPr>
+        <p:spPr>
+          <a:xfrm>
+            <a:off x="548640" y="6263640"/>
+            <a:ext cx="10362895" cy="274320"/>
+          </a:xfrm>
+          <a:prstGeom prst="rect">
+            <a:avLst/>
+          </a:prstGeom>
+          <a:noFill/>
+          <a:ln/>
+        </p:spPr>
+        <p:txBody>
+          <a:bodyPr wrap="square" lIns="0" tIns="0" rIns="0" bIns="0" rtlCol="0"/>
+          <a:lstStyle/>
+          <a:p>
+            <a:pPr indent="0" marL="0">
+              <a:buNone/>
+            </a:pPr>
+            <a:endParaRPr lang="en-US" sz="1100" dirty="0"/>
+          </a:p>
+        </p:txBody>
+      </p:sp>
+      <p:sp>
+        <p:nvSpPr>
+          <p:cNvPr id="25" name="Slide Number Placeholder 0"/>
+          <p:cNvSpPr>
+            <a:spLocks noGrp="1"/>
+          </p:cNvSpPr>
+          <p:nvPr>
+            <p:ph type="sldNum" sz="quarter" idx="4294967295"/>
+          </p:nvPr>
+        </p:nvSpPr>
+        <p:spPr>
+          <a:xfrm>
+            <a:off x="11185855" y="6263640"/>
+            <a:ext cx="457200" cy="274320"/>
+          </a:xfrm>
+          <a:prstGeom prst="rect">
+            <a:avLst/>
+          </a:prstGeom>
+          <a:extLst>
+            <a:ext uri="{C572A759-6A51-4108-AA02-DFA0A04FC94B}">
+              <ma14:wrappingTextBoxFlag xmlns:ma14="http://schemas.microsoft.com/office/mac/drawingml/2011/main" val="0"/>
+            </a:ext>
+          </a:extLst>
+        </p:spPr>
+        <p:txBody>
+          <a:bodyPr/>
+          <a:lstStyle>
+            <a:lvl1pPr>
+              <a:defRPr sz="1100">
+                <a:solidFill>
+                  <a:srgbClr val="DCE7F7"/>
+                </a:solidFill>
+              </a:defRPr>
+            </a:lvl1pPr>
+          </a:lstStyle>
+          <a:p>
+            <a:pPr algn="r"/>
+            <a:fld id="{F7021451-1387-4CA6-816F-3879F97B5CBC}" type="slidenum">
+              <a:rPr b="0" lang="en-US"/>
+              <a:t>13</a:t>
+            </a:fld>
+            <a:endParaRPr lang="en-US"/>
+          </a:p>
+        </p:txBody>
+      </p:sp>
+    </p:spTree>
+  </p:cSld>
+  <p:clrMapOvr>
+    <a:masterClrMapping/>
+  </p:clrMapOvr>
+</p:sld>
+</file>
+
+<file path=ppt/slides/slide14.xml><?xml version="1.0" encoding="utf-8"?>
+<p:sld xmlns:a="http://schemas.openxmlformats.org/drawingml/2006/main" xmlns:r="http://schemas.openxmlformats.org/officeDocument/2006/relationships" xmlns:p="http://schemas.openxmlformats.org/presentationml/2006/main">
+  <p:cSld name="Slide 14">
+    <p:spTree>
+      <p:nvGrpSpPr>
+        <p:cNvPr id="1" name=""/>
+        <p:cNvGrpSpPr/>
+        <p:nvPr/>
+      </p:nvGrpSpPr>
+      <p:grpSpPr>
+        <a:xfrm>
+          <a:off x="0" y="0"/>
+          <a:ext cx="0" cy="0"/>
+          <a:chOff x="0" y="0"/>
+          <a:chExt cx="0" cy="0"/>
+        </a:xfrm>
+      </p:grpSpPr>
+      <p:sp>
+        <p:nvSpPr>
+          <p:cNvPr id="3" name="Text 0"/>
+          <p:cNvSpPr/>
+          <p:nvPr>
+            <p:ph idx="100" type="body" hasCustomPrompt="1"/>
+          </p:nvPr>
+        </p:nvSpPr>
+        <p:spPr>
+          <a:xfrm>
+            <a:off x="548640" y="365760"/>
+            <a:ext cx="11094415" cy="320040"/>
+          </a:xfrm>
+          <a:prstGeom prst="rect">
+            <a:avLst/>
+          </a:prstGeom>
+          <a:noFill/>
+          <a:ln/>
+        </p:spPr>
+        <p:txBody>
+          <a:bodyPr wrap="square" lIns="0" tIns="0" rIns="0" bIns="0" rtlCol="0"/>
+          <a:lstStyle/>
+          <a:p>
+            <a:pPr indent="0" marL="0">
+              <a:buNone/>
+            </a:pPr>
+            <a:r>
+              <a:rPr lang="en-US" sz="1200" b="1" spc="200" kern="0" dirty="0">
+                <a:solidFill>
+                  <a:schemeClr val="accent3"/>
+                </a:solidFill>
+              </a:rPr>
+              <a:t>DATA PRODUCT</a:t>
+            </a:r>
+            <a:endParaRPr lang="en-US" sz="1200" dirty="0"/>
+          </a:p>
+        </p:txBody>
+      </p:sp>
+      <p:sp>
+        <p:nvSpPr>
+          <p:cNvPr id="4" name="Text 0"/>
+          <p:cNvSpPr/>
+          <p:nvPr>
+            <p:ph idx="101" type="title" hasCustomPrompt="1"/>
+          </p:nvPr>
+        </p:nvSpPr>
+        <p:spPr>
+          <a:xfrm>
+            <a:off x="548640" y="685800"/>
+            <a:ext cx="11094415" cy="731520"/>
+          </a:xfrm>
+          <a:prstGeom prst="rect">
+            <a:avLst/>
+          </a:prstGeom>
+          <a:noFill/>
+          <a:ln/>
+        </p:spPr>
+        <p:txBody>
+          <a:bodyPr wrap="square" lIns="0" tIns="0" rIns="0" bIns="0" rtlCol="0" anchor="t"/>
+          <a:lstStyle/>
+          <a:p>
+            <a:pPr algn="l" indent="0" marL="0">
+              <a:buNone/>
+            </a:pPr>
+            <a:r>
+              <a:rPr lang="en-US" sz="3400" b="1" dirty="0">
+                <a:solidFill>
+                  <a:schemeClr val="tx1"/>
+                </a:solidFill>
+              </a:rPr>
+              <a:t>The Campaign Checker</a:t>
+            </a:r>
+            <a:endParaRPr lang="en-US" sz="3400" dirty="0"/>
+          </a:p>
+        </p:txBody>
+      </p:sp>
+      <p:sp>
+        <p:nvSpPr>
+          <p:cNvPr id="5" name="Text 2"/>
+          <p:cNvSpPr txBox="1"/>
+          <p:nvPr/>
+        </p:nvSpPr>
+        <p:spPr>
+          <a:xfrm>
+            <a:off x="548640" y="1600200"/>
+            <a:ext cx="6583680" cy="411480"/>
+          </a:xfrm>
+          <a:prstGeom prst="rect">
+            <a:avLst/>
+          </a:prstGeom>
+          <a:noFill/>
+          <a:ln/>
+        </p:spPr>
+        <p:txBody>
+          <a:bodyPr wrap="square" lIns="0" tIns="0" rIns="0" bIns="0" rtlCol="0" anchor="ctr"/>
+          <a:lstStyle/>
+          <a:p>
+            <a:pPr indent="0" marL="0">
+              <a:buNone/>
+            </a:pPr>
+            <a:r>
+              <a:rPr lang="en-US" sz="1600" dirty="0">
+                <a:solidFill>
+                  <a:schemeClr val="tx2"/>
+                </a:solidFill>
+                <a:latin typeface="Calibri" pitchFamily="34" charset="0"/>
+                <a:ea typeface="Calibri" pitchFamily="34" charset="-122"/>
+                <a:cs typeface="Calibri" pitchFamily="34" charset="-120"/>
+              </a:rPr>
               <a:t>Example: a US board game. Predicted chance of success:</a:t>
             </a:r>
             <a:endParaRPr lang="en-US" sz="1600" dirty="0"/>
@@ -6609,7 +7168,7 @@
       </p:sp>
       <p:graphicFrame>
         <p:nvGraphicFramePr>
-          <p:cNvPr id="14" name="Table 0"/>
+          <p:cNvPr id="15" name="Table 0"/>
           <p:cNvGraphicFramePr>
             <a:graphicFrameLocks noGrp="1"/>
           </p:cNvGraphicFramePr>
@@ -8913,526 +9472,6 @@
             <a:pPr algn="r"/>
             <a:fld id="{F7021451-1387-4CA6-816F-3879F97B5CBC}" type="slidenum">
               <a:rPr b="0" lang="en-US"/>
-              <a:t>13</a:t>
-            </a:fld>
-            <a:endParaRPr lang="en-US"/>
-          </a:p>
-        </p:txBody>
-      </p:sp>
-    </p:spTree>
-  </p:cSld>
-  <p:clrMapOvr>
-    <a:masterClrMapping/>
-  </p:clrMapOvr>
-</p:sld>
-</file>
-
-<file path=ppt/slides/slide14.xml><?xml version="1.0" encoding="utf-8"?>
-<p:sld xmlns:a="http://schemas.openxmlformats.org/drawingml/2006/main" xmlns:r="http://schemas.openxmlformats.org/officeDocument/2006/relationships" xmlns:p="http://schemas.openxmlformats.org/presentationml/2006/main">
-  <p:cSld name="Slide 14">
-    <p:spTree>
-      <p:nvGrpSpPr>
-        <p:cNvPr id="1" name=""/>
-        <p:cNvGrpSpPr/>
-        <p:nvPr/>
-      </p:nvGrpSpPr>
-      <p:grpSpPr>
-        <a:xfrm>
-          <a:off x="0" y="0"/>
-          <a:ext cx="0" cy="0"/>
-          <a:chOff x="0" y="0"/>
-          <a:chExt cx="0" cy="0"/>
-        </a:xfrm>
-      </p:grpSpPr>
-      <p:sp>
-        <p:nvSpPr>
-          <p:cNvPr id="3" name="Text 0"/>
-          <p:cNvSpPr/>
-          <p:nvPr>
-            <p:ph idx="100" type="body" hasCustomPrompt="1"/>
-          </p:nvPr>
-        </p:nvSpPr>
-        <p:spPr>
-          <a:xfrm>
-            <a:off x="548640" y="365760"/>
-            <a:ext cx="11094415" cy="320040"/>
-          </a:xfrm>
-          <a:prstGeom prst="rect">
-            <a:avLst/>
-          </a:prstGeom>
-          <a:noFill/>
-          <a:ln/>
-        </p:spPr>
-        <p:txBody>
-          <a:bodyPr wrap="square" lIns="0" tIns="0" rIns="0" bIns="0" rtlCol="0"/>
-          <a:lstStyle/>
-          <a:p>
-            <a:pPr indent="0" marL="0">
-              <a:buNone/>
-            </a:pPr>
-            <a:r>
-              <a:rPr lang="en-US" sz="1200" b="1" spc="200" kern="0" dirty="0">
-                <a:solidFill>
-                  <a:schemeClr val="accent3"/>
-                </a:solidFill>
-              </a:rPr>
-              <a:t>BEING HONEST</a:t>
-            </a:r>
-            <a:endParaRPr lang="en-US" sz="1200" dirty="0"/>
-          </a:p>
-        </p:txBody>
-      </p:sp>
-      <p:sp>
-        <p:nvSpPr>
-          <p:cNvPr id="4" name="Text 0"/>
-          <p:cNvSpPr/>
-          <p:nvPr>
-            <p:ph idx="101" type="title" hasCustomPrompt="1"/>
-          </p:nvPr>
-        </p:nvSpPr>
-        <p:spPr>
-          <a:xfrm>
-            <a:off x="548640" y="685800"/>
-            <a:ext cx="11094415" cy="731520"/>
-          </a:xfrm>
-          <a:prstGeom prst="rect">
-            <a:avLst/>
-          </a:prstGeom>
-          <a:noFill/>
-          <a:ln/>
-        </p:spPr>
-        <p:txBody>
-          <a:bodyPr wrap="square" lIns="0" tIns="0" rIns="0" bIns="0" rtlCol="0" anchor="t"/>
-          <a:lstStyle/>
-          <a:p>
-            <a:pPr algn="l" indent="0" marL="0">
-              <a:buNone/>
-            </a:pPr>
-            <a:r>
-              <a:rPr lang="en-US" sz="3400" b="1" dirty="0">
-                <a:solidFill>
-                  <a:schemeClr val="tx1"/>
-                </a:solidFill>
-              </a:rPr>
-              <a:t>Limits and next steps</a:t>
-            </a:r>
-            <a:endParaRPr lang="en-US" sz="3400" dirty="0"/>
-          </a:p>
-        </p:txBody>
-      </p:sp>
-      <p:sp>
-        <p:nvSpPr>
-          <p:cNvPr id="5" name="Card: What the model can’t do"/>
-          <p:cNvSpPr/>
-          <p:nvPr/>
-        </p:nvSpPr>
-        <p:spPr>
-          <a:xfrm>
-            <a:off x="548640" y="1691640"/>
-            <a:ext cx="5364328" cy="4023360"/>
-          </a:xfrm>
-          <a:prstGeom prst="roundRect">
-            <a:avLst>
-              <a:gd name="adj" fmla="val 2727"/>
-            </a:avLst>
-          </a:prstGeom>
-          <a:solidFill>
-            <a:srgbClr val="F2F4F8"/>
-          </a:solidFill>
-          <a:ln w="12700">
-            <a:solidFill>
-              <a:srgbClr val="F2F4F8"/>
-            </a:solidFill>
-            <a:prstDash val="solid"/>
-          </a:ln>
-        </p:spPr>
-      </p:sp>
-      <p:sp>
-        <p:nvSpPr>
-          <p:cNvPr id="6" name="Text 3"/>
-          <p:cNvSpPr txBox="1"/>
-          <p:nvPr/>
-        </p:nvSpPr>
-        <p:spPr>
-          <a:xfrm>
-            <a:off x="914400" y="1965960"/>
-            <a:ext cx="4632808" cy="502920"/>
-          </a:xfrm>
-          <a:prstGeom prst="rect">
-            <a:avLst/>
-          </a:prstGeom>
-          <a:noFill/>
-          <a:ln/>
-        </p:spPr>
-        <p:txBody>
-          <a:bodyPr wrap="square" lIns="0" tIns="0" rIns="0" bIns="0" rtlCol="0" anchor="ctr"/>
-          <a:lstStyle/>
-          <a:p>
-            <a:pPr indent="0" marL="0">
-              <a:buNone/>
-            </a:pPr>
-            <a:r>
-              <a:rPr lang="en-US" sz="2200" b="1" dirty="0">
-                <a:solidFill>
-                  <a:schemeClr val="accent4"/>
-                </a:solidFill>
-                <a:latin typeface="Calibri" pitchFamily="34" charset="0"/>
-                <a:ea typeface="Calibri" pitchFamily="34" charset="-122"/>
-                <a:cs typeface="Calibri" pitchFamily="34" charset="-120"/>
-              </a:rPr>
-              <a:t>What the model can’t do</a:t>
-            </a:r>
-            <a:endParaRPr lang="en-US" sz="2200" dirty="0"/>
-          </a:p>
-        </p:txBody>
-      </p:sp>
-      <p:sp>
-        <p:nvSpPr>
-          <p:cNvPr id="7" name="Text 4"/>
-          <p:cNvSpPr txBox="1"/>
-          <p:nvPr/>
-        </p:nvSpPr>
-        <p:spPr>
-          <a:xfrm>
-            <a:off x="914400" y="2606040"/>
-            <a:ext cx="4632808" cy="2926080"/>
-          </a:xfrm>
-          <a:prstGeom prst="rect">
-            <a:avLst/>
-          </a:prstGeom>
-          <a:noFill/>
-          <a:ln/>
-        </p:spPr>
-        <p:txBody>
-          <a:bodyPr wrap="square" lIns="0" tIns="0" rIns="0" bIns="0" rtlCol="0" anchor="t"/>
-          <a:lstStyle/>
-          <a:p>
-            <a:pPr marL="342900" indent="-342900">
-              <a:spcAft>
-                <a:spcPts val="1000"/>
-              </a:spcAft>
-              <a:buSzPct val="100000"/>
-              <a:buChar char="•"/>
-            </a:pPr>
-            <a:r>
-              <a:rPr lang="en-US" sz="1700" dirty="0">
-                <a:solidFill>
-                  <a:schemeClr val="tx1"/>
-                </a:solidFill>
-                <a:latin typeface="Calibri" pitchFamily="34" charset="0"/>
-                <a:ea typeface="Calibri" pitchFamily="34" charset="-122"/>
-                <a:cs typeface="Calibri" pitchFamily="34" charset="-120"/>
-              </a:rPr>
-              <a:t>Show causes: it finds patterns, not proof</a:t>
-            </a:r>
-            <a:endParaRPr lang="en-US" sz="1700" dirty="0"/>
-          </a:p>
-          <a:p>
-            <a:pPr marL="342900" indent="-342900">
-              <a:spcAft>
-                <a:spcPts val="1000"/>
-              </a:spcAft>
-              <a:buSzPct val="100000"/>
-              <a:buChar char="•"/>
-            </a:pPr>
-            <a:r>
-              <a:rPr lang="en-US" sz="1700" dirty="0">
-                <a:solidFill>
-                  <a:schemeClr val="tx1"/>
-                </a:solidFill>
-                <a:latin typeface="Calibri" pitchFamily="34" charset="0"/>
-                <a:ea typeface="Calibri" pitchFamily="34" charset="-122"/>
-                <a:cs typeface="Calibri" pitchFamily="34" charset="-120"/>
-              </a:rPr>
-              <a:t>See the product, video, rewards or the creator’s fan base</a:t>
-            </a:r>
-            <a:endParaRPr lang="en-US" sz="1700" dirty="0"/>
-          </a:p>
-          <a:p>
-            <a:pPr marL="342900" indent="-342900">
-              <a:spcAft>
-                <a:spcPts val="1000"/>
-              </a:spcAft>
-              <a:buSzPct val="100000"/>
-              <a:buChar char="•"/>
-            </a:pPr>
-            <a:r>
-              <a:rPr lang="en-US" sz="1700" dirty="0">
-                <a:solidFill>
-                  <a:schemeClr val="tx1"/>
-                </a:solidFill>
-                <a:latin typeface="Calibri" pitchFamily="34" charset="0"/>
-                <a:ea typeface="Calibri" pitchFamily="34" charset="-122"/>
-                <a:cs typeface="Calibri" pitchFamily="34" charset="-120"/>
-              </a:rPr>
-              <a:t>Know the present: the data ends in early 2018</a:t>
-            </a:r>
-            <a:endParaRPr lang="en-US" sz="1700" dirty="0"/>
-          </a:p>
-          <a:p>
-            <a:pPr marL="342900" indent="-342900">
-              <a:spcAft>
-                <a:spcPts val="1000"/>
-              </a:spcAft>
-              <a:buSzPct val="100000"/>
-              <a:buChar char="•"/>
-            </a:pPr>
-            <a:r>
-              <a:rPr lang="en-US" sz="1700" dirty="0">
-                <a:solidFill>
-                  <a:schemeClr val="tx1"/>
-                </a:solidFill>
-                <a:latin typeface="Calibri" pitchFamily="34" charset="0"/>
-                <a:ea typeface="Calibri" pitchFamily="34" charset="-122"/>
-                <a:cs typeface="Calibri" pitchFamily="34" charset="-120"/>
-              </a:rPr>
-              <a:t>Avoid false hope: 45% of “success” calls fail</a:t>
-            </a:r>
-            <a:endParaRPr lang="en-US" sz="1700" dirty="0"/>
-          </a:p>
-        </p:txBody>
-      </p:sp>
-      <p:sp>
-        <p:nvSpPr>
-          <p:cNvPr id="8" name="Card: What we would do next"/>
-          <p:cNvSpPr/>
-          <p:nvPr/>
-        </p:nvSpPr>
-        <p:spPr>
-          <a:xfrm>
-            <a:off x="6278728" y="1691640"/>
-            <a:ext cx="5364328" cy="4023360"/>
-          </a:xfrm>
-          <a:prstGeom prst="roundRect">
-            <a:avLst>
-              <a:gd name="adj" fmla="val 2727"/>
-            </a:avLst>
-          </a:prstGeom>
-          <a:solidFill>
-            <a:srgbClr val="F2F4F8"/>
-          </a:solidFill>
-          <a:ln w="12700">
-            <a:solidFill>
-              <a:srgbClr val="F2F4F8"/>
-            </a:solidFill>
-            <a:prstDash val="solid"/>
-          </a:ln>
-        </p:spPr>
-      </p:sp>
-      <p:sp>
-        <p:nvSpPr>
-          <p:cNvPr id="9" name="Text 6"/>
-          <p:cNvSpPr txBox="1"/>
-          <p:nvPr/>
-        </p:nvSpPr>
-        <p:spPr>
-          <a:xfrm>
-            <a:off x="6644488" y="1965960"/>
-            <a:ext cx="4632808" cy="502920"/>
-          </a:xfrm>
-          <a:prstGeom prst="rect">
-            <a:avLst/>
-          </a:prstGeom>
-          <a:noFill/>
-          <a:ln/>
-        </p:spPr>
-        <p:txBody>
-          <a:bodyPr wrap="square" lIns="0" tIns="0" rIns="0" bIns="0" rtlCol="0" anchor="ctr"/>
-          <a:lstStyle/>
-          <a:p>
-            <a:pPr indent="0" marL="0">
-              <a:buNone/>
-            </a:pPr>
-            <a:r>
-              <a:rPr lang="en-US" sz="2200" b="1" dirty="0">
-                <a:solidFill>
-                  <a:schemeClr val="accent3"/>
-                </a:solidFill>
-                <a:latin typeface="Calibri" pitchFamily="34" charset="0"/>
-                <a:ea typeface="Calibri" pitchFamily="34" charset="-122"/>
-                <a:cs typeface="Calibri" pitchFamily="34" charset="-120"/>
-              </a:rPr>
-              <a:t>What we would do next</a:t>
-            </a:r>
-            <a:endParaRPr lang="en-US" sz="2200" dirty="0"/>
-          </a:p>
-        </p:txBody>
-      </p:sp>
-      <p:sp>
-        <p:nvSpPr>
-          <p:cNvPr id="10" name="Text 7"/>
-          <p:cNvSpPr txBox="1"/>
-          <p:nvPr/>
-        </p:nvSpPr>
-        <p:spPr>
-          <a:xfrm>
-            <a:off x="6644488" y="2606040"/>
-            <a:ext cx="4632808" cy="2926080"/>
-          </a:xfrm>
-          <a:prstGeom prst="rect">
-            <a:avLst/>
-          </a:prstGeom>
-          <a:noFill/>
-          <a:ln/>
-        </p:spPr>
-        <p:txBody>
-          <a:bodyPr wrap="square" lIns="0" tIns="0" rIns="0" bIns="0" rtlCol="0" anchor="t"/>
-          <a:lstStyle/>
-          <a:p>
-            <a:pPr marL="342900" indent="-342900">
-              <a:spcAft>
-                <a:spcPts val="1000"/>
-              </a:spcAft>
-              <a:buSzPct val="100000"/>
-              <a:buChar char="•"/>
-            </a:pPr>
-            <a:r>
-              <a:rPr lang="en-US" sz="1700" dirty="0">
-                <a:solidFill>
-                  <a:schemeClr val="tx1"/>
-                </a:solidFill>
-                <a:latin typeface="Calibri" pitchFamily="34" charset="0"/>
-                <a:ea typeface="Calibri" pitchFamily="34" charset="-122"/>
-                <a:cs typeface="Calibri" pitchFamily="34" charset="-120"/>
-              </a:rPr>
-              <a:t>Add creator history, description text and rewards</a:t>
-            </a:r>
-            <a:endParaRPr lang="en-US" sz="1700" dirty="0"/>
-          </a:p>
-          <a:p>
-            <a:pPr marL="342900" indent="-342900">
-              <a:spcAft>
-                <a:spcPts val="1000"/>
-              </a:spcAft>
-              <a:buSzPct val="100000"/>
-              <a:buChar char="•"/>
-            </a:pPr>
-            <a:r>
-              <a:rPr lang="en-US" sz="1700" dirty="0">
-                <a:solidFill>
-                  <a:schemeClr val="tx1"/>
-                </a:solidFill>
-                <a:latin typeface="Calibri" pitchFamily="34" charset="0"/>
-                <a:ea typeface="Calibri" pitchFamily="34" charset="-122"/>
-                <a:cs typeface="Calibri" pitchFamily="34" charset="-120"/>
-              </a:rPr>
-              <a:t>Test on the newest campaigns, trained on older ones</a:t>
-            </a:r>
-            <a:endParaRPr lang="en-US" sz="1700" dirty="0"/>
-          </a:p>
-          <a:p>
-            <a:pPr marL="342900" indent="-342900">
-              <a:spcAft>
-                <a:spcPts val="1000"/>
-              </a:spcAft>
-              <a:buSzPct val="100000"/>
-              <a:buChar char="•"/>
-            </a:pPr>
-            <a:r>
-              <a:rPr lang="en-US" sz="1700" dirty="0">
-                <a:solidFill>
-                  <a:schemeClr val="tx1"/>
-                </a:solidFill>
-                <a:latin typeface="Calibri" pitchFamily="34" charset="0"/>
-                <a:ea typeface="Calibri" pitchFamily="34" charset="-122"/>
-                <a:cs typeface="Calibri" pitchFamily="34" charset="-120"/>
-              </a:rPr>
-              <a:t>Refresh with data after 2018</a:t>
-            </a:r>
-            <a:endParaRPr lang="en-US" sz="1700" dirty="0"/>
-          </a:p>
-          <a:p>
-            <a:pPr marL="342900" indent="-342900">
-              <a:spcAft>
-                <a:spcPts val="1000"/>
-              </a:spcAft>
-              <a:buSzPct val="100000"/>
-              <a:buChar char="•"/>
-            </a:pPr>
-            <a:r>
-              <a:rPr lang="en-US" sz="1700" dirty="0">
-                <a:solidFill>
-                  <a:schemeClr val="tx1"/>
-                </a:solidFill>
-                <a:latin typeface="Calibri" pitchFamily="34" charset="0"/>
-                <a:ea typeface="Calibri" pitchFamily="34" charset="-122"/>
-                <a:cs typeface="Calibri" pitchFamily="34" charset="-120"/>
-              </a:rPr>
-              <a:t>Build the Checker as a web tool and track its accuracy</a:t>
-            </a:r>
-            <a:endParaRPr lang="en-US" sz="1700" dirty="0"/>
-          </a:p>
-        </p:txBody>
-      </p:sp>
-      <p:sp>
-        <p:nvSpPr>
-          <p:cNvPr id="11" name="Text 0"/>
-          <p:cNvSpPr/>
-          <p:nvPr>
-            <p:ph idx="102" type="body" hasCustomPrompt="1"/>
-          </p:nvPr>
-        </p:nvSpPr>
-        <p:spPr>
-          <a:xfrm>
-            <a:off x="548640" y="6263640"/>
-            <a:ext cx="10362895" cy="274320"/>
-          </a:xfrm>
-          <a:prstGeom prst="rect">
-            <a:avLst/>
-          </a:prstGeom>
-          <a:noFill/>
-          <a:ln/>
-        </p:spPr>
-        <p:txBody>
-          <a:bodyPr wrap="square" lIns="0" tIns="0" rIns="0" bIns="0" rtlCol="0"/>
-          <a:lstStyle/>
-          <a:p>
-            <a:pPr indent="0" marL="0">
-              <a:buNone/>
-            </a:pPr>
-            <a:endParaRPr lang="en-US" sz="1100" dirty="0"/>
-          </a:p>
-        </p:txBody>
-      </p:sp>
-      <p:sp>
-        <p:nvSpPr>
-          <p:cNvPr id="25" name="Slide Number Placeholder 0"/>
-          <p:cNvSpPr>
-            <a:spLocks noGrp="1"/>
-          </p:cNvSpPr>
-          <p:nvPr>
-            <p:ph type="sldNum" sz="quarter" idx="4294967295"/>
-          </p:nvPr>
-        </p:nvSpPr>
-        <p:spPr>
-          <a:xfrm>
-            <a:off x="11185855" y="6263640"/>
-            <a:ext cx="457200" cy="274320"/>
-          </a:xfrm>
-          <a:prstGeom prst="rect">
-            <a:avLst/>
-          </a:prstGeom>
-          <a:extLst>
-            <a:ext uri="{C572A759-6A51-4108-AA02-DFA0A04FC94B}">
-              <ma14:wrappingTextBoxFlag xmlns:ma14="http://schemas.microsoft.com/office/mac/drawingml/2011/main" val="0"/>
-            </a:ext>
-          </a:extLst>
-        </p:spPr>
-        <p:txBody>
-          <a:bodyPr/>
-          <a:lstStyle>
-            <a:lvl1pPr>
-              <a:defRPr sz="1100">
-                <a:solidFill>
-                  <a:srgbClr val="5B6472"/>
-                </a:solidFill>
-              </a:defRPr>
-            </a:lvl1pPr>
-          </a:lstStyle>
-          <a:p>
-            <a:pPr algn="r"/>
-            <a:fld id="{F7021451-1387-4CA6-816F-3879F97B5CBC}" type="slidenum">
-              <a:rPr b="0" lang="en-US"/>
               <a:t>14</a:t>
             </a:fld>
             <a:endParaRPr lang="en-US"/>
@@ -9474,8 +9513,8 @@
         </p:nvSpPr>
         <p:spPr>
           <a:xfrm>
-            <a:off x="548640" y="1554480"/>
-            <a:ext cx="11094415" cy="411480"/>
+            <a:off x="548640" y="365760"/>
+            <a:ext cx="11094415" cy="320040"/>
           </a:xfrm>
           <a:prstGeom prst="rect">
             <a:avLst/>
@@ -9491,14 +9530,14 @@
               <a:buNone/>
             </a:pPr>
             <a:r>
-              <a:rPr lang="en-US" sz="1400" b="1" spc="300" kern="0" dirty="0">
-                <a:solidFill>
-                  <a:schemeClr val="accent5"/>
-                </a:solidFill>
-              </a:rPr>
-              <a:t>THANK YOU</a:t>
-            </a:r>
-            <a:endParaRPr lang="en-US" sz="1400" dirty="0"/>
+              <a:rPr lang="en-US" sz="1200" b="1" spc="200" kern="0" dirty="0">
+                <a:solidFill>
+                  <a:schemeClr val="accent3"/>
+                </a:solidFill>
+              </a:rPr>
+              <a:t>BEING HONEST</a:t>
+            </a:r>
+            <a:endParaRPr lang="en-US" sz="1200" dirty="0"/>
           </a:p>
         </p:txBody>
       </p:sp>
@@ -9512,6 +9551,526 @@
         </p:nvSpPr>
         <p:spPr>
           <a:xfrm>
+            <a:off x="548640" y="685800"/>
+            <a:ext cx="11094415" cy="731520"/>
+          </a:xfrm>
+          <a:prstGeom prst="rect">
+            <a:avLst/>
+          </a:prstGeom>
+          <a:noFill/>
+          <a:ln/>
+        </p:spPr>
+        <p:txBody>
+          <a:bodyPr wrap="square" lIns="0" tIns="0" rIns="0" bIns="0" rtlCol="0" anchor="t"/>
+          <a:lstStyle/>
+          <a:p>
+            <a:pPr algn="l" indent="0" marL="0">
+              <a:buNone/>
+            </a:pPr>
+            <a:r>
+              <a:rPr lang="en-US" sz="3400" b="1" dirty="0">
+                <a:solidFill>
+                  <a:schemeClr val="tx1"/>
+                </a:solidFill>
+              </a:rPr>
+              <a:t>Limits and next steps</a:t>
+            </a:r>
+            <a:endParaRPr lang="en-US" sz="3400" dirty="0"/>
+          </a:p>
+        </p:txBody>
+      </p:sp>
+      <p:sp>
+        <p:nvSpPr>
+          <p:cNvPr id="5" name="Card: What the model can’t do"/>
+          <p:cNvSpPr/>
+          <p:nvPr/>
+        </p:nvSpPr>
+        <p:spPr>
+          <a:xfrm>
+            <a:off x="548640" y="1691640"/>
+            <a:ext cx="5364328" cy="4023360"/>
+          </a:xfrm>
+          <a:prstGeom prst="roundRect">
+            <a:avLst>
+              <a:gd name="adj" fmla="val 2727"/>
+            </a:avLst>
+          </a:prstGeom>
+          <a:solidFill>
+            <a:srgbClr val="F2F4F8"/>
+          </a:solidFill>
+          <a:ln w="12700">
+            <a:solidFill>
+              <a:srgbClr val="F2F4F8"/>
+            </a:solidFill>
+            <a:prstDash val="solid"/>
+          </a:ln>
+        </p:spPr>
+      </p:sp>
+      <p:sp>
+        <p:nvSpPr>
+          <p:cNvPr id="6" name="Text 3"/>
+          <p:cNvSpPr txBox="1"/>
+          <p:nvPr/>
+        </p:nvSpPr>
+        <p:spPr>
+          <a:xfrm>
+            <a:off x="914400" y="1965960"/>
+            <a:ext cx="4632808" cy="502920"/>
+          </a:xfrm>
+          <a:prstGeom prst="rect">
+            <a:avLst/>
+          </a:prstGeom>
+          <a:noFill/>
+          <a:ln/>
+        </p:spPr>
+        <p:txBody>
+          <a:bodyPr wrap="square" lIns="0" tIns="0" rIns="0" bIns="0" rtlCol="0" anchor="ctr"/>
+          <a:lstStyle/>
+          <a:p>
+            <a:pPr indent="0" marL="0">
+              <a:buNone/>
+            </a:pPr>
+            <a:r>
+              <a:rPr lang="en-US" sz="2200" b="1" dirty="0">
+                <a:solidFill>
+                  <a:schemeClr val="accent4"/>
+                </a:solidFill>
+                <a:latin typeface="Calibri" pitchFamily="34" charset="0"/>
+                <a:ea typeface="Calibri" pitchFamily="34" charset="-122"/>
+                <a:cs typeface="Calibri" pitchFamily="34" charset="-120"/>
+              </a:rPr>
+              <a:t>What the model can’t do</a:t>
+            </a:r>
+            <a:endParaRPr lang="en-US" sz="2200" dirty="0"/>
+          </a:p>
+        </p:txBody>
+      </p:sp>
+      <p:sp>
+        <p:nvSpPr>
+          <p:cNvPr id="7" name="Text 4"/>
+          <p:cNvSpPr txBox="1"/>
+          <p:nvPr/>
+        </p:nvSpPr>
+        <p:spPr>
+          <a:xfrm>
+            <a:off x="914400" y="2606040"/>
+            <a:ext cx="4632808" cy="2926080"/>
+          </a:xfrm>
+          <a:prstGeom prst="rect">
+            <a:avLst/>
+          </a:prstGeom>
+          <a:noFill/>
+          <a:ln/>
+        </p:spPr>
+        <p:txBody>
+          <a:bodyPr wrap="square" lIns="0" tIns="0" rIns="0" bIns="0" rtlCol="0" anchor="t"/>
+          <a:lstStyle/>
+          <a:p>
+            <a:pPr marL="342900" indent="-342900">
+              <a:spcAft>
+                <a:spcPts val="1000"/>
+              </a:spcAft>
+              <a:buSzPct val="100000"/>
+              <a:buChar char="•"/>
+            </a:pPr>
+            <a:r>
+              <a:rPr lang="en-US" sz="1700" dirty="0">
+                <a:solidFill>
+                  <a:schemeClr val="tx1"/>
+                </a:solidFill>
+                <a:latin typeface="Calibri" pitchFamily="34" charset="0"/>
+                <a:ea typeface="Calibri" pitchFamily="34" charset="-122"/>
+                <a:cs typeface="Calibri" pitchFamily="34" charset="-120"/>
+              </a:rPr>
+              <a:t>Show causes: it finds patterns, not proof</a:t>
+            </a:r>
+            <a:endParaRPr lang="en-US" sz="1700" dirty="0"/>
+          </a:p>
+          <a:p>
+            <a:pPr marL="342900" indent="-342900">
+              <a:spcAft>
+                <a:spcPts val="1000"/>
+              </a:spcAft>
+              <a:buSzPct val="100000"/>
+              <a:buChar char="•"/>
+            </a:pPr>
+            <a:r>
+              <a:rPr lang="en-US" sz="1700" dirty="0">
+                <a:solidFill>
+                  <a:schemeClr val="tx1"/>
+                </a:solidFill>
+                <a:latin typeface="Calibri" pitchFamily="34" charset="0"/>
+                <a:ea typeface="Calibri" pitchFamily="34" charset="-122"/>
+                <a:cs typeface="Calibri" pitchFamily="34" charset="-120"/>
+              </a:rPr>
+              <a:t>See the product, video, rewards or the creator’s fan base</a:t>
+            </a:r>
+            <a:endParaRPr lang="en-US" sz="1700" dirty="0"/>
+          </a:p>
+          <a:p>
+            <a:pPr marL="342900" indent="-342900">
+              <a:spcAft>
+                <a:spcPts val="1000"/>
+              </a:spcAft>
+              <a:buSzPct val="100000"/>
+              <a:buChar char="•"/>
+            </a:pPr>
+            <a:r>
+              <a:rPr lang="en-US" sz="1700" dirty="0">
+                <a:solidFill>
+                  <a:schemeClr val="tx1"/>
+                </a:solidFill>
+                <a:latin typeface="Calibri" pitchFamily="34" charset="0"/>
+                <a:ea typeface="Calibri" pitchFamily="34" charset="-122"/>
+                <a:cs typeface="Calibri" pitchFamily="34" charset="-120"/>
+              </a:rPr>
+              <a:t>Know the present: the data ends in early 2018</a:t>
+            </a:r>
+            <a:endParaRPr lang="en-US" sz="1700" dirty="0"/>
+          </a:p>
+          <a:p>
+            <a:pPr marL="342900" indent="-342900">
+              <a:spcAft>
+                <a:spcPts val="1000"/>
+              </a:spcAft>
+              <a:buSzPct val="100000"/>
+              <a:buChar char="•"/>
+            </a:pPr>
+            <a:r>
+              <a:rPr lang="en-US" sz="1700" dirty="0">
+                <a:solidFill>
+                  <a:schemeClr val="tx1"/>
+                </a:solidFill>
+                <a:latin typeface="Calibri" pitchFamily="34" charset="0"/>
+                <a:ea typeface="Calibri" pitchFamily="34" charset="-122"/>
+                <a:cs typeface="Calibri" pitchFamily="34" charset="-120"/>
+              </a:rPr>
+              <a:t>Avoid false hope: 45% of “success” calls fail</a:t>
+            </a:r>
+            <a:endParaRPr lang="en-US" sz="1700" dirty="0"/>
+          </a:p>
+        </p:txBody>
+      </p:sp>
+      <p:sp>
+        <p:nvSpPr>
+          <p:cNvPr id="8" name="Card: What we would do next"/>
+          <p:cNvSpPr/>
+          <p:nvPr/>
+        </p:nvSpPr>
+        <p:spPr>
+          <a:xfrm>
+            <a:off x="6278728" y="1691640"/>
+            <a:ext cx="5364328" cy="4023360"/>
+          </a:xfrm>
+          <a:prstGeom prst="roundRect">
+            <a:avLst>
+              <a:gd name="adj" fmla="val 2727"/>
+            </a:avLst>
+          </a:prstGeom>
+          <a:solidFill>
+            <a:srgbClr val="F2F4F8"/>
+          </a:solidFill>
+          <a:ln w="12700">
+            <a:solidFill>
+              <a:srgbClr val="F2F4F8"/>
+            </a:solidFill>
+            <a:prstDash val="solid"/>
+          </a:ln>
+        </p:spPr>
+      </p:sp>
+      <p:sp>
+        <p:nvSpPr>
+          <p:cNvPr id="9" name="Text 6"/>
+          <p:cNvSpPr txBox="1"/>
+          <p:nvPr/>
+        </p:nvSpPr>
+        <p:spPr>
+          <a:xfrm>
+            <a:off x="6644488" y="1965960"/>
+            <a:ext cx="4632808" cy="502920"/>
+          </a:xfrm>
+          <a:prstGeom prst="rect">
+            <a:avLst/>
+          </a:prstGeom>
+          <a:noFill/>
+          <a:ln/>
+        </p:spPr>
+        <p:txBody>
+          <a:bodyPr wrap="square" lIns="0" tIns="0" rIns="0" bIns="0" rtlCol="0" anchor="ctr"/>
+          <a:lstStyle/>
+          <a:p>
+            <a:pPr indent="0" marL="0">
+              <a:buNone/>
+            </a:pPr>
+            <a:r>
+              <a:rPr lang="en-US" sz="2200" b="1" dirty="0">
+                <a:solidFill>
+                  <a:schemeClr val="accent3"/>
+                </a:solidFill>
+                <a:latin typeface="Calibri" pitchFamily="34" charset="0"/>
+                <a:ea typeface="Calibri" pitchFamily="34" charset="-122"/>
+                <a:cs typeface="Calibri" pitchFamily="34" charset="-120"/>
+              </a:rPr>
+              <a:t>What we would do next</a:t>
+            </a:r>
+            <a:endParaRPr lang="en-US" sz="2200" dirty="0"/>
+          </a:p>
+        </p:txBody>
+      </p:sp>
+      <p:sp>
+        <p:nvSpPr>
+          <p:cNvPr id="10" name="Text 7"/>
+          <p:cNvSpPr txBox="1"/>
+          <p:nvPr/>
+        </p:nvSpPr>
+        <p:spPr>
+          <a:xfrm>
+            <a:off x="6644488" y="2606040"/>
+            <a:ext cx="4632808" cy="2926080"/>
+          </a:xfrm>
+          <a:prstGeom prst="rect">
+            <a:avLst/>
+          </a:prstGeom>
+          <a:noFill/>
+          <a:ln/>
+        </p:spPr>
+        <p:txBody>
+          <a:bodyPr wrap="square" lIns="0" tIns="0" rIns="0" bIns="0" rtlCol="0" anchor="t"/>
+          <a:lstStyle/>
+          <a:p>
+            <a:pPr marL="342900" indent="-342900">
+              <a:spcAft>
+                <a:spcPts val="1000"/>
+              </a:spcAft>
+              <a:buSzPct val="100000"/>
+              <a:buChar char="•"/>
+            </a:pPr>
+            <a:r>
+              <a:rPr lang="en-US" sz="1700" dirty="0">
+                <a:solidFill>
+                  <a:schemeClr val="tx1"/>
+                </a:solidFill>
+                <a:latin typeface="Calibri" pitchFamily="34" charset="0"/>
+                <a:ea typeface="Calibri" pitchFamily="34" charset="-122"/>
+                <a:cs typeface="Calibri" pitchFamily="34" charset="-120"/>
+              </a:rPr>
+              <a:t>Add creator history, description text and rewards</a:t>
+            </a:r>
+            <a:endParaRPr lang="en-US" sz="1700" dirty="0"/>
+          </a:p>
+          <a:p>
+            <a:pPr marL="342900" indent="-342900">
+              <a:spcAft>
+                <a:spcPts val="1000"/>
+              </a:spcAft>
+              <a:buSzPct val="100000"/>
+              <a:buChar char="•"/>
+            </a:pPr>
+            <a:r>
+              <a:rPr lang="en-US" sz="1700" dirty="0">
+                <a:solidFill>
+                  <a:schemeClr val="tx1"/>
+                </a:solidFill>
+                <a:latin typeface="Calibri" pitchFamily="34" charset="0"/>
+                <a:ea typeface="Calibri" pitchFamily="34" charset="-122"/>
+                <a:cs typeface="Calibri" pitchFamily="34" charset="-120"/>
+              </a:rPr>
+              <a:t>Test on the newest campaigns, trained on older ones</a:t>
+            </a:r>
+            <a:endParaRPr lang="en-US" sz="1700" dirty="0"/>
+          </a:p>
+          <a:p>
+            <a:pPr marL="342900" indent="-342900">
+              <a:spcAft>
+                <a:spcPts val="1000"/>
+              </a:spcAft>
+              <a:buSzPct val="100000"/>
+              <a:buChar char="•"/>
+            </a:pPr>
+            <a:r>
+              <a:rPr lang="en-US" sz="1700" dirty="0">
+                <a:solidFill>
+                  <a:schemeClr val="tx1"/>
+                </a:solidFill>
+                <a:latin typeface="Calibri" pitchFamily="34" charset="0"/>
+                <a:ea typeface="Calibri" pitchFamily="34" charset="-122"/>
+                <a:cs typeface="Calibri" pitchFamily="34" charset="-120"/>
+              </a:rPr>
+              <a:t>Refresh with data after 2018</a:t>
+            </a:r>
+            <a:endParaRPr lang="en-US" sz="1700" dirty="0"/>
+          </a:p>
+          <a:p>
+            <a:pPr marL="342900" indent="-342900">
+              <a:spcAft>
+                <a:spcPts val="1000"/>
+              </a:spcAft>
+              <a:buSzPct val="100000"/>
+              <a:buChar char="•"/>
+            </a:pPr>
+            <a:r>
+              <a:rPr lang="en-US" sz="1700" dirty="0">
+                <a:solidFill>
+                  <a:schemeClr val="tx1"/>
+                </a:solidFill>
+                <a:latin typeface="Calibri" pitchFamily="34" charset="0"/>
+                <a:ea typeface="Calibri" pitchFamily="34" charset="-122"/>
+                <a:cs typeface="Calibri" pitchFamily="34" charset="-120"/>
+              </a:rPr>
+              <a:t>Build the Checker as a web tool and track its accuracy</a:t>
+            </a:r>
+            <a:endParaRPr lang="en-US" sz="1700" dirty="0"/>
+          </a:p>
+        </p:txBody>
+      </p:sp>
+      <p:sp>
+        <p:nvSpPr>
+          <p:cNvPr id="11" name="Text 0"/>
+          <p:cNvSpPr/>
+          <p:nvPr>
+            <p:ph idx="102" type="body" hasCustomPrompt="1"/>
+          </p:nvPr>
+        </p:nvSpPr>
+        <p:spPr>
+          <a:xfrm>
+            <a:off x="548640" y="6263640"/>
+            <a:ext cx="10362895" cy="274320"/>
+          </a:xfrm>
+          <a:prstGeom prst="rect">
+            <a:avLst/>
+          </a:prstGeom>
+          <a:noFill/>
+          <a:ln/>
+        </p:spPr>
+        <p:txBody>
+          <a:bodyPr wrap="square" lIns="0" tIns="0" rIns="0" bIns="0" rtlCol="0"/>
+          <a:lstStyle/>
+          <a:p>
+            <a:pPr indent="0" marL="0">
+              <a:buNone/>
+            </a:pPr>
+            <a:endParaRPr lang="en-US" sz="1100" dirty="0"/>
+          </a:p>
+        </p:txBody>
+      </p:sp>
+      <p:sp>
+        <p:nvSpPr>
+          <p:cNvPr id="25" name="Slide Number Placeholder 0"/>
+          <p:cNvSpPr>
+            <a:spLocks noGrp="1"/>
+          </p:cNvSpPr>
+          <p:nvPr>
+            <p:ph type="sldNum" sz="quarter" idx="4294967295"/>
+          </p:nvPr>
+        </p:nvSpPr>
+        <p:spPr>
+          <a:xfrm>
+            <a:off x="11185855" y="6263640"/>
+            <a:ext cx="457200" cy="274320"/>
+          </a:xfrm>
+          <a:prstGeom prst="rect">
+            <a:avLst/>
+          </a:prstGeom>
+          <a:extLst>
+            <a:ext uri="{C572A759-6A51-4108-AA02-DFA0A04FC94B}">
+              <ma14:wrappingTextBoxFlag xmlns:ma14="http://schemas.microsoft.com/office/mac/drawingml/2011/main" val="0"/>
+            </a:ext>
+          </a:extLst>
+        </p:spPr>
+        <p:txBody>
+          <a:bodyPr/>
+          <a:lstStyle>
+            <a:lvl1pPr>
+              <a:defRPr sz="1100">
+                <a:solidFill>
+                  <a:srgbClr val="5B6472"/>
+                </a:solidFill>
+              </a:defRPr>
+            </a:lvl1pPr>
+          </a:lstStyle>
+          <a:p>
+            <a:pPr algn="r"/>
+            <a:fld id="{F7021451-1387-4CA6-816F-3879F97B5CBC}" type="slidenum">
+              <a:rPr b="0" lang="en-US"/>
+              <a:t>15</a:t>
+            </a:fld>
+            <a:endParaRPr lang="en-US"/>
+          </a:p>
+        </p:txBody>
+      </p:sp>
+    </p:spTree>
+  </p:cSld>
+  <p:clrMapOvr>
+    <a:masterClrMapping/>
+  </p:clrMapOvr>
+</p:sld>
+</file>
+
+<file path=ppt/slides/slide16.xml><?xml version="1.0" encoding="utf-8"?>
+<p:sld xmlns:a="http://schemas.openxmlformats.org/drawingml/2006/main" xmlns:r="http://schemas.openxmlformats.org/officeDocument/2006/relationships" xmlns:p="http://schemas.openxmlformats.org/presentationml/2006/main">
+  <p:cSld name="Slide 16">
+    <p:spTree>
+      <p:nvGrpSpPr>
+        <p:cNvPr id="1" name=""/>
+        <p:cNvGrpSpPr/>
+        <p:nvPr/>
+      </p:nvGrpSpPr>
+      <p:grpSpPr>
+        <a:xfrm>
+          <a:off x="0" y="0"/>
+          <a:ext cx="0" cy="0"/>
+          <a:chOff x="0" y="0"/>
+          <a:chExt cx="0" cy="0"/>
+        </a:xfrm>
+      </p:grpSpPr>
+      <p:sp>
+        <p:nvSpPr>
+          <p:cNvPr id="3" name="Text 0"/>
+          <p:cNvSpPr/>
+          <p:nvPr>
+            <p:ph idx="100" type="body" hasCustomPrompt="1"/>
+          </p:nvPr>
+        </p:nvSpPr>
+        <p:spPr>
+          <a:xfrm>
+            <a:off x="548640" y="1554480"/>
+            <a:ext cx="11094415" cy="411480"/>
+          </a:xfrm>
+          <a:prstGeom prst="rect">
+            <a:avLst/>
+          </a:prstGeom>
+          <a:noFill/>
+          <a:ln/>
+        </p:spPr>
+        <p:txBody>
+          <a:bodyPr wrap="square" lIns="0" tIns="0" rIns="0" bIns="0" rtlCol="0"/>
+          <a:lstStyle/>
+          <a:p>
+            <a:pPr indent="0" marL="0">
+              <a:buNone/>
+            </a:pPr>
+            <a:r>
+              <a:rPr lang="en-US" sz="1400" b="1" spc="300" kern="0" dirty="0">
+                <a:solidFill>
+                  <a:schemeClr val="accent5"/>
+                </a:solidFill>
+              </a:rPr>
+              <a:t>THANK YOU</a:t>
+            </a:r>
+            <a:endParaRPr lang="en-US" sz="1400" dirty="0"/>
+          </a:p>
+        </p:txBody>
+      </p:sp>
+      <p:sp>
+        <p:nvSpPr>
+          <p:cNvPr id="4" name="Text 0"/>
+          <p:cNvSpPr/>
+          <p:nvPr>
+            <p:ph idx="101" type="title" hasCustomPrompt="1"/>
+          </p:nvPr>
+        </p:nvSpPr>
+        <p:spPr>
+          <a:xfrm>
             <a:off x="548640" y="2011680"/>
             <a:ext cx="9601200" cy="1828800"/>
           </a:xfrm>
@@ -9610,7 +10169,7 @@
                   <a:srgbClr val="C8D0DD"/>
                 </a:solidFill>
               </a:rPr>
-              <a:t>[Team names] · Code and notebook: [GitHub repository link]</a:t>
+              <a:t>Kashif Kazmi · Christian Balan · Furkan Yepette · Code and notebook: github.com/kazmithegreat12-lgtm/ds-ml-project-template</a:t>
             </a:r>
             <a:endParaRPr lang="en-US" sz="1200" dirty="0"/>
           </a:p>
@@ -9673,7 +10232,7 @@
                   <a:schemeClr val="accent3"/>
                 </a:solidFill>
               </a:rPr>
-              <a:t>THE PROBLEM</a:t>
+              <a:t>WHO WE ARE</a:t>
             </a:r>
             <a:endParaRPr lang="en-US" sz="1200" dirty="0"/>
           </a:p>
@@ -9711,7 +10270,7 @@
                   <a:schemeClr val="tx1"/>
                 </a:solidFill>
               </a:rPr>
-              <a:t>All or nothing: most campaigns fail</a:t>
+              <a:t>Our team</a:t>
             </a:r>
             <a:endParaRPr lang="en-US" sz="3400" dirty="0"/>
           </a:p>
@@ -9719,110 +10278,18 @@
       </p:sp>
       <p:sp>
         <p:nvSpPr>
-          <p:cNvPr id="5" name="Text 2"/>
-          <p:cNvSpPr txBox="1"/>
-          <p:nvPr/>
-        </p:nvSpPr>
-        <p:spPr>
-          <a:xfrm>
-            <a:off x="548640" y="1920240"/>
-            <a:ext cx="4754880" cy="1737360"/>
-          </a:xfrm>
-          <a:prstGeom prst="rect">
-            <a:avLst/>
-          </a:prstGeom>
-          <a:noFill/>
-          <a:ln/>
-        </p:spPr>
-        <p:txBody>
-          <a:bodyPr wrap="square" lIns="0" tIns="0" rIns="0" bIns="0" rtlCol="0" anchor="t"/>
-          <a:lstStyle/>
-          <a:p>
-            <a:pPr indent="0" marL="0">
-              <a:buNone/>
-            </a:pPr>
-            <a:r>
-              <a:rPr lang="en-US" sz="13000" b="1" dirty="0">
-                <a:solidFill>
-                  <a:schemeClr val="accent4"/>
-                </a:solidFill>
-                <a:latin typeface="Arial" pitchFamily="34" charset="0"/>
-                <a:ea typeface="Arial" pitchFamily="34" charset="-122"/>
-                <a:cs typeface="Arial" pitchFamily="34" charset="-120"/>
-              </a:rPr>
-              <a:t>60%</a:t>
-            </a:r>
-            <a:endParaRPr lang="en-US" sz="13000" dirty="0"/>
-          </a:p>
-        </p:txBody>
-      </p:sp>
-      <p:sp>
-        <p:nvSpPr>
-          <p:cNvPr id="6" name="Text 3"/>
-          <p:cNvSpPr txBox="1"/>
-          <p:nvPr/>
-        </p:nvSpPr>
-        <p:spPr>
-          <a:xfrm>
-            <a:off x="548640" y="3703320"/>
-            <a:ext cx="4754880" cy="822960"/>
-          </a:xfrm>
-          <a:prstGeom prst="rect">
-            <a:avLst/>
-          </a:prstGeom>
-          <a:noFill/>
-          <a:ln/>
-        </p:spPr>
-        <p:txBody>
-          <a:bodyPr wrap="square" lIns="0" tIns="0" rIns="0" bIns="0" rtlCol="0" anchor="t"/>
-          <a:lstStyle/>
-          <a:p>
-            <a:pPr indent="0" marL="0">
-              <a:buNone/>
-            </a:pPr>
-            <a:r>
-              <a:rPr lang="en-US" sz="2400" dirty="0">
-                <a:solidFill>
-                  <a:schemeClr val="tx1"/>
-                </a:solidFill>
-                <a:latin typeface="Calibri" pitchFamily="34" charset="0"/>
-                <a:ea typeface="Calibri" pitchFamily="34" charset="-122"/>
-                <a:cs typeface="Calibri" pitchFamily="34" charset="-120"/>
-              </a:rPr>
-              <a:t>of finished Kickstarter campaigns </a:t>
-            </a:r>
-            <a:pPr indent="0" marL="0">
-              <a:buNone/>
-            </a:pPr>
-            <a:r>
-              <a:rPr lang="en-US" sz="2400" b="1" dirty="0">
-                <a:solidFill>
-                  <a:schemeClr val="tx1"/>
-                </a:solidFill>
-                <a:latin typeface="Calibri" pitchFamily="34" charset="0"/>
-                <a:ea typeface="Calibri" pitchFamily="34" charset="-122"/>
-                <a:cs typeface="Calibri" pitchFamily="34" charset="-120"/>
-              </a:rPr>
-              <a:t>fail</a:t>
-            </a:r>
-            <a:endParaRPr lang="en-US" sz="2400" dirty="0"/>
-          </a:p>
-        </p:txBody>
-      </p:sp>
-      <p:sp>
-        <p:nvSpPr>
-          <p:cNvPr id="7" name="Card: no payout"/>
+          <p:cNvPr id="5" name="Team member: Kashif Kazmi"/>
           <p:cNvSpPr/>
           <p:nvPr/>
         </p:nvSpPr>
         <p:spPr>
           <a:xfrm>
-            <a:off x="5943600" y="1783080"/>
-            <a:ext cx="5699455" cy="1737360"/>
+            <a:off x="548640" y="1737360"/>
+            <a:ext cx="3484778" cy="3840480"/>
           </a:xfrm>
           <a:prstGeom prst="roundRect">
             <a:avLst>
-              <a:gd name="adj" fmla="val 6316"/>
+              <a:gd name="adj" fmla="val 3149"/>
             </a:avLst>
           </a:prstGeom>
           <a:solidFill>
@@ -9838,14 +10305,78 @@
       </p:sp>
       <p:sp>
         <p:nvSpPr>
+          <p:cNvPr id="6" name="Initials KK"/>
+          <p:cNvSpPr/>
+          <p:nvPr/>
+        </p:nvSpPr>
+        <p:spPr>
+          <a:xfrm>
+            <a:off x="914400" y="2057400"/>
+            <a:ext cx="1005840" cy="1005840"/>
+          </a:xfrm>
+          <a:prstGeom prst="ellipse">
+            <a:avLst/>
+          </a:prstGeom>
+          <a:solidFill>
+            <a:srgbClr val="2A78D6"/>
+          </a:solidFill>
+          <a:ln w="12700">
+            <a:solidFill>
+              <a:srgbClr val="2A78D6"/>
+            </a:solidFill>
+            <a:prstDash val="solid"/>
+          </a:ln>
+        </p:spPr>
+      </p:sp>
+      <p:sp>
+        <p:nvSpPr>
+          <p:cNvPr id="7" name="Text 4"/>
+          <p:cNvSpPr txBox="1"/>
+          <p:nvPr/>
+        </p:nvSpPr>
+        <p:spPr>
+          <a:xfrm>
+            <a:off x="914400" y="2057400"/>
+            <a:ext cx="1005840" cy="1005840"/>
+          </a:xfrm>
+          <a:prstGeom prst="rect">
+            <a:avLst/>
+          </a:prstGeom>
+          <a:noFill/>
+          <a:ln/>
+        </p:spPr>
+        <p:txBody>
+          <a:bodyPr wrap="square" lIns="0" tIns="0" rIns="0" bIns="0" rtlCol="0" anchor="ctr"/>
+          <a:lstStyle/>
+          <a:p>
+            <a:pPr algn="ctr" indent="0" marL="0">
+              <a:buNone/>
+            </a:pPr>
+            <a:r>
+              <a:rPr lang="en-US" sz="2800" b="1" dirty="0">
+                <a:solidFill>
+                  <a:schemeClr val="bg1"/>
+                </a:solidFill>
+                <a:latin typeface="Arial" pitchFamily="34" charset="0"/>
+                <a:ea typeface="Arial" pitchFamily="34" charset="-122"/>
+                <a:cs typeface="Arial" pitchFamily="34" charset="-120"/>
+              </a:rPr>
+              <a:t>KK</a:t>
+            </a:r>
+            <a:endParaRPr lang="en-US" sz="2800" dirty="0"/>
+          </a:p>
+        </p:txBody>
+      </p:sp>
+      <p:sp>
+        <p:nvSpPr>
           <p:cNvPr id="8" name="Text 5"/>
           <p:cNvSpPr txBox="1"/>
           <p:nvPr/>
         </p:nvSpPr>
         <p:spPr>
           <a:xfrm>
-            <a:off x="6263640" y="2011680"/>
-            <a:ext cx="5059375" cy="411480"/>
+            <a:off x="914400" y="3291840"/>
+            <a:ext cx="2753258" cy="502920"/>
           </a:xfrm>
           <a:prstGeom prst="rect">
             <a:avLst/>
@@ -9861,7 +10392,7 @@
               <a:buNone/>
             </a:pPr>
             <a:r>
-              <a:rPr lang="en-US" sz="2000" b="1" dirty="0">
+              <a:rPr lang="en-US" sz="2400" b="1" dirty="0">
                 <a:solidFill>
                   <a:schemeClr val="tx1"/>
                 </a:solidFill>
@@ -9869,9 +10400,9 @@
                 <a:ea typeface="Calibri" pitchFamily="34" charset="-122"/>
                 <a:cs typeface="Calibri" pitchFamily="34" charset="-120"/>
               </a:rPr>
-              <a:t>Miss the goal by $1 → receive $0</a:t>
-            </a:r>
-            <a:endParaRPr lang="en-US" sz="2000" dirty="0"/>
+              <a:t>Kashif Kazmi</a:t>
+            </a:r>
+            <a:endParaRPr lang="en-US" sz="2400" dirty="0"/>
           </a:p>
         </p:txBody>
       </p:sp>
@@ -9883,32 +10414,71 @@
         </p:nvSpPr>
         <p:spPr>
           <a:xfrm>
-            <a:off x="6263640" y="2468880"/>
-            <a:ext cx="5059375" cy="914400"/>
-          </a:xfrm>
-          <a:prstGeom prst="rect">
-            <a:avLst/>
-          </a:prstGeom>
-          <a:noFill/>
-          <a:ln/>
-        </p:spPr>
-        <p:txBody>
-          <a:bodyPr wrap="square" lIns="0" tIns="0" rIns="0" bIns="0" rtlCol="0" anchor="t"/>
+            <a:off x="914400" y="3794760"/>
+            <a:ext cx="2753258" cy="365760"/>
+          </a:xfrm>
+          <a:prstGeom prst="rect">
+            <a:avLst/>
+          </a:prstGeom>
+          <a:noFill/>
+          <a:ln/>
+        </p:spPr>
+        <p:txBody>
+          <a:bodyPr wrap="square" lIns="0" tIns="0" rIns="0" bIns="0" rtlCol="0" anchor="ctr"/>
           <a:lstStyle/>
           <a:p>
             <a:pPr indent="0" marL="0">
               <a:buNone/>
             </a:pPr>
             <a:r>
-              <a:rPr lang="en-US" sz="1600" dirty="0">
-                <a:solidFill>
-                  <a:schemeClr val="tx2"/>
+              <a:rPr lang="en-US" sz="1400" b="1" spc="200" kern="0" dirty="0">
+                <a:solidFill>
+                  <a:schemeClr val="accent3"/>
                 </a:solidFill>
                 <a:latin typeface="Calibri" pitchFamily="34" charset="0"/>
                 <a:ea typeface="Calibri" pitchFamily="34" charset="-122"/>
                 <a:cs typeface="Calibri" pitchFamily="34" charset="-120"/>
               </a:rPr>
-              <a:t>Kickstarter only pays out if the funding goal is reached. A failed campaign costs the creator weeks of work.</a:t>
+              <a:t>PROJECT MANAGER</a:t>
+            </a:r>
+            <a:endParaRPr lang="en-US" sz="1400" dirty="0"/>
+          </a:p>
+        </p:txBody>
+      </p:sp>
+      <p:sp>
+        <p:nvSpPr>
+          <p:cNvPr id="10" name="Text 7"/>
+          <p:cNvSpPr txBox="1"/>
+          <p:nvPr/>
+        </p:nvSpPr>
+        <p:spPr>
+          <a:xfrm>
+            <a:off x="914400" y="4251960"/>
+            <a:ext cx="2753258" cy="1097280"/>
+          </a:xfrm>
+          <a:prstGeom prst="rect">
+            <a:avLst/>
+          </a:prstGeom>
+          <a:noFill/>
+          <a:ln/>
+        </p:spPr>
+        <p:txBody>
+          <a:bodyPr wrap="square" lIns="0" tIns="0" rIns="0" bIns="0" rtlCol="0" anchor="t"/>
+          <a:lstStyle/>
+          <a:p>
+            <a:pPr indent="0" marL="0">
+              <a:buNone/>
+            </a:pPr>
+            <a:r>
+              <a:rPr lang="en-US" sz="1600" dirty="0">
+                <a:solidFill>
+                  <a:schemeClr val="tx2"/>
+                </a:solidFill>
+                <a:latin typeface="Calibri" pitchFamily="34" charset="0"/>
+                <a:ea typeface="Calibri" pitchFamily="34" charset="-122"/>
+                <a:cs typeface="Calibri" pitchFamily="34" charset="-120"/>
+              </a:rPr>
+              <a:t>Plans the milestones, runs the Kanban board and keeps the team on track.</a:t>
             </a:r>
             <a:endParaRPr lang="en-US" sz="1600" dirty="0"/>
           </a:p>
@@ -9916,18 +10486,18 @@
       </p:sp>
       <p:sp>
         <p:nvSpPr>
-          <p:cNvPr id="10" name="Card: deciding blind"/>
+          <p:cNvPr id="11" name="Team member: Christian Balan"/>
           <p:cNvSpPr/>
           <p:nvPr/>
         </p:nvSpPr>
         <p:spPr>
           <a:xfrm>
-            <a:off x="5943600" y="3749040"/>
-            <a:ext cx="5699455" cy="1737360"/>
+            <a:off x="4353458" y="1737360"/>
+            <a:ext cx="3484778" cy="3840480"/>
           </a:xfrm>
           <a:prstGeom prst="roundRect">
             <a:avLst>
-              <a:gd name="adj" fmla="val 6316"/>
+              <a:gd name="adj" fmla="val 3149"/>
             </a:avLst>
           </a:prstGeom>
           <a:solidFill>
@@ -9943,14 +10513,39 @@
       </p:sp>
       <p:sp>
         <p:nvSpPr>
-          <p:cNvPr id="11" name="Text 8"/>
+          <p:cNvPr id="12" name="Initials CB"/>
+          <p:cNvSpPr/>
+          <p:nvPr/>
+        </p:nvSpPr>
+        <p:spPr>
+          <a:xfrm>
+            <a:off x="4719218" y="2057400"/>
+            <a:ext cx="1005840" cy="1005840"/>
+          </a:xfrm>
+          <a:prstGeom prst="ellipse">
+            <a:avLst/>
+          </a:prstGeom>
+          <a:solidFill>
+            <a:srgbClr val="2A78D6"/>
+          </a:solidFill>
+          <a:ln w="12700">
+            <a:solidFill>
+              <a:srgbClr val="2A78D6"/>
+            </a:solidFill>
+            <a:prstDash val="solid"/>
+          </a:ln>
+        </p:spPr>
+      </p:sp>
+      <p:sp>
+        <p:nvSpPr>
+          <p:cNvPr id="13" name="Text 10"/>
           <p:cNvSpPr txBox="1"/>
           <p:nvPr/>
         </p:nvSpPr>
         <p:spPr>
           <a:xfrm>
-            <a:off x="6263640" y="3977640"/>
-            <a:ext cx="5059375" cy="411480"/>
+            <a:off x="4719218" y="2057400"/>
+            <a:ext cx="1005840" cy="1005840"/>
           </a:xfrm>
           <a:prstGeom prst="rect">
             <a:avLst/>
@@ -9962,11 +10557,50 @@
           <a:bodyPr wrap="square" lIns="0" tIns="0" rIns="0" bIns="0" rtlCol="0" anchor="ctr"/>
           <a:lstStyle/>
           <a:p>
+            <a:pPr algn="ctr" indent="0" marL="0">
+              <a:buNone/>
+            </a:pPr>
+            <a:r>
+              <a:rPr lang="en-US" sz="2800" b="1" dirty="0">
+                <a:solidFill>
+                  <a:schemeClr val="bg1"/>
+                </a:solidFill>
+                <a:latin typeface="Arial" pitchFamily="34" charset="0"/>
+                <a:ea typeface="Arial" pitchFamily="34" charset="-122"/>
+                <a:cs typeface="Arial" pitchFamily="34" charset="-120"/>
+              </a:rPr>
+              <a:t>CB</a:t>
+            </a:r>
+            <a:endParaRPr lang="en-US" sz="2800" dirty="0"/>
+          </a:p>
+        </p:txBody>
+      </p:sp>
+      <p:sp>
+        <p:nvSpPr>
+          <p:cNvPr id="14" name="Text 11"/>
+          <p:cNvSpPr txBox="1"/>
+          <p:nvPr/>
+        </p:nvSpPr>
+        <p:spPr>
+          <a:xfrm>
+            <a:off x="4719218" y="3291840"/>
+            <a:ext cx="2753258" cy="502920"/>
+          </a:xfrm>
+          <a:prstGeom prst="rect">
+            <a:avLst/>
+          </a:prstGeom>
+          <a:noFill/>
+          <a:ln/>
+        </p:spPr>
+        <p:txBody>
+          <a:bodyPr wrap="square" lIns="0" tIns="0" rIns="0" bIns="0" rtlCol="0" anchor="ctr"/>
+          <a:lstStyle/>
+          <a:p>
             <a:pPr indent="0" marL="0">
               <a:buNone/>
             </a:pPr>
             <a:r>
-              <a:rPr lang="en-US" sz="2000" b="1" dirty="0">
+              <a:rPr lang="en-US" sz="2400" b="1" dirty="0">
                 <a:solidFill>
                   <a:schemeClr val="tx1"/>
                 </a:solidFill>
@@ -9974,46 +10608,85 @@
                 <a:ea typeface="Calibri" pitchFamily="34" charset="-122"/>
                 <a:cs typeface="Calibri" pitchFamily="34" charset="-120"/>
               </a:rPr>
-              <a:t>Creators decide blind</a:t>
-            </a:r>
-            <a:endParaRPr lang="en-US" sz="2000" dirty="0"/>
-          </a:p>
-        </p:txBody>
-      </p:sp>
-      <p:sp>
-        <p:nvSpPr>
-          <p:cNvPr id="12" name="Text 9"/>
+              <a:t>Christian Balan</a:t>
+            </a:r>
+            <a:endParaRPr lang="en-US" sz="2400" dirty="0"/>
+          </a:p>
+        </p:txBody>
+      </p:sp>
+      <p:sp>
+        <p:nvSpPr>
+          <p:cNvPr id="15" name="Text 12"/>
           <p:cNvSpPr txBox="1"/>
           <p:nvPr/>
         </p:nvSpPr>
         <p:spPr>
           <a:xfrm>
-            <a:off x="6263640" y="4434840"/>
-            <a:ext cx="5059375" cy="914400"/>
-          </a:xfrm>
-          <a:prstGeom prst="rect">
-            <a:avLst/>
-          </a:prstGeom>
-          <a:noFill/>
-          <a:ln/>
-        </p:spPr>
-        <p:txBody>
-          <a:bodyPr wrap="square" lIns="0" tIns="0" rIns="0" bIns="0" rtlCol="0" anchor="t"/>
+            <a:off x="4719218" y="3794760"/>
+            <a:ext cx="2753258" cy="365760"/>
+          </a:xfrm>
+          <a:prstGeom prst="rect">
+            <a:avLst/>
+          </a:prstGeom>
+          <a:noFill/>
+          <a:ln/>
+        </p:spPr>
+        <p:txBody>
+          <a:bodyPr wrap="square" lIns="0" tIns="0" rIns="0" bIns="0" rtlCol="0" anchor="ctr"/>
           <a:lstStyle/>
           <a:p>
             <a:pPr indent="0" marL="0">
               <a:buNone/>
             </a:pPr>
             <a:r>
-              <a:rPr lang="en-US" sz="1600" dirty="0">
-                <a:solidFill>
-                  <a:schemeClr val="tx2"/>
+              <a:rPr lang="en-US" sz="1400" b="1" spc="200" kern="0" dirty="0">
+                <a:solidFill>
+                  <a:schemeClr val="accent3"/>
                 </a:solidFill>
                 <a:latin typeface="Calibri" pitchFamily="34" charset="0"/>
                 <a:ea typeface="Calibri" pitchFamily="34" charset="-122"/>
                 <a:cs typeface="Calibri" pitchFamily="34" charset="-120"/>
               </a:rPr>
-              <a:t>Goal, category, length and launch date are fixed before launch, with no data on how they affect the odds.</a:t>
+              <a:t>DESIGN THINKER</a:t>
+            </a:r>
+            <a:endParaRPr lang="en-US" sz="1400" dirty="0"/>
+          </a:p>
+        </p:txBody>
+      </p:sp>
+      <p:sp>
+        <p:nvSpPr>
+          <p:cNvPr id="16" name="Text 13"/>
+          <p:cNvSpPr txBox="1"/>
+          <p:nvPr/>
+        </p:nvSpPr>
+        <p:spPr>
+          <a:xfrm>
+            <a:off x="4719218" y="4251960"/>
+            <a:ext cx="2753258" cy="1097280"/>
+          </a:xfrm>
+          <a:prstGeom prst="rect">
+            <a:avLst/>
+          </a:prstGeom>
+          <a:noFill/>
+          <a:ln/>
+        </p:spPr>
+        <p:txBody>
+          <a:bodyPr wrap="square" lIns="0" tIns="0" rIns="0" bIns="0" rtlCol="0" anchor="t"/>
+          <a:lstStyle/>
+          <a:p>
+            <a:pPr indent="0" marL="0">
+              <a:buNone/>
+            </a:pPr>
+            <a:r>
+              <a:rPr lang="en-US" sz="1600" dirty="0">
+                <a:solidFill>
+                  <a:schemeClr val="tx2"/>
+                </a:solidFill>
+                <a:latin typeface="Calibri" pitchFamily="34" charset="0"/>
+                <a:ea typeface="Calibri" pitchFamily="34" charset="-122"/>
+                <a:cs typeface="Calibri" pitchFamily="34" charset="-120"/>
+              </a:rPr>
+              <a:t>Frames the creator’s problem and turns the findings into a clear story.</a:t>
             </a:r>
             <a:endParaRPr lang="en-US" sz="1600" dirty="0"/>
           </a:p>
@@ -10021,7 +10694,215 @@
       </p:sp>
       <p:sp>
         <p:nvSpPr>
-          <p:cNvPr id="13" name="Text 0"/>
+          <p:cNvPr id="17" name="Team member: Furkan Yepette"/>
+          <p:cNvSpPr/>
+          <p:nvPr/>
+        </p:nvSpPr>
+        <p:spPr>
+          <a:xfrm>
+            <a:off x="8158277" y="1737360"/>
+            <a:ext cx="3484778" cy="3840480"/>
+          </a:xfrm>
+          <a:prstGeom prst="roundRect">
+            <a:avLst>
+              <a:gd name="adj" fmla="val 3149"/>
+            </a:avLst>
+          </a:prstGeom>
+          <a:solidFill>
+            <a:srgbClr val="F2F4F8"/>
+          </a:solidFill>
+          <a:ln w="12700">
+            <a:solidFill>
+              <a:srgbClr val="F2F4F8"/>
+            </a:solidFill>
+            <a:prstDash val="solid"/>
+          </a:ln>
+        </p:spPr>
+      </p:sp>
+      <p:sp>
+        <p:nvSpPr>
+          <p:cNvPr id="18" name="Initials FY"/>
+          <p:cNvSpPr/>
+          <p:nvPr/>
+        </p:nvSpPr>
+        <p:spPr>
+          <a:xfrm>
+            <a:off x="8524037" y="2057400"/>
+            <a:ext cx="1005840" cy="1005840"/>
+          </a:xfrm>
+          <a:prstGeom prst="ellipse">
+            <a:avLst/>
+          </a:prstGeom>
+          <a:solidFill>
+            <a:srgbClr val="2A78D6"/>
+          </a:solidFill>
+          <a:ln w="12700">
+            <a:solidFill>
+              <a:srgbClr val="2A78D6"/>
+            </a:solidFill>
+            <a:prstDash val="solid"/>
+          </a:ln>
+        </p:spPr>
+      </p:sp>
+      <p:sp>
+        <p:nvSpPr>
+          <p:cNvPr id="19" name="Text 16"/>
+          <p:cNvSpPr txBox="1"/>
+          <p:nvPr/>
+        </p:nvSpPr>
+        <p:spPr>
+          <a:xfrm>
+            <a:off x="8524037" y="2057400"/>
+            <a:ext cx="1005840" cy="1005840"/>
+          </a:xfrm>
+          <a:prstGeom prst="rect">
+            <a:avLst/>
+          </a:prstGeom>
+          <a:noFill/>
+          <a:ln/>
+        </p:spPr>
+        <p:txBody>
+          <a:bodyPr wrap="square" lIns="0" tIns="0" rIns="0" bIns="0" rtlCol="0" anchor="ctr"/>
+          <a:lstStyle/>
+          <a:p>
+            <a:pPr algn="ctr" indent="0" marL="0">
+              <a:buNone/>
+            </a:pPr>
+            <a:r>
+              <a:rPr lang="en-US" sz="2800" b="1" dirty="0">
+                <a:solidFill>
+                  <a:schemeClr val="bg1"/>
+                </a:solidFill>
+                <a:latin typeface="Arial" pitchFamily="34" charset="0"/>
+                <a:ea typeface="Arial" pitchFamily="34" charset="-122"/>
+                <a:cs typeface="Arial" pitchFamily="34" charset="-120"/>
+              </a:rPr>
+              <a:t>FY</a:t>
+            </a:r>
+            <a:endParaRPr lang="en-US" sz="2800" dirty="0"/>
+          </a:p>
+        </p:txBody>
+      </p:sp>
+      <p:sp>
+        <p:nvSpPr>
+          <p:cNvPr id="20" name="Text 17"/>
+          <p:cNvSpPr txBox="1"/>
+          <p:nvPr/>
+        </p:nvSpPr>
+        <p:spPr>
+          <a:xfrm>
+            <a:off x="8524037" y="3291840"/>
+            <a:ext cx="2753258" cy="502920"/>
+          </a:xfrm>
+          <a:prstGeom prst="rect">
+            <a:avLst/>
+          </a:prstGeom>
+          <a:noFill/>
+          <a:ln/>
+        </p:spPr>
+        <p:txBody>
+          <a:bodyPr wrap="square" lIns="0" tIns="0" rIns="0" bIns="0" rtlCol="0" anchor="ctr"/>
+          <a:lstStyle/>
+          <a:p>
+            <a:pPr indent="0" marL="0">
+              <a:buNone/>
+            </a:pPr>
+            <a:r>
+              <a:rPr lang="en-US" sz="2400" b="1" dirty="0">
+                <a:solidFill>
+                  <a:schemeClr val="tx1"/>
+                </a:solidFill>
+                <a:latin typeface="Calibri" pitchFamily="34" charset="0"/>
+                <a:ea typeface="Calibri" pitchFamily="34" charset="-122"/>
+                <a:cs typeface="Calibri" pitchFamily="34" charset="-120"/>
+              </a:rPr>
+              <a:t>Furkan Yepette</a:t>
+            </a:r>
+            <a:endParaRPr lang="en-US" sz="2400" dirty="0"/>
+          </a:p>
+        </p:txBody>
+      </p:sp>
+      <p:sp>
+        <p:nvSpPr>
+          <p:cNvPr id="21" name="Text 18"/>
+          <p:cNvSpPr txBox="1"/>
+          <p:nvPr/>
+        </p:nvSpPr>
+        <p:spPr>
+          <a:xfrm>
+            <a:off x="8524037" y="3794760"/>
+            <a:ext cx="2753258" cy="365760"/>
+          </a:xfrm>
+          <a:prstGeom prst="rect">
+            <a:avLst/>
+          </a:prstGeom>
+          <a:noFill/>
+          <a:ln/>
+        </p:spPr>
+        <p:txBody>
+          <a:bodyPr wrap="square" lIns="0" tIns="0" rIns="0" bIns="0" rtlCol="0" anchor="ctr"/>
+          <a:lstStyle/>
+          <a:p>
+            <a:pPr indent="0" marL="0">
+              <a:buNone/>
+            </a:pPr>
+            <a:r>
+              <a:rPr lang="en-US" sz="1400" b="1" spc="200" kern="0" dirty="0">
+                <a:solidFill>
+                  <a:schemeClr val="accent3"/>
+                </a:solidFill>
+                <a:latin typeface="Calibri" pitchFamily="34" charset="0"/>
+                <a:ea typeface="Calibri" pitchFamily="34" charset="-122"/>
+                <a:cs typeface="Calibri" pitchFamily="34" charset="-120"/>
+              </a:rPr>
+              <a:t>DATA SCIENTIST</a:t>
+            </a:r>
+            <a:endParaRPr lang="en-US" sz="1400" dirty="0"/>
+          </a:p>
+        </p:txBody>
+      </p:sp>
+      <p:sp>
+        <p:nvSpPr>
+          <p:cNvPr id="22" name="Text 19"/>
+          <p:cNvSpPr txBox="1"/>
+          <p:nvPr/>
+        </p:nvSpPr>
+        <p:spPr>
+          <a:xfrm>
+            <a:off x="8524037" y="4251960"/>
+            <a:ext cx="2753258" cy="1097280"/>
+          </a:xfrm>
+          <a:prstGeom prst="rect">
+            <a:avLst/>
+          </a:prstGeom>
+          <a:noFill/>
+          <a:ln/>
+        </p:spPr>
+        <p:txBody>
+          <a:bodyPr wrap="square" lIns="0" tIns="0" rIns="0" bIns="0" rtlCol="0" anchor="t"/>
+          <a:lstStyle/>
+          <a:p>
+            <a:pPr indent="0" marL="0">
+              <a:buNone/>
+            </a:pPr>
+            <a:r>
+              <a:rPr lang="en-US" sz="1600" dirty="0">
+                <a:solidFill>
+                  <a:schemeClr val="tx2"/>
+                </a:solidFill>
+                <a:latin typeface="Calibri" pitchFamily="34" charset="0"/>
+                <a:ea typeface="Calibri" pitchFamily="34" charset="-122"/>
+                <a:cs typeface="Calibri" pitchFamily="34" charset="-120"/>
+              </a:rPr>
+              <a:t>Cleans and explores the data and builds the prediction model.</a:t>
+            </a:r>
+            <a:endParaRPr lang="en-US" sz="1600" dirty="0"/>
+          </a:p>
+        </p:txBody>
+      </p:sp>
+      <p:sp>
+        <p:nvSpPr>
+          <p:cNvPr id="23" name="Text 0"/>
           <p:cNvSpPr/>
           <p:nvPr>
             <p:ph idx="102" type="body" hasCustomPrompt="1"/>
@@ -10045,14 +10926,6 @@
             <a:pPr indent="0" marL="0">
               <a:buNone/>
             </a:pPr>
-            <a:r>
-              <a:rPr lang="en-US" sz="1100" dirty="0">
-                <a:solidFill>
-                  <a:srgbClr val="5B6472"/>
-                </a:solidFill>
-              </a:rPr>
-              <a:t>Source: Kickstarter Projects dataset (Kaggle), 331,675 finished campaigns 2009–2018</a:t>
-            </a:r>
             <a:endParaRPr lang="en-US" sz="1100" dirty="0"/>
           </a:p>
         </p:txBody>
@@ -10159,7 +11032,7 @@
                   <a:schemeClr val="accent3"/>
                 </a:solidFill>
               </a:rPr>
-              <a:t>OUR QUESTION</a:t>
+              <a:t>THE PROBLEM</a:t>
             </a:r>
             <a:endParaRPr lang="en-US" sz="1200" dirty="0"/>
           </a:p>
@@ -10197,7 +11070,7 @@
                   <a:schemeClr val="tx1"/>
                 </a:solidFill>
               </a:rPr>
-              <a:t>How likely is a campaign to succeed?</a:t>
+              <a:t>All or nothing: most campaigns fail</a:t>
             </a:r>
             <a:endParaRPr lang="en-US" sz="3400" dirty="0"/>
           </a:p>
@@ -10211,24 +11084,63 @@
         </p:nvSpPr>
         <p:spPr>
           <a:xfrm>
-            <a:off x="548640" y="1600200"/>
-            <a:ext cx="11094415" cy="548640"/>
-          </a:xfrm>
-          <a:prstGeom prst="rect">
-            <a:avLst/>
-          </a:prstGeom>
-          <a:noFill/>
-          <a:ln/>
-        </p:spPr>
-        <p:txBody>
-          <a:bodyPr wrap="square" lIns="0" tIns="0" rIns="0" bIns="0" rtlCol="0" anchor="ctr"/>
+            <a:off x="548640" y="1920240"/>
+            <a:ext cx="4754880" cy="1737360"/>
+          </a:xfrm>
+          <a:prstGeom prst="rect">
+            <a:avLst/>
+          </a:prstGeom>
+          <a:noFill/>
+          <a:ln/>
+        </p:spPr>
+        <p:txBody>
+          <a:bodyPr wrap="square" lIns="0" tIns="0" rIns="0" bIns="0" rtlCol="0" anchor="t"/>
           <a:lstStyle/>
           <a:p>
             <a:pPr indent="0" marL="0">
               <a:buNone/>
             </a:pPr>
             <a:r>
-              <a:rPr lang="en-US" sz="2200" dirty="0">
+              <a:rPr lang="en-US" sz="13000" b="1" dirty="0">
+                <a:solidFill>
+                  <a:schemeClr val="accent4"/>
+                </a:solidFill>
+                <a:latin typeface="Arial" pitchFamily="34" charset="0"/>
+                <a:ea typeface="Arial" pitchFamily="34" charset="-122"/>
+                <a:cs typeface="Arial" pitchFamily="34" charset="-120"/>
+              </a:rPr>
+              <a:t>60%</a:t>
+            </a:r>
+            <a:endParaRPr lang="en-US" sz="13000" dirty="0"/>
+          </a:p>
+        </p:txBody>
+      </p:sp>
+      <p:sp>
+        <p:nvSpPr>
+          <p:cNvPr id="6" name="Text 3"/>
+          <p:cNvSpPr txBox="1"/>
+          <p:nvPr/>
+        </p:nvSpPr>
+        <p:spPr>
+          <a:xfrm>
+            <a:off x="548640" y="3703320"/>
+            <a:ext cx="4754880" cy="822960"/>
+          </a:xfrm>
+          <a:prstGeom prst="rect">
+            <a:avLst/>
+          </a:prstGeom>
+          <a:noFill/>
+          <a:ln/>
+        </p:spPr>
+        <p:txBody>
+          <a:bodyPr wrap="square" lIns="0" tIns="0" rIns="0" bIns="0" rtlCol="0" anchor="t"/>
+          <a:lstStyle/>
+          <a:p>
+            <a:pPr indent="0" marL="0">
+              <a:buNone/>
+            </a:pPr>
+            <a:r>
+              <a:rPr lang="en-US" sz="2400" dirty="0">
                 <a:solidFill>
                   <a:schemeClr val="tx1"/>
                 </a:solidFill>
@@ -10236,13 +11148,13 @@
                 <a:ea typeface="Calibri" pitchFamily="34" charset="-122"/>
                 <a:cs typeface="Calibri" pitchFamily="34" charset="-120"/>
               </a:rPr>
-              <a:t>Using only what a creator knows </a:t>
+              <a:t>of finished Kickstarter campaigns </a:t>
             </a:r>
             <a:pPr indent="0" marL="0">
               <a:buNone/>
             </a:pPr>
             <a:r>
-              <a:rPr lang="en-US" sz="2200" b="1" dirty="0">
+              <a:rPr lang="en-US" sz="2400" b="1" dirty="0">
                 <a:solidFill>
                   <a:schemeClr val="tx1"/>
                 </a:solidFill>
@@ -10250,40 +11162,26 @@
                 <a:ea typeface="Calibri" pitchFamily="34" charset="-122"/>
                 <a:cs typeface="Calibri" pitchFamily="34" charset="-120"/>
               </a:rPr>
-              <a:t>before launch</a:t>
-            </a:r>
-            <a:pPr indent="0" marL="0">
-              <a:buNone/>
-            </a:pPr>
-            <a:r>
-              <a:rPr lang="en-US" sz="2200" dirty="0">
-                <a:solidFill>
-                  <a:schemeClr val="tx1"/>
-                </a:solidFill>
-                <a:latin typeface="Calibri" pitchFamily="34" charset="0"/>
-                <a:ea typeface="Calibri" pitchFamily="34" charset="-122"/>
-                <a:cs typeface="Calibri" pitchFamily="34" charset="-120"/>
-              </a:rPr>
-              <a:t>, we estimate the chance of success.</a:t>
-            </a:r>
-            <a:endParaRPr lang="en-US" sz="2200" dirty="0"/>
-          </a:p>
-        </p:txBody>
-      </p:sp>
-      <p:sp>
-        <p:nvSpPr>
-          <p:cNvPr id="6" name="Card: data"/>
+              <a:t>fail</a:t>
+            </a:r>
+            <a:endParaRPr lang="en-US" sz="2400" dirty="0"/>
+          </a:p>
+        </p:txBody>
+      </p:sp>
+      <p:sp>
+        <p:nvSpPr>
+          <p:cNvPr id="7" name="Card: no payout"/>
           <p:cNvSpPr/>
           <p:nvPr/>
         </p:nvSpPr>
         <p:spPr>
           <a:xfrm>
-            <a:off x="548640" y="2514600"/>
-            <a:ext cx="3484778" cy="2651760"/>
+            <a:off x="5943600" y="1783080"/>
+            <a:ext cx="5699455" cy="1737360"/>
           </a:xfrm>
           <a:prstGeom prst="roundRect">
             <a:avLst>
-              <a:gd name="adj" fmla="val 4138"/>
+              <a:gd name="adj" fmla="val 6316"/>
             </a:avLst>
           </a:prstGeom>
           <a:solidFill>
@@ -10299,39 +11197,14 @@
       </p:sp>
       <p:sp>
         <p:nvSpPr>
-          <p:cNvPr id="7" name="Step 1"/>
-          <p:cNvSpPr/>
-          <p:nvPr/>
-        </p:nvSpPr>
-        <p:spPr>
-          <a:xfrm>
-            <a:off x="868680" y="2788920"/>
-            <a:ext cx="548640" cy="548640"/>
-          </a:xfrm>
-          <a:prstGeom prst="ellipse">
-            <a:avLst/>
-          </a:prstGeom>
-          <a:solidFill>
-            <a:srgbClr val="2A78D6"/>
-          </a:solidFill>
-          <a:ln w="12700">
-            <a:solidFill>
-              <a:srgbClr val="2A78D6"/>
-            </a:solidFill>
-            <a:prstDash val="solid"/>
-          </a:ln>
-        </p:spPr>
-      </p:sp>
-      <p:sp>
-        <p:nvSpPr>
           <p:cNvPr id="8" name="Text 5"/>
           <p:cNvSpPr txBox="1"/>
           <p:nvPr/>
         </p:nvSpPr>
         <p:spPr>
           <a:xfrm>
-            <a:off x="868680" y="2788920"/>
-            <a:ext cx="548640" cy="548640"/>
+            <a:off x="6263640" y="2011680"/>
+            <a:ext cx="5059375" cy="411480"/>
           </a:xfrm>
           <a:prstGeom prst="rect">
             <a:avLst/>
@@ -10343,19 +11216,19 @@
           <a:bodyPr wrap="square" lIns="0" tIns="0" rIns="0" bIns="0" rtlCol="0" anchor="ctr"/>
           <a:lstStyle/>
           <a:p>
-            <a:pPr algn="ctr" indent="0" marL="0">
+            <a:pPr indent="0" marL="0">
               <a:buNone/>
             </a:pPr>
             <a:r>
               <a:rPr lang="en-US" sz="2000" b="1" dirty="0">
                 <a:solidFill>
-                  <a:schemeClr val="bg1"/>
+                  <a:schemeClr val="tx1"/>
                 </a:solidFill>
                 <a:latin typeface="Calibri" pitchFamily="34" charset="0"/>
                 <a:ea typeface="Calibri" pitchFamily="34" charset="-122"/>
                 <a:cs typeface="Calibri" pitchFamily="34" charset="-120"/>
               </a:rPr>
-              <a:t>1</a:t>
+              <a:t>Miss the goal by $1 → receive $0</a:t>
             </a:r>
             <a:endParaRPr lang="en-US" sz="2000" dirty="0"/>
           </a:p>
@@ -10369,110 +11242,32 @@
         </p:nvSpPr>
         <p:spPr>
           <a:xfrm>
-            <a:off x="1554480" y="2880360"/>
-            <a:ext cx="2204618" cy="365760"/>
-          </a:xfrm>
-          <a:prstGeom prst="rect">
-            <a:avLst/>
-          </a:prstGeom>
-          <a:noFill/>
-          <a:ln/>
-        </p:spPr>
-        <p:txBody>
-          <a:bodyPr wrap="square" lIns="0" tIns="0" rIns="0" bIns="0" rtlCol="0" anchor="ctr"/>
+            <a:off x="6263640" y="2468880"/>
+            <a:ext cx="5059375" cy="914400"/>
+          </a:xfrm>
+          <a:prstGeom prst="rect">
+            <a:avLst/>
+          </a:prstGeom>
+          <a:noFill/>
+          <a:ln/>
+        </p:spPr>
+        <p:txBody>
+          <a:bodyPr wrap="square" lIns="0" tIns="0" rIns="0" bIns="0" rtlCol="0" anchor="t"/>
           <a:lstStyle/>
           <a:p>
             <a:pPr indent="0" marL="0">
               <a:buNone/>
             </a:pPr>
             <a:r>
-              <a:rPr lang="en-US" sz="1300" b="1" spc="200" kern="0" dirty="0">
-                <a:solidFill>
-                  <a:schemeClr val="accent3"/>
+              <a:rPr lang="en-US" sz="1600" dirty="0">
+                <a:solidFill>
+                  <a:schemeClr val="tx2"/>
                 </a:solidFill>
                 <a:latin typeface="Calibri" pitchFamily="34" charset="0"/>
                 <a:ea typeface="Calibri" pitchFamily="34" charset="-122"/>
                 <a:cs typeface="Calibri" pitchFamily="34" charset="-120"/>
               </a:rPr>
-              <a:t>DATA</a:t>
-            </a:r>
-            <a:endParaRPr lang="en-US" sz="1300" dirty="0"/>
-          </a:p>
-        </p:txBody>
-      </p:sp>
-      <p:sp>
-        <p:nvSpPr>
-          <p:cNvPr id="10" name="Text 7"/>
-          <p:cNvSpPr txBox="1"/>
-          <p:nvPr/>
-        </p:nvSpPr>
-        <p:spPr>
-          <a:xfrm>
-            <a:off x="868680" y="3611880"/>
-            <a:ext cx="2844698" cy="457200"/>
-          </a:xfrm>
-          <a:prstGeom prst="rect">
-            <a:avLst/>
-          </a:prstGeom>
-          <a:noFill/>
-          <a:ln/>
-        </p:spPr>
-        <p:txBody>
-          <a:bodyPr wrap="square" lIns="0" tIns="0" rIns="0" bIns="0" rtlCol="0" anchor="ctr"/>
-          <a:lstStyle/>
-          <a:p>
-            <a:pPr indent="0" marL="0">
-              <a:buNone/>
-            </a:pPr>
-            <a:r>
-              <a:rPr lang="en-US" sz="2200" b="1" dirty="0">
-                <a:solidFill>
-                  <a:schemeClr val="tx1"/>
-                </a:solidFill>
-                <a:latin typeface="Calibri" pitchFamily="34" charset="0"/>
-                <a:ea typeface="Calibri" pitchFamily="34" charset="-122"/>
-                <a:cs typeface="Calibri" pitchFamily="34" charset="-120"/>
-              </a:rPr>
-              <a:t>331,675 campaigns</a:t>
-            </a:r>
-            <a:endParaRPr lang="en-US" sz="2200" dirty="0"/>
-          </a:p>
-        </p:txBody>
-      </p:sp>
-      <p:sp>
-        <p:nvSpPr>
-          <p:cNvPr id="11" name="Text 8"/>
-          <p:cNvSpPr txBox="1"/>
-          <p:nvPr/>
-        </p:nvSpPr>
-        <p:spPr>
-          <a:xfrm>
-            <a:off x="868680" y="4114800"/>
-            <a:ext cx="2844698" cy="868680"/>
-          </a:xfrm>
-          <a:prstGeom prst="rect">
-            <a:avLst/>
-          </a:prstGeom>
-          <a:noFill/>
-          <a:ln/>
-        </p:spPr>
-        <p:txBody>
-          <a:bodyPr wrap="square" lIns="0" tIns="0" rIns="0" bIns="0" rtlCol="0" anchor="t"/>
-          <a:lstStyle/>
-          <a:p>
-            <a:pPr indent="0" marL="0">
-              <a:buNone/>
-            </a:pPr>
-            <a:r>
-              <a:rPr lang="en-US" sz="1600" dirty="0">
-                <a:solidFill>
-                  <a:schemeClr val="tx2"/>
-                </a:solidFill>
-                <a:latin typeface="Calibri" pitchFamily="34" charset="0"/>
-                <a:ea typeface="Calibri" pitchFamily="34" charset="-122"/>
-                <a:cs typeface="Calibri" pitchFamily="34" charset="-120"/>
-              </a:rPr>
-              <a:t>Finished between 2009 and 2018, in 15 categories and 22 countries</a:t>
+              <a:t>Kickstarter only pays out if the funding goal is reached. A failed campaign costs the creator weeks of work.</a:t>
             </a:r>
             <a:endParaRPr lang="en-US" sz="1600" dirty="0"/>
           </a:p>
@@ -10480,18 +11275,18 @@
       </p:sp>
       <p:sp>
         <p:nvSpPr>
-          <p:cNvPr id="12" name="Card: input"/>
+          <p:cNvPr id="10" name="Card: deciding blind"/>
           <p:cNvSpPr/>
           <p:nvPr/>
         </p:nvSpPr>
         <p:spPr>
           <a:xfrm>
-            <a:off x="4353458" y="2514600"/>
-            <a:ext cx="3484778" cy="2651760"/>
+            <a:off x="5943600" y="3749040"/>
+            <a:ext cx="5699455" cy="1737360"/>
           </a:xfrm>
           <a:prstGeom prst="roundRect">
             <a:avLst>
-              <a:gd name="adj" fmla="val 4138"/>
+              <a:gd name="adj" fmla="val 6316"/>
             </a:avLst>
           </a:prstGeom>
           <a:solidFill>
@@ -10507,39 +11302,14 @@
       </p:sp>
       <p:sp>
         <p:nvSpPr>
-          <p:cNvPr id="13" name="Step 2"/>
-          <p:cNvSpPr/>
-          <p:nvPr/>
-        </p:nvSpPr>
-        <p:spPr>
-          <a:xfrm>
-            <a:off x="4673498" y="2788920"/>
-            <a:ext cx="548640" cy="548640"/>
-          </a:xfrm>
-          <a:prstGeom prst="ellipse">
-            <a:avLst/>
-          </a:prstGeom>
-          <a:solidFill>
-            <a:srgbClr val="2A78D6"/>
-          </a:solidFill>
-          <a:ln w="12700">
-            <a:solidFill>
-              <a:srgbClr val="2A78D6"/>
-            </a:solidFill>
-            <a:prstDash val="solid"/>
-          </a:ln>
-        </p:spPr>
-      </p:sp>
-      <p:sp>
-        <p:nvSpPr>
-          <p:cNvPr id="14" name="Text 11"/>
+          <p:cNvPr id="11" name="Text 8"/>
           <p:cNvSpPr txBox="1"/>
           <p:nvPr/>
         </p:nvSpPr>
         <p:spPr>
           <a:xfrm>
-            <a:off x="4673498" y="2788920"/>
-            <a:ext cx="548640" cy="548640"/>
+            <a:off x="6263640" y="3977640"/>
+            <a:ext cx="5059375" cy="411480"/>
           </a:xfrm>
           <a:prstGeom prst="rect">
             <a:avLst/>
@@ -10551,19 +11321,19 @@
           <a:bodyPr wrap="square" lIns="0" tIns="0" rIns="0" bIns="0" rtlCol="0" anchor="ctr"/>
           <a:lstStyle/>
           <a:p>
-            <a:pPr algn="ctr" indent="0" marL="0">
+            <a:pPr indent="0" marL="0">
               <a:buNone/>
             </a:pPr>
             <a:r>
               <a:rPr lang="en-US" sz="2000" b="1" dirty="0">
                 <a:solidFill>
-                  <a:schemeClr val="bg1"/>
+                  <a:schemeClr val="tx1"/>
                 </a:solidFill>
                 <a:latin typeface="Calibri" pitchFamily="34" charset="0"/>
                 <a:ea typeface="Calibri" pitchFamily="34" charset="-122"/>
                 <a:cs typeface="Calibri" pitchFamily="34" charset="-120"/>
               </a:rPr>
-              <a:t>2</a:t>
+              <a:t>Creators decide blind</a:t>
             </a:r>
             <a:endParaRPr lang="en-US" sz="2000" dirty="0"/>
           </a:p>
@@ -10571,116 +11341,38 @@
       </p:sp>
       <p:sp>
         <p:nvSpPr>
-          <p:cNvPr id="15" name="Text 12"/>
+          <p:cNvPr id="12" name="Text 9"/>
           <p:cNvSpPr txBox="1"/>
           <p:nvPr/>
         </p:nvSpPr>
         <p:spPr>
           <a:xfrm>
-            <a:off x="5359298" y="2880360"/>
-            <a:ext cx="2204618" cy="365760"/>
-          </a:xfrm>
-          <a:prstGeom prst="rect">
-            <a:avLst/>
-          </a:prstGeom>
-          <a:noFill/>
-          <a:ln/>
-        </p:spPr>
-        <p:txBody>
-          <a:bodyPr wrap="square" lIns="0" tIns="0" rIns="0" bIns="0" rtlCol="0" anchor="ctr"/>
+            <a:off x="6263640" y="4434840"/>
+            <a:ext cx="5059375" cy="914400"/>
+          </a:xfrm>
+          <a:prstGeom prst="rect">
+            <a:avLst/>
+          </a:prstGeom>
+          <a:noFill/>
+          <a:ln/>
+        </p:spPr>
+        <p:txBody>
+          <a:bodyPr wrap="square" lIns="0" tIns="0" rIns="0" bIns="0" rtlCol="0" anchor="t"/>
           <a:lstStyle/>
           <a:p>
             <a:pPr indent="0" marL="0">
               <a:buNone/>
             </a:pPr>
             <a:r>
-              <a:rPr lang="en-US" sz="1300" b="1" spc="200" kern="0" dirty="0">
-                <a:solidFill>
-                  <a:schemeClr val="accent3"/>
+              <a:rPr lang="en-US" sz="1600" dirty="0">
+                <a:solidFill>
+                  <a:schemeClr val="tx2"/>
                 </a:solidFill>
                 <a:latin typeface="Calibri" pitchFamily="34" charset="0"/>
                 <a:ea typeface="Calibri" pitchFamily="34" charset="-122"/>
                 <a:cs typeface="Calibri" pitchFamily="34" charset="-120"/>
               </a:rPr>
-              <a:t>INPUT</a:t>
-            </a:r>
-            <a:endParaRPr lang="en-US" sz="1300" dirty="0"/>
-          </a:p>
-        </p:txBody>
-      </p:sp>
-      <p:sp>
-        <p:nvSpPr>
-          <p:cNvPr id="16" name="Text 13"/>
-          <p:cNvSpPr txBox="1"/>
-          <p:nvPr/>
-        </p:nvSpPr>
-        <p:spPr>
-          <a:xfrm>
-            <a:off x="4673498" y="3611880"/>
-            <a:ext cx="2844698" cy="457200"/>
-          </a:xfrm>
-          <a:prstGeom prst="rect">
-            <a:avLst/>
-          </a:prstGeom>
-          <a:noFill/>
-          <a:ln/>
-        </p:spPr>
-        <p:txBody>
-          <a:bodyPr wrap="square" lIns="0" tIns="0" rIns="0" bIns="0" rtlCol="0" anchor="ctr"/>
-          <a:lstStyle/>
-          <a:p>
-            <a:pPr indent="0" marL="0">
-              <a:buNone/>
-            </a:pPr>
-            <a:r>
-              <a:rPr lang="en-US" sz="2200" b="1" dirty="0">
-                <a:solidFill>
-                  <a:schemeClr val="tx1"/>
-                </a:solidFill>
-                <a:latin typeface="Calibri" pitchFamily="34" charset="0"/>
-                <a:ea typeface="Calibri" pitchFamily="34" charset="-122"/>
-                <a:cs typeface="Calibri" pitchFamily="34" charset="-120"/>
-              </a:rPr>
-              <a:t>The campaign plan</a:t>
-            </a:r>
-            <a:endParaRPr lang="en-US" sz="2200" dirty="0"/>
-          </a:p>
-        </p:txBody>
-      </p:sp>
-      <p:sp>
-        <p:nvSpPr>
-          <p:cNvPr id="17" name="Text 14"/>
-          <p:cNvSpPr txBox="1"/>
-          <p:nvPr/>
-        </p:nvSpPr>
-        <p:spPr>
-          <a:xfrm>
-            <a:off x="4673498" y="4114800"/>
-            <a:ext cx="2844698" cy="868680"/>
-          </a:xfrm>
-          <a:prstGeom prst="rect">
-            <a:avLst/>
-          </a:prstGeom>
-          <a:noFill/>
-          <a:ln/>
-        </p:spPr>
-        <p:txBody>
-          <a:bodyPr wrap="square" lIns="0" tIns="0" rIns="0" bIns="0" rtlCol="0" anchor="t"/>
-          <a:lstStyle/>
-          <a:p>
-            <a:pPr indent="0" marL="0">
-              <a:buNone/>
-            </a:pPr>
-            <a:r>
-              <a:rPr lang="en-US" sz="1600" dirty="0">
-                <a:solidFill>
-                  <a:schemeClr val="tx2"/>
-                </a:solidFill>
-                <a:latin typeface="Calibri" pitchFamily="34" charset="0"/>
-                <a:ea typeface="Calibri" pitchFamily="34" charset="-122"/>
-                <a:cs typeface="Calibri" pitchFamily="34" charset="-120"/>
-              </a:rPr>
-              <a:t>Goal, category, country, length, launch date and the title</a:t>
+              <a:t>Goal, category, length and launch date are fixed before launch, with no data on how they affect the odds.</a:t>
             </a:r>
             <a:endParaRPr lang="en-US" sz="1600" dirty="0"/>
           </a:p>
@@ -10688,215 +11380,7 @@
       </p:sp>
       <p:sp>
         <p:nvSpPr>
-          <p:cNvPr id="18" name="Card: output"/>
-          <p:cNvSpPr/>
-          <p:nvPr/>
-        </p:nvSpPr>
-        <p:spPr>
-          <a:xfrm>
-            <a:off x="8158277" y="2514600"/>
-            <a:ext cx="3484778" cy="2651760"/>
-          </a:xfrm>
-          <a:prstGeom prst="roundRect">
-            <a:avLst>
-              <a:gd name="adj" fmla="val 4138"/>
-            </a:avLst>
-          </a:prstGeom>
-          <a:solidFill>
-            <a:srgbClr val="F2F4F8"/>
-          </a:solidFill>
-          <a:ln w="12700">
-            <a:solidFill>
-              <a:srgbClr val="F2F4F8"/>
-            </a:solidFill>
-            <a:prstDash val="solid"/>
-          </a:ln>
-        </p:spPr>
-      </p:sp>
-      <p:sp>
-        <p:nvSpPr>
-          <p:cNvPr id="19" name="Step 3"/>
-          <p:cNvSpPr/>
-          <p:nvPr/>
-        </p:nvSpPr>
-        <p:spPr>
-          <a:xfrm>
-            <a:off x="8478317" y="2788920"/>
-            <a:ext cx="548640" cy="548640"/>
-          </a:xfrm>
-          <a:prstGeom prst="ellipse">
-            <a:avLst/>
-          </a:prstGeom>
-          <a:solidFill>
-            <a:srgbClr val="2A78D6"/>
-          </a:solidFill>
-          <a:ln w="12700">
-            <a:solidFill>
-              <a:srgbClr val="2A78D6"/>
-            </a:solidFill>
-            <a:prstDash val="solid"/>
-          </a:ln>
-        </p:spPr>
-      </p:sp>
-      <p:sp>
-        <p:nvSpPr>
-          <p:cNvPr id="20" name="Text 17"/>
-          <p:cNvSpPr txBox="1"/>
-          <p:nvPr/>
-        </p:nvSpPr>
-        <p:spPr>
-          <a:xfrm>
-            <a:off x="8478317" y="2788920"/>
-            <a:ext cx="548640" cy="548640"/>
-          </a:xfrm>
-          <a:prstGeom prst="rect">
-            <a:avLst/>
-          </a:prstGeom>
-          <a:noFill/>
-          <a:ln/>
-        </p:spPr>
-        <p:txBody>
-          <a:bodyPr wrap="square" lIns="0" tIns="0" rIns="0" bIns="0" rtlCol="0" anchor="ctr"/>
-          <a:lstStyle/>
-          <a:p>
-            <a:pPr algn="ctr" indent="0" marL="0">
-              <a:buNone/>
-            </a:pPr>
-            <a:r>
-              <a:rPr lang="en-US" sz="2000" b="1" dirty="0">
-                <a:solidFill>
-                  <a:schemeClr val="bg1"/>
-                </a:solidFill>
-                <a:latin typeface="Calibri" pitchFamily="34" charset="0"/>
-                <a:ea typeface="Calibri" pitchFamily="34" charset="-122"/>
-                <a:cs typeface="Calibri" pitchFamily="34" charset="-120"/>
-              </a:rPr>
-              <a:t>3</a:t>
-            </a:r>
-            <a:endParaRPr lang="en-US" sz="2000" dirty="0"/>
-          </a:p>
-        </p:txBody>
-      </p:sp>
-      <p:sp>
-        <p:nvSpPr>
-          <p:cNvPr id="21" name="Text 18"/>
-          <p:cNvSpPr txBox="1"/>
-          <p:nvPr/>
-        </p:nvSpPr>
-        <p:spPr>
-          <a:xfrm>
-            <a:off x="9164117" y="2880360"/>
-            <a:ext cx="2204618" cy="365760"/>
-          </a:xfrm>
-          <a:prstGeom prst="rect">
-            <a:avLst/>
-          </a:prstGeom>
-          <a:noFill/>
-          <a:ln/>
-        </p:spPr>
-        <p:txBody>
-          <a:bodyPr wrap="square" lIns="0" tIns="0" rIns="0" bIns="0" rtlCol="0" anchor="ctr"/>
-          <a:lstStyle/>
-          <a:p>
-            <a:pPr indent="0" marL="0">
-              <a:buNone/>
-            </a:pPr>
-            <a:r>
-              <a:rPr lang="en-US" sz="1300" b="1" spc="200" kern="0" dirty="0">
-                <a:solidFill>
-                  <a:schemeClr val="accent3"/>
-                </a:solidFill>
-                <a:latin typeface="Calibri" pitchFamily="34" charset="0"/>
-                <a:ea typeface="Calibri" pitchFamily="34" charset="-122"/>
-                <a:cs typeface="Calibri" pitchFamily="34" charset="-120"/>
-              </a:rPr>
-              <a:t>OUTPUT</a:t>
-            </a:r>
-            <a:endParaRPr lang="en-US" sz="1300" dirty="0"/>
-          </a:p>
-        </p:txBody>
-      </p:sp>
-      <p:sp>
-        <p:nvSpPr>
-          <p:cNvPr id="22" name="Text 19"/>
-          <p:cNvSpPr txBox="1"/>
-          <p:nvPr/>
-        </p:nvSpPr>
-        <p:spPr>
-          <a:xfrm>
-            <a:off x="8478317" y="3611880"/>
-            <a:ext cx="2844698" cy="457200"/>
-          </a:xfrm>
-          <a:prstGeom prst="rect">
-            <a:avLst/>
-          </a:prstGeom>
-          <a:noFill/>
-          <a:ln/>
-        </p:spPr>
-        <p:txBody>
-          <a:bodyPr wrap="square" lIns="0" tIns="0" rIns="0" bIns="0" rtlCol="0" anchor="ctr"/>
-          <a:lstStyle/>
-          <a:p>
-            <a:pPr indent="0" marL="0">
-              <a:buNone/>
-            </a:pPr>
-            <a:r>
-              <a:rPr lang="en-US" sz="2200" b="1" dirty="0">
-                <a:solidFill>
-                  <a:schemeClr val="tx1"/>
-                </a:solidFill>
-                <a:latin typeface="Calibri" pitchFamily="34" charset="0"/>
-                <a:ea typeface="Calibri" pitchFamily="34" charset="-122"/>
-                <a:cs typeface="Calibri" pitchFamily="34" charset="-120"/>
-              </a:rPr>
-              <a:t>A success chance</a:t>
-            </a:r>
-            <a:endParaRPr lang="en-US" sz="2200" dirty="0"/>
-          </a:p>
-        </p:txBody>
-      </p:sp>
-      <p:sp>
-        <p:nvSpPr>
-          <p:cNvPr id="23" name="Text 20"/>
-          <p:cNvSpPr txBox="1"/>
-          <p:nvPr/>
-        </p:nvSpPr>
-        <p:spPr>
-          <a:xfrm>
-            <a:off x="8478317" y="4114800"/>
-            <a:ext cx="2844698" cy="868680"/>
-          </a:xfrm>
-          <a:prstGeom prst="rect">
-            <a:avLst/>
-          </a:prstGeom>
-          <a:noFill/>
-          <a:ln/>
-        </p:spPr>
-        <p:txBody>
-          <a:bodyPr wrap="square" lIns="0" tIns="0" rIns="0" bIns="0" rtlCol="0" anchor="t"/>
-          <a:lstStyle/>
-          <a:p>
-            <a:pPr indent="0" marL="0">
-              <a:buNone/>
-            </a:pPr>
-            <a:r>
-              <a:rPr lang="en-US" sz="1600" dirty="0">
-                <a:solidFill>
-                  <a:schemeClr val="tx2"/>
-                </a:solidFill>
-                <a:latin typeface="Calibri" pitchFamily="34" charset="0"/>
-                <a:ea typeface="Calibri" pitchFamily="34" charset="-122"/>
-                <a:cs typeface="Calibri" pitchFamily="34" charset="-120"/>
-              </a:rPr>
-              <a:t>A probability from 0 to 100%, plus a clear yes or no</a:t>
-            </a:r>
-            <a:endParaRPr lang="en-US" sz="1600" dirty="0"/>
-          </a:p>
-        </p:txBody>
-      </p:sp>
-      <p:sp>
-        <p:nvSpPr>
-          <p:cNvPr id="24" name="Text 0"/>
+          <p:cNvPr id="13" name="Text 0"/>
           <p:cNvSpPr/>
           <p:nvPr>
             <p:ph idx="102" type="body" hasCustomPrompt="1"/>
@@ -10920,6 +11404,14 @@
             <a:pPr indent="0" marL="0">
               <a:buNone/>
             </a:pPr>
+            <a:r>
+              <a:rPr lang="en-US" sz="1100" dirty="0">
+                <a:solidFill>
+                  <a:srgbClr val="5B6472"/>
+                </a:solidFill>
+              </a:rPr>
+              <a:t>Source: Kickstarter Projects dataset (Kaggle), 331,675 finished campaigns 2009–2018</a:t>
+            </a:r>
             <a:endParaRPr lang="en-US" sz="1100" dirty="0"/>
           </a:p>
         </p:txBody>
@@ -11026,7 +11518,7 @@
                   <a:schemeClr val="accent3"/>
                 </a:solidFill>
               </a:rPr>
-              <a:t>FINDING 1 · FUNDING GOAL</a:t>
+              <a:t>OUR QUESTION</a:t>
             </a:r>
             <a:endParaRPr lang="en-US" sz="1200" dirty="0"/>
           </a:p>
@@ -11064,42 +11556,93 @@
                   <a:schemeClr val="tx1"/>
                 </a:solidFill>
               </a:rPr>
-              <a:t>Smaller goals succeed far more often</a:t>
+              <a:t>How likely is a campaign to succeed?</a:t>
             </a:r>
             <a:endParaRPr lang="en-US" sz="3400" dirty="0"/>
           </a:p>
         </p:txBody>
       </p:sp>
-      <p:graphicFrame>
-        <p:nvGraphicFramePr>
-          <p:cNvPr id="5" name="Success rate by funding goal" descr=""/>
-          <p:cNvGraphicFramePr/>
-          <p:nvPr/>
-        </p:nvGraphicFramePr>
-        <p:xfrm>
-          <a:off x="548640" y="1600200"/>
-          <a:ext cx="7589520" cy="4480560"/>
-        </p:xfrm>
-        <a:graphic xmlns:a="http://schemas.openxmlformats.org/drawingml/2006/main">
-          <a:graphicData uri="http://schemas.openxmlformats.org/drawingml/2006/chart">
-            <c:chart xmlns:c="http://schemas.openxmlformats.org/drawingml/2006/chart" r:id="rId1"/>
-          </a:graphicData>
-        </a:graphic>
-      </p:graphicFrame>
-      <p:sp>
-        <p:nvSpPr>
-          <p:cNvPr id="6" name="Card: takeaway"/>
+      <p:sp>
+        <p:nvSpPr>
+          <p:cNvPr id="5" name="Text 2"/>
+          <p:cNvSpPr txBox="1"/>
+          <p:nvPr/>
+        </p:nvSpPr>
+        <p:spPr>
+          <a:xfrm>
+            <a:off x="548640" y="1600200"/>
+            <a:ext cx="11094415" cy="548640"/>
+          </a:xfrm>
+          <a:prstGeom prst="rect">
+            <a:avLst/>
+          </a:prstGeom>
+          <a:noFill/>
+          <a:ln/>
+        </p:spPr>
+        <p:txBody>
+          <a:bodyPr wrap="square" lIns="0" tIns="0" rIns="0" bIns="0" rtlCol="0" anchor="ctr"/>
+          <a:lstStyle/>
+          <a:p>
+            <a:pPr indent="0" marL="0">
+              <a:buNone/>
+            </a:pPr>
+            <a:r>
+              <a:rPr lang="en-US" sz="2200" dirty="0">
+                <a:solidFill>
+                  <a:schemeClr val="tx1"/>
+                </a:solidFill>
+                <a:latin typeface="Calibri" pitchFamily="34" charset="0"/>
+                <a:ea typeface="Calibri" pitchFamily="34" charset="-122"/>
+                <a:cs typeface="Calibri" pitchFamily="34" charset="-120"/>
+              </a:rPr>
+              <a:t>Using only what a creator knows </a:t>
+            </a:r>
+            <a:pPr indent="0" marL="0">
+              <a:buNone/>
+            </a:pPr>
+            <a:r>
+              <a:rPr lang="en-US" sz="2200" b="1" dirty="0">
+                <a:solidFill>
+                  <a:schemeClr val="tx1"/>
+                </a:solidFill>
+                <a:latin typeface="Calibri" pitchFamily="34" charset="0"/>
+                <a:ea typeface="Calibri" pitchFamily="34" charset="-122"/>
+                <a:cs typeface="Calibri" pitchFamily="34" charset="-120"/>
+              </a:rPr>
+              <a:t>before launch</a:t>
+            </a:r>
+            <a:pPr indent="0" marL="0">
+              <a:buNone/>
+            </a:pPr>
+            <a:r>
+              <a:rPr lang="en-US" sz="2200" dirty="0">
+                <a:solidFill>
+                  <a:schemeClr val="tx1"/>
+                </a:solidFill>
+                <a:latin typeface="Calibri" pitchFamily="34" charset="0"/>
+                <a:ea typeface="Calibri" pitchFamily="34" charset="-122"/>
+                <a:cs typeface="Calibri" pitchFamily="34" charset="-120"/>
+              </a:rPr>
+              <a:t>, we estimate the chance of success.</a:t>
+            </a:r>
+            <a:endParaRPr lang="en-US" sz="2200" dirty="0"/>
+          </a:p>
+        </p:txBody>
+      </p:sp>
+      <p:sp>
+        <p:nvSpPr>
+          <p:cNvPr id="6" name="Card: data"/>
           <p:cNvSpPr/>
           <p:nvPr/>
         </p:nvSpPr>
         <p:spPr>
           <a:xfrm>
-            <a:off x="8503920" y="1828800"/>
-            <a:ext cx="3139135" cy="3291840"/>
+            <a:off x="548640" y="2514600"/>
+            <a:ext cx="3484778" cy="2651760"/>
           </a:xfrm>
           <a:prstGeom prst="roundRect">
             <a:avLst>
-              <a:gd name="adj" fmla="val 3495"/>
+              <a:gd name="adj" fmla="val 4138"/>
             </a:avLst>
           </a:prstGeom>
           <a:solidFill>
@@ -11115,14 +11658,39 @@
       </p:sp>
       <p:sp>
         <p:nvSpPr>
-          <p:cNvPr id="7" name="Text 3"/>
+          <p:cNvPr id="7" name="Step 1"/>
+          <p:cNvSpPr/>
+          <p:nvPr/>
+        </p:nvSpPr>
+        <p:spPr>
+          <a:xfrm>
+            <a:off x="868680" y="2788920"/>
+            <a:ext cx="548640" cy="548640"/>
+          </a:xfrm>
+          <a:prstGeom prst="ellipse">
+            <a:avLst/>
+          </a:prstGeom>
+          <a:solidFill>
+            <a:srgbClr val="2A78D6"/>
+          </a:solidFill>
+          <a:ln w="12700">
+            <a:solidFill>
+              <a:srgbClr val="2A78D6"/>
+            </a:solidFill>
+            <a:prstDash val="solid"/>
+          </a:ln>
+        </p:spPr>
+      </p:sp>
+      <p:sp>
+        <p:nvSpPr>
+          <p:cNvPr id="8" name="Text 5"/>
           <p:cNvSpPr txBox="1"/>
           <p:nvPr/>
         </p:nvSpPr>
         <p:spPr>
           <a:xfrm>
-            <a:off x="8823960" y="2103120"/>
-            <a:ext cx="2499055" cy="731520"/>
+            <a:off x="868680" y="2788920"/>
+            <a:ext cx="548640" cy="548640"/>
           </a:xfrm>
           <a:prstGeom prst="rect">
             <a:avLst/>
@@ -11134,97 +11702,136 @@
           <a:bodyPr wrap="square" lIns="0" tIns="0" rIns="0" bIns="0" rtlCol="0" anchor="ctr"/>
           <a:lstStyle/>
           <a:p>
-            <a:pPr indent="0" marL="0">
-              <a:buNone/>
-            </a:pPr>
-            <a:r>
-              <a:rPr lang="en-US" sz="2800" b="1" dirty="0">
-                <a:solidFill>
-                  <a:schemeClr val="accent3"/>
-                </a:solidFill>
-                <a:latin typeface="Arial" pitchFamily="34" charset="0"/>
-                <a:ea typeface="Arial" pitchFamily="34" charset="-122"/>
-                <a:cs typeface="Arial" pitchFamily="34" charset="-120"/>
-              </a:rPr>
-              <a:t>55% vs. 15%</a:t>
-            </a:r>
-            <a:endParaRPr lang="en-US" sz="2800" dirty="0"/>
-          </a:p>
-        </p:txBody>
-      </p:sp>
-      <p:sp>
-        <p:nvSpPr>
-          <p:cNvPr id="8" name="Text 4"/>
-          <p:cNvSpPr txBox="1"/>
-          <p:nvPr/>
-        </p:nvSpPr>
-        <p:spPr>
-          <a:xfrm>
-            <a:off x="8823960" y="2880360"/>
-            <a:ext cx="2499055" cy="1005840"/>
-          </a:xfrm>
-          <a:prstGeom prst="rect">
-            <a:avLst/>
-          </a:prstGeom>
-          <a:noFill/>
-          <a:ln/>
-        </p:spPr>
-        <p:txBody>
-          <a:bodyPr wrap="square" lIns="0" tIns="0" rIns="0" bIns="0" rtlCol="0" anchor="t"/>
-          <a:lstStyle/>
-          <a:p>
-            <a:pPr indent="0" marL="0">
-              <a:buNone/>
-            </a:pPr>
-            <a:r>
-              <a:rPr lang="en-US" sz="1600" dirty="0">
-                <a:solidFill>
-                  <a:schemeClr val="tx1"/>
+            <a:pPr algn="ctr" indent="0" marL="0">
+              <a:buNone/>
+            </a:pPr>
+            <a:r>
+              <a:rPr lang="en-US" sz="2000" b="1" dirty="0">
+                <a:solidFill>
+                  <a:schemeClr val="bg1"/>
                 </a:solidFill>
                 <a:latin typeface="Calibri" pitchFamily="34" charset="0"/>
                 <a:ea typeface="Calibri" pitchFamily="34" charset="-122"/>
                 <a:cs typeface="Calibri" pitchFamily="34" charset="-120"/>
               </a:rPr>
-              <a:t>Campaigns under $1k succeed almost four times as often as those over $50k.</a:t>
-            </a:r>
-            <a:endParaRPr lang="en-US" sz="1600" dirty="0"/>
-          </a:p>
-        </p:txBody>
-      </p:sp>
-      <p:sp>
-        <p:nvSpPr>
-          <p:cNvPr id="9" name="Text 5"/>
+              <a:t>1</a:t>
+            </a:r>
+            <a:endParaRPr lang="en-US" sz="2000" dirty="0"/>
+          </a:p>
+        </p:txBody>
+      </p:sp>
+      <p:sp>
+        <p:nvSpPr>
+          <p:cNvPr id="9" name="Text 6"/>
           <p:cNvSpPr txBox="1"/>
           <p:nvPr/>
         </p:nvSpPr>
         <p:spPr>
           <a:xfrm>
-            <a:off x="8823960" y="3931920"/>
-            <a:ext cx="2499055" cy="1005840"/>
-          </a:xfrm>
-          <a:prstGeom prst="rect">
-            <a:avLst/>
-          </a:prstGeom>
-          <a:noFill/>
-          <a:ln/>
-        </p:spPr>
-        <p:txBody>
-          <a:bodyPr wrap="square" lIns="0" tIns="0" rIns="0" bIns="0" rtlCol="0" anchor="t"/>
+            <a:off x="1554480" y="2880360"/>
+            <a:ext cx="2204618" cy="365760"/>
+          </a:xfrm>
+          <a:prstGeom prst="rect">
+            <a:avLst/>
+          </a:prstGeom>
+          <a:noFill/>
+          <a:ln/>
+        </p:spPr>
+        <p:txBody>
+          <a:bodyPr wrap="square" lIns="0" tIns="0" rIns="0" bIns="0" rtlCol="0" anchor="ctr"/>
           <a:lstStyle/>
           <a:p>
             <a:pPr indent="0" marL="0">
               <a:buNone/>
             </a:pPr>
             <a:r>
-              <a:rPr lang="en-US" sz="1600" dirty="0">
-                <a:solidFill>
-                  <a:schemeClr val="tx2"/>
+              <a:rPr lang="en-US" sz="1300" b="1" spc="200" kern="0" dirty="0">
+                <a:solidFill>
+                  <a:schemeClr val="accent3"/>
                 </a:solidFill>
                 <a:latin typeface="Calibri" pitchFamily="34" charset="0"/>
                 <a:ea typeface="Calibri" pitchFamily="34" charset="-122"/>
                 <a:cs typeface="Calibri" pitchFamily="34" charset="-120"/>
               </a:rPr>
-              <a:t>In every category, successful projects asked for less, typically half to two thirds as much.</a:t>
+              <a:t>DATA</a:t>
+            </a:r>
+            <a:endParaRPr lang="en-US" sz="1300" dirty="0"/>
+          </a:p>
+        </p:txBody>
+      </p:sp>
+      <p:sp>
+        <p:nvSpPr>
+          <p:cNvPr id="10" name="Text 7"/>
+          <p:cNvSpPr txBox="1"/>
+          <p:nvPr/>
+        </p:nvSpPr>
+        <p:spPr>
+          <a:xfrm>
+            <a:off x="868680" y="3611880"/>
+            <a:ext cx="2844698" cy="457200"/>
+          </a:xfrm>
+          <a:prstGeom prst="rect">
+            <a:avLst/>
+          </a:prstGeom>
+          <a:noFill/>
+          <a:ln/>
+        </p:spPr>
+        <p:txBody>
+          <a:bodyPr wrap="square" lIns="0" tIns="0" rIns="0" bIns="0" rtlCol="0" anchor="ctr"/>
+          <a:lstStyle/>
+          <a:p>
+            <a:pPr indent="0" marL="0">
+              <a:buNone/>
+            </a:pPr>
+            <a:r>
+              <a:rPr lang="en-US" sz="2200" b="1" dirty="0">
+                <a:solidFill>
+                  <a:schemeClr val="tx1"/>
+                </a:solidFill>
+                <a:latin typeface="Calibri" pitchFamily="34" charset="0"/>
+                <a:ea typeface="Calibri" pitchFamily="34" charset="-122"/>
+                <a:cs typeface="Calibri" pitchFamily="34" charset="-120"/>
+              </a:rPr>
+              <a:t>331,675 campaigns</a:t>
+            </a:r>
+            <a:endParaRPr lang="en-US" sz="2200" dirty="0"/>
+          </a:p>
+        </p:txBody>
+      </p:sp>
+      <p:sp>
+        <p:nvSpPr>
+          <p:cNvPr id="11" name="Text 8"/>
+          <p:cNvSpPr txBox="1"/>
+          <p:nvPr/>
+        </p:nvSpPr>
+        <p:spPr>
+          <a:xfrm>
+            <a:off x="868680" y="4114800"/>
+            <a:ext cx="2844698" cy="868680"/>
+          </a:xfrm>
+          <a:prstGeom prst="rect">
+            <a:avLst/>
+          </a:prstGeom>
+          <a:noFill/>
+          <a:ln/>
+        </p:spPr>
+        <p:txBody>
+          <a:bodyPr wrap="square" lIns="0" tIns="0" rIns="0" bIns="0" rtlCol="0" anchor="t"/>
+          <a:lstStyle/>
+          <a:p>
+            <a:pPr indent="0" marL="0">
+              <a:buNone/>
+            </a:pPr>
+            <a:r>
+              <a:rPr lang="en-US" sz="1600" dirty="0">
+                <a:solidFill>
+                  <a:schemeClr val="tx2"/>
+                </a:solidFill>
+                <a:latin typeface="Calibri" pitchFamily="34" charset="0"/>
+                <a:ea typeface="Calibri" pitchFamily="34" charset="-122"/>
+                <a:cs typeface="Calibri" pitchFamily="34" charset="-120"/>
+              </a:rPr>
+              <a:t>Finished between 2009 and 2018, in 15 categories and 22 countries</a:t>
             </a:r>
             <a:endParaRPr lang="en-US" sz="1600" dirty="0"/>
           </a:p>
@@ -11232,7 +11839,423 @@
       </p:sp>
       <p:sp>
         <p:nvSpPr>
-          <p:cNvPr id="10" name="Text 0"/>
+          <p:cNvPr id="12" name="Card: input"/>
+          <p:cNvSpPr/>
+          <p:nvPr/>
+        </p:nvSpPr>
+        <p:spPr>
+          <a:xfrm>
+            <a:off x="4353458" y="2514600"/>
+            <a:ext cx="3484778" cy="2651760"/>
+          </a:xfrm>
+          <a:prstGeom prst="roundRect">
+            <a:avLst>
+              <a:gd name="adj" fmla="val 4138"/>
+            </a:avLst>
+          </a:prstGeom>
+          <a:solidFill>
+            <a:srgbClr val="F2F4F8"/>
+          </a:solidFill>
+          <a:ln w="12700">
+            <a:solidFill>
+              <a:srgbClr val="F2F4F8"/>
+            </a:solidFill>
+            <a:prstDash val="solid"/>
+          </a:ln>
+        </p:spPr>
+      </p:sp>
+      <p:sp>
+        <p:nvSpPr>
+          <p:cNvPr id="13" name="Step 2"/>
+          <p:cNvSpPr/>
+          <p:nvPr/>
+        </p:nvSpPr>
+        <p:spPr>
+          <a:xfrm>
+            <a:off x="4673498" y="2788920"/>
+            <a:ext cx="548640" cy="548640"/>
+          </a:xfrm>
+          <a:prstGeom prst="ellipse">
+            <a:avLst/>
+          </a:prstGeom>
+          <a:solidFill>
+            <a:srgbClr val="2A78D6"/>
+          </a:solidFill>
+          <a:ln w="12700">
+            <a:solidFill>
+              <a:srgbClr val="2A78D6"/>
+            </a:solidFill>
+            <a:prstDash val="solid"/>
+          </a:ln>
+        </p:spPr>
+      </p:sp>
+      <p:sp>
+        <p:nvSpPr>
+          <p:cNvPr id="14" name="Text 11"/>
+          <p:cNvSpPr txBox="1"/>
+          <p:nvPr/>
+        </p:nvSpPr>
+        <p:spPr>
+          <a:xfrm>
+            <a:off x="4673498" y="2788920"/>
+            <a:ext cx="548640" cy="548640"/>
+          </a:xfrm>
+          <a:prstGeom prst="rect">
+            <a:avLst/>
+          </a:prstGeom>
+          <a:noFill/>
+          <a:ln/>
+        </p:spPr>
+        <p:txBody>
+          <a:bodyPr wrap="square" lIns="0" tIns="0" rIns="0" bIns="0" rtlCol="0" anchor="ctr"/>
+          <a:lstStyle/>
+          <a:p>
+            <a:pPr algn="ctr" indent="0" marL="0">
+              <a:buNone/>
+            </a:pPr>
+            <a:r>
+              <a:rPr lang="en-US" sz="2000" b="1" dirty="0">
+                <a:solidFill>
+                  <a:schemeClr val="bg1"/>
+                </a:solidFill>
+                <a:latin typeface="Calibri" pitchFamily="34" charset="0"/>
+                <a:ea typeface="Calibri" pitchFamily="34" charset="-122"/>
+                <a:cs typeface="Calibri" pitchFamily="34" charset="-120"/>
+              </a:rPr>
+              <a:t>2</a:t>
+            </a:r>
+            <a:endParaRPr lang="en-US" sz="2000" dirty="0"/>
+          </a:p>
+        </p:txBody>
+      </p:sp>
+      <p:sp>
+        <p:nvSpPr>
+          <p:cNvPr id="15" name="Text 12"/>
+          <p:cNvSpPr txBox="1"/>
+          <p:nvPr/>
+        </p:nvSpPr>
+        <p:spPr>
+          <a:xfrm>
+            <a:off x="5359298" y="2880360"/>
+            <a:ext cx="2204618" cy="365760"/>
+          </a:xfrm>
+          <a:prstGeom prst="rect">
+            <a:avLst/>
+          </a:prstGeom>
+          <a:noFill/>
+          <a:ln/>
+        </p:spPr>
+        <p:txBody>
+          <a:bodyPr wrap="square" lIns="0" tIns="0" rIns="0" bIns="0" rtlCol="0" anchor="ctr"/>
+          <a:lstStyle/>
+          <a:p>
+            <a:pPr indent="0" marL="0">
+              <a:buNone/>
+            </a:pPr>
+            <a:r>
+              <a:rPr lang="en-US" sz="1300" b="1" spc="200" kern="0" dirty="0">
+                <a:solidFill>
+                  <a:schemeClr val="accent3"/>
+                </a:solidFill>
+                <a:latin typeface="Calibri" pitchFamily="34" charset="0"/>
+                <a:ea typeface="Calibri" pitchFamily="34" charset="-122"/>
+                <a:cs typeface="Calibri" pitchFamily="34" charset="-120"/>
+              </a:rPr>
+              <a:t>INPUT</a:t>
+            </a:r>
+            <a:endParaRPr lang="en-US" sz="1300" dirty="0"/>
+          </a:p>
+        </p:txBody>
+      </p:sp>
+      <p:sp>
+        <p:nvSpPr>
+          <p:cNvPr id="16" name="Text 13"/>
+          <p:cNvSpPr txBox="1"/>
+          <p:nvPr/>
+        </p:nvSpPr>
+        <p:spPr>
+          <a:xfrm>
+            <a:off x="4673498" y="3611880"/>
+            <a:ext cx="2844698" cy="457200"/>
+          </a:xfrm>
+          <a:prstGeom prst="rect">
+            <a:avLst/>
+          </a:prstGeom>
+          <a:noFill/>
+          <a:ln/>
+        </p:spPr>
+        <p:txBody>
+          <a:bodyPr wrap="square" lIns="0" tIns="0" rIns="0" bIns="0" rtlCol="0" anchor="ctr"/>
+          <a:lstStyle/>
+          <a:p>
+            <a:pPr indent="0" marL="0">
+              <a:buNone/>
+            </a:pPr>
+            <a:r>
+              <a:rPr lang="en-US" sz="2200" b="1" dirty="0">
+                <a:solidFill>
+                  <a:schemeClr val="tx1"/>
+                </a:solidFill>
+                <a:latin typeface="Calibri" pitchFamily="34" charset="0"/>
+                <a:ea typeface="Calibri" pitchFamily="34" charset="-122"/>
+                <a:cs typeface="Calibri" pitchFamily="34" charset="-120"/>
+              </a:rPr>
+              <a:t>The campaign plan</a:t>
+            </a:r>
+            <a:endParaRPr lang="en-US" sz="2200" dirty="0"/>
+          </a:p>
+        </p:txBody>
+      </p:sp>
+      <p:sp>
+        <p:nvSpPr>
+          <p:cNvPr id="17" name="Text 14"/>
+          <p:cNvSpPr txBox="1"/>
+          <p:nvPr/>
+        </p:nvSpPr>
+        <p:spPr>
+          <a:xfrm>
+            <a:off x="4673498" y="4114800"/>
+            <a:ext cx="2844698" cy="868680"/>
+          </a:xfrm>
+          <a:prstGeom prst="rect">
+            <a:avLst/>
+          </a:prstGeom>
+          <a:noFill/>
+          <a:ln/>
+        </p:spPr>
+        <p:txBody>
+          <a:bodyPr wrap="square" lIns="0" tIns="0" rIns="0" bIns="0" rtlCol="0" anchor="t"/>
+          <a:lstStyle/>
+          <a:p>
+            <a:pPr indent="0" marL="0">
+              <a:buNone/>
+            </a:pPr>
+            <a:r>
+              <a:rPr lang="en-US" sz="1600" dirty="0">
+                <a:solidFill>
+                  <a:schemeClr val="tx2"/>
+                </a:solidFill>
+                <a:latin typeface="Calibri" pitchFamily="34" charset="0"/>
+                <a:ea typeface="Calibri" pitchFamily="34" charset="-122"/>
+                <a:cs typeface="Calibri" pitchFamily="34" charset="-120"/>
+              </a:rPr>
+              <a:t>Goal, category, country, length, launch date and the title</a:t>
+            </a:r>
+            <a:endParaRPr lang="en-US" sz="1600" dirty="0"/>
+          </a:p>
+        </p:txBody>
+      </p:sp>
+      <p:sp>
+        <p:nvSpPr>
+          <p:cNvPr id="18" name="Card: output"/>
+          <p:cNvSpPr/>
+          <p:nvPr/>
+        </p:nvSpPr>
+        <p:spPr>
+          <a:xfrm>
+            <a:off x="8158277" y="2514600"/>
+            <a:ext cx="3484778" cy="2651760"/>
+          </a:xfrm>
+          <a:prstGeom prst="roundRect">
+            <a:avLst>
+              <a:gd name="adj" fmla="val 4138"/>
+            </a:avLst>
+          </a:prstGeom>
+          <a:solidFill>
+            <a:srgbClr val="F2F4F8"/>
+          </a:solidFill>
+          <a:ln w="12700">
+            <a:solidFill>
+              <a:srgbClr val="F2F4F8"/>
+            </a:solidFill>
+            <a:prstDash val="solid"/>
+          </a:ln>
+        </p:spPr>
+      </p:sp>
+      <p:sp>
+        <p:nvSpPr>
+          <p:cNvPr id="19" name="Step 3"/>
+          <p:cNvSpPr/>
+          <p:nvPr/>
+        </p:nvSpPr>
+        <p:spPr>
+          <a:xfrm>
+            <a:off x="8478317" y="2788920"/>
+            <a:ext cx="548640" cy="548640"/>
+          </a:xfrm>
+          <a:prstGeom prst="ellipse">
+            <a:avLst/>
+          </a:prstGeom>
+          <a:solidFill>
+            <a:srgbClr val="2A78D6"/>
+          </a:solidFill>
+          <a:ln w="12700">
+            <a:solidFill>
+              <a:srgbClr val="2A78D6"/>
+            </a:solidFill>
+            <a:prstDash val="solid"/>
+          </a:ln>
+        </p:spPr>
+      </p:sp>
+      <p:sp>
+        <p:nvSpPr>
+          <p:cNvPr id="20" name="Text 17"/>
+          <p:cNvSpPr txBox="1"/>
+          <p:nvPr/>
+        </p:nvSpPr>
+        <p:spPr>
+          <a:xfrm>
+            <a:off x="8478317" y="2788920"/>
+            <a:ext cx="548640" cy="548640"/>
+          </a:xfrm>
+          <a:prstGeom prst="rect">
+            <a:avLst/>
+          </a:prstGeom>
+          <a:noFill/>
+          <a:ln/>
+        </p:spPr>
+        <p:txBody>
+          <a:bodyPr wrap="square" lIns="0" tIns="0" rIns="0" bIns="0" rtlCol="0" anchor="ctr"/>
+          <a:lstStyle/>
+          <a:p>
+            <a:pPr algn="ctr" indent="0" marL="0">
+              <a:buNone/>
+            </a:pPr>
+            <a:r>
+              <a:rPr lang="en-US" sz="2000" b="1" dirty="0">
+                <a:solidFill>
+                  <a:schemeClr val="bg1"/>
+                </a:solidFill>
+                <a:latin typeface="Calibri" pitchFamily="34" charset="0"/>
+                <a:ea typeface="Calibri" pitchFamily="34" charset="-122"/>
+                <a:cs typeface="Calibri" pitchFamily="34" charset="-120"/>
+              </a:rPr>
+              <a:t>3</a:t>
+            </a:r>
+            <a:endParaRPr lang="en-US" sz="2000" dirty="0"/>
+          </a:p>
+        </p:txBody>
+      </p:sp>
+      <p:sp>
+        <p:nvSpPr>
+          <p:cNvPr id="21" name="Text 18"/>
+          <p:cNvSpPr txBox="1"/>
+          <p:nvPr/>
+        </p:nvSpPr>
+        <p:spPr>
+          <a:xfrm>
+            <a:off x="9164117" y="2880360"/>
+            <a:ext cx="2204618" cy="365760"/>
+          </a:xfrm>
+          <a:prstGeom prst="rect">
+            <a:avLst/>
+          </a:prstGeom>
+          <a:noFill/>
+          <a:ln/>
+        </p:spPr>
+        <p:txBody>
+          <a:bodyPr wrap="square" lIns="0" tIns="0" rIns="0" bIns="0" rtlCol="0" anchor="ctr"/>
+          <a:lstStyle/>
+          <a:p>
+            <a:pPr indent="0" marL="0">
+              <a:buNone/>
+            </a:pPr>
+            <a:r>
+              <a:rPr lang="en-US" sz="1300" b="1" spc="200" kern="0" dirty="0">
+                <a:solidFill>
+                  <a:schemeClr val="accent3"/>
+                </a:solidFill>
+                <a:latin typeface="Calibri" pitchFamily="34" charset="0"/>
+                <a:ea typeface="Calibri" pitchFamily="34" charset="-122"/>
+                <a:cs typeface="Calibri" pitchFamily="34" charset="-120"/>
+              </a:rPr>
+              <a:t>OUTPUT</a:t>
+            </a:r>
+            <a:endParaRPr lang="en-US" sz="1300" dirty="0"/>
+          </a:p>
+        </p:txBody>
+      </p:sp>
+      <p:sp>
+        <p:nvSpPr>
+          <p:cNvPr id="22" name="Text 19"/>
+          <p:cNvSpPr txBox="1"/>
+          <p:nvPr/>
+        </p:nvSpPr>
+        <p:spPr>
+          <a:xfrm>
+            <a:off x="8478317" y="3611880"/>
+            <a:ext cx="2844698" cy="457200"/>
+          </a:xfrm>
+          <a:prstGeom prst="rect">
+            <a:avLst/>
+          </a:prstGeom>
+          <a:noFill/>
+          <a:ln/>
+        </p:spPr>
+        <p:txBody>
+          <a:bodyPr wrap="square" lIns="0" tIns="0" rIns="0" bIns="0" rtlCol="0" anchor="ctr"/>
+          <a:lstStyle/>
+          <a:p>
+            <a:pPr indent="0" marL="0">
+              <a:buNone/>
+            </a:pPr>
+            <a:r>
+              <a:rPr lang="en-US" sz="2200" b="1" dirty="0">
+                <a:solidFill>
+                  <a:schemeClr val="tx1"/>
+                </a:solidFill>
+                <a:latin typeface="Calibri" pitchFamily="34" charset="0"/>
+                <a:ea typeface="Calibri" pitchFamily="34" charset="-122"/>
+                <a:cs typeface="Calibri" pitchFamily="34" charset="-120"/>
+              </a:rPr>
+              <a:t>A success chance</a:t>
+            </a:r>
+            <a:endParaRPr lang="en-US" sz="2200" dirty="0"/>
+          </a:p>
+        </p:txBody>
+      </p:sp>
+      <p:sp>
+        <p:nvSpPr>
+          <p:cNvPr id="23" name="Text 20"/>
+          <p:cNvSpPr txBox="1"/>
+          <p:nvPr/>
+        </p:nvSpPr>
+        <p:spPr>
+          <a:xfrm>
+            <a:off x="8478317" y="4114800"/>
+            <a:ext cx="2844698" cy="868680"/>
+          </a:xfrm>
+          <a:prstGeom prst="rect">
+            <a:avLst/>
+          </a:prstGeom>
+          <a:noFill/>
+          <a:ln/>
+        </p:spPr>
+        <p:txBody>
+          <a:bodyPr wrap="square" lIns="0" tIns="0" rIns="0" bIns="0" rtlCol="0" anchor="t"/>
+          <a:lstStyle/>
+          <a:p>
+            <a:pPr indent="0" marL="0">
+              <a:buNone/>
+            </a:pPr>
+            <a:r>
+              <a:rPr lang="en-US" sz="1600" dirty="0">
+                <a:solidFill>
+                  <a:schemeClr val="tx2"/>
+                </a:solidFill>
+                <a:latin typeface="Calibri" pitchFamily="34" charset="0"/>
+                <a:ea typeface="Calibri" pitchFamily="34" charset="-122"/>
+                <a:cs typeface="Calibri" pitchFamily="34" charset="-120"/>
+              </a:rPr>
+              <a:t>A probability from 0 to 100%, plus a clear yes or no</a:t>
+            </a:r>
+            <a:endParaRPr lang="en-US" sz="1600" dirty="0"/>
+          </a:p>
+        </p:txBody>
+      </p:sp>
+      <p:sp>
+        <p:nvSpPr>
+          <p:cNvPr id="24" name="Text 0"/>
           <p:cNvSpPr/>
           <p:nvPr>
             <p:ph idx="102" type="body" hasCustomPrompt="1"/>
@@ -11256,14 +12279,6 @@
             <a:pPr indent="0" marL="0">
               <a:buNone/>
             </a:pPr>
-            <a:r>
-              <a:rPr lang="en-US" sz="1100" dirty="0">
-                <a:solidFill>
-                  <a:srgbClr val="5B6472"/>
-                </a:solidFill>
-              </a:rPr>
-              <a:t>Share of successful campaigns by funding goal (USD) · training set, 265,340 campaigns · average 40%</a:t>
-            </a:r>
             <a:endParaRPr lang="en-US" sz="1100" dirty="0"/>
           </a:p>
         </p:txBody>
@@ -11370,7 +12385,7 @@
                   <a:schemeClr val="accent3"/>
                 </a:solidFill>
               </a:rPr>
-              <a:t>FINDING 2 · CATEGORY</a:t>
+              <a:t>FINDING 1 · FUNDING GOAL</a:t>
             </a:r>
             <a:endParaRPr lang="en-US" sz="1200" dirty="0"/>
           </a:p>
@@ -11408,7 +12423,7 @@
                   <a:schemeClr val="tx1"/>
                 </a:solidFill>
               </a:rPr>
-              <a:t>Arts beat tech: Dance 66%, Technology 24%</a:t>
+              <a:t>Smaller goals succeed far more often</a:t>
             </a:r>
             <a:endParaRPr lang="en-US" sz="3400" dirty="0"/>
           </a:p>
@@ -11416,13 +12431,13 @@
       </p:sp>
       <p:graphicFrame>
         <p:nvGraphicFramePr>
-          <p:cNvPr id="5" name="Success rate by main category" descr=""/>
+          <p:cNvPr id="5" name="Success rate by funding goal" descr=""/>
           <p:cNvGraphicFramePr/>
           <p:nvPr/>
         </p:nvGraphicFramePr>
         <p:xfrm>
-          <a:off x="548640" y="1508760"/>
-          <a:ext cx="7589520" cy="4663440"/>
+          <a:off x="548640" y="1600200"/>
+          <a:ext cx="7589520" cy="4480560"/>
         </p:xfrm>
         <a:graphic xmlns:a="http://schemas.openxmlformats.org/drawingml/2006/main">
           <a:graphicData uri="http://schemas.openxmlformats.org/drawingml/2006/chart">
@@ -11466,7 +12481,7 @@
         <p:spPr>
           <a:xfrm>
             <a:off x="8823960" y="2103120"/>
-            <a:ext cx="2499055" cy="457200"/>
+            <a:ext cx="2499055" cy="731520"/>
           </a:xfrm>
           <a:prstGeom prst="rect">
             <a:avLst/>
@@ -11482,7 +12497,46 @@
               <a:buNone/>
             </a:pPr>
             <a:r>
-              <a:rPr lang="en-US" sz="2000" b="1" dirty="0">
+              <a:rPr lang="en-US" sz="2800" b="1" dirty="0">
+                <a:solidFill>
+                  <a:schemeClr val="accent3"/>
+                </a:solidFill>
+                <a:latin typeface="Arial" pitchFamily="34" charset="0"/>
+                <a:ea typeface="Arial" pitchFamily="34" charset="-122"/>
+                <a:cs typeface="Arial" pitchFamily="34" charset="-120"/>
+              </a:rPr>
+              <a:t>55% vs. 15%</a:t>
+            </a:r>
+            <a:endParaRPr lang="en-US" sz="2800" dirty="0"/>
+          </a:p>
+        </p:txBody>
+      </p:sp>
+      <p:sp>
+        <p:nvSpPr>
+          <p:cNvPr id="8" name="Text 4"/>
+          <p:cNvSpPr txBox="1"/>
+          <p:nvPr/>
+        </p:nvSpPr>
+        <p:spPr>
+          <a:xfrm>
+            <a:off x="8823960" y="2880360"/>
+            <a:ext cx="2499055" cy="1005840"/>
+          </a:xfrm>
+          <a:prstGeom prst="rect">
+            <a:avLst/>
+          </a:prstGeom>
+          <a:noFill/>
+          <a:ln/>
+        </p:spPr>
+        <p:txBody>
+          <a:bodyPr wrap="square" lIns="0" tIns="0" rIns="0" bIns="0" rtlCol="0" anchor="t"/>
+          <a:lstStyle/>
+          <a:p>
+            <a:pPr indent="0" marL="0">
+              <a:buNone/>
+            </a:pPr>
+            <a:r>
+              <a:rPr lang="en-US" sz="1600" dirty="0">
                 <a:solidFill>
                   <a:schemeClr val="tx1"/>
                 </a:solidFill>
@@ -11490,22 +12544,22 @@
                 <a:ea typeface="Calibri" pitchFamily="34" charset="-122"/>
                 <a:cs typeface="Calibri" pitchFamily="34" charset="-120"/>
               </a:rPr>
-              <a:t>Why tech struggles</a:t>
-            </a:r>
-            <a:endParaRPr lang="en-US" sz="2000" dirty="0"/>
-          </a:p>
-        </p:txBody>
-      </p:sp>
-      <p:sp>
-        <p:nvSpPr>
-          <p:cNvPr id="8" name="Text 4"/>
+              <a:t>Campaigns under $1k succeed almost four times as often as those over $50k.</a:t>
+            </a:r>
+            <a:endParaRPr lang="en-US" sz="1600" dirty="0"/>
+          </a:p>
+        </p:txBody>
+      </p:sp>
+      <p:sp>
+        <p:nvSpPr>
+          <p:cNvPr id="9" name="Text 5"/>
           <p:cNvSpPr txBox="1"/>
           <p:nvPr/>
         </p:nvSpPr>
         <p:spPr>
           <a:xfrm>
-            <a:off x="8823960" y="2606040"/>
-            <a:ext cx="2499055" cy="1188720"/>
+            <a:off x="8823960" y="3931920"/>
+            <a:ext cx="2499055" cy="1005840"/>
           </a:xfrm>
           <a:prstGeom prst="rect">
             <a:avLst/>
@@ -11523,52 +12577,13 @@
             <a:r>
               <a:rPr lang="en-US" sz="1600" dirty="0">
                 <a:solidFill>
-                  <a:schemeClr val="tx1"/>
+                  <a:schemeClr val="tx2"/>
                 </a:solidFill>
                 <a:latin typeface="Calibri" pitchFamily="34" charset="0"/>
                 <a:ea typeface="Calibri" pitchFamily="34" charset="-122"/>
                 <a:cs typeface="Calibri" pitchFamily="34" charset="-120"/>
               </a:rPr>
-              <a:t>Tech projects ask for far more money: a typical successful one asked for $10,000, a failed one $20,000.</a:t>
-            </a:r>
-            <a:endParaRPr lang="en-US" sz="1600" dirty="0"/>
-          </a:p>
-        </p:txBody>
-      </p:sp>
-      <p:sp>
-        <p:nvSpPr>
-          <p:cNvPr id="9" name="Text 5"/>
-          <p:cNvSpPr txBox="1"/>
-          <p:nvPr/>
-        </p:nvSpPr>
-        <p:spPr>
-          <a:xfrm>
-            <a:off x="8823960" y="3931920"/>
-            <a:ext cx="2499055" cy="914400"/>
-          </a:xfrm>
-          <a:prstGeom prst="rect">
-            <a:avLst/>
-          </a:prstGeom>
-          <a:noFill/>
-          <a:ln/>
-        </p:spPr>
-        <p:txBody>
-          <a:bodyPr wrap="square" lIns="0" tIns="0" rIns="0" bIns="0" rtlCol="0" anchor="t"/>
-          <a:lstStyle/>
-          <a:p>
-            <a:pPr indent="0" marL="0">
-              <a:buNone/>
-            </a:pPr>
-            <a:r>
-              <a:rPr lang="en-US" sz="1600" dirty="0">
-                <a:solidFill>
-                  <a:schemeClr val="tx2"/>
-                </a:solidFill>
-                <a:latin typeface="Calibri" pitchFamily="34" charset="0"/>
-                <a:ea typeface="Calibri" pitchFamily="34" charset="-122"/>
-                <a:cs typeface="Calibri" pitchFamily="34" charset="-120"/>
-              </a:rPr>
-              <a:t>Arts projects often have a loyal community behind them.</a:t>
+              <a:t>In every category, successful projects asked for less, typically half to two thirds as much.</a:t>
             </a:r>
             <a:endParaRPr lang="en-US" sz="1600" dirty="0"/>
           </a:p>
@@ -11606,7 +12621,7 @@
                   <a:srgbClr val="5B6472"/>
                 </a:solidFill>
               </a:rPr>
-              <a:t>Share of successful campaigns by main category · training set, 265,340 campaigns · average 40%</a:t>
+              <a:t>Share of successful campaigns by funding goal (USD) · training set, 265,340 campaigns · average 40%</a:t>
             </a:r>
             <a:endParaRPr lang="en-US" sz="1100" dirty="0"/>
           </a:p>
@@ -11714,7 +12729,7 @@
                   <a:schemeClr val="accent3"/>
                 </a:solidFill>
               </a:rPr>
-              <a:t>FINDING 3 · TIMING</a:t>
+              <a:t>FINDING 2 · CATEGORY</a:t>
             </a:r>
             <a:endParaRPr lang="en-US" sz="1200" dirty="0"/>
           </a:p>
@@ -11752,7 +12767,7 @@
                   <a:schemeClr val="tx1"/>
                 </a:solidFill>
               </a:rPr>
-              <a:t>The 30-day default and 60+ days do worst</a:t>
+              <a:t>Arts beat tech: Dance 66%, Technology 24%</a:t>
             </a:r>
             <a:endParaRPr lang="en-US" sz="3400" dirty="0"/>
           </a:p>
@@ -11760,13 +12775,13 @@
       </p:sp>
       <p:graphicFrame>
         <p:nvGraphicFramePr>
-          <p:cNvPr id="5" name="Campaign length" descr=""/>
+          <p:cNvPr id="5" name="Success rate by main category" descr=""/>
           <p:cNvGraphicFramePr/>
           <p:nvPr/>
         </p:nvGraphicFramePr>
         <p:xfrm>
-          <a:off x="548640" y="1554480"/>
-          <a:ext cx="5272888" cy="3566160"/>
+          <a:off x="548640" y="1508760"/>
+          <a:ext cx="7589520" cy="4663440"/>
         </p:xfrm>
         <a:graphic xmlns:a="http://schemas.openxmlformats.org/drawingml/2006/main">
           <a:graphicData uri="http://schemas.openxmlformats.org/drawingml/2006/chart">
@@ -11774,71 +12789,82 @@
           </a:graphicData>
         </a:graphic>
       </p:graphicFrame>
-      <p:graphicFrame>
-        <p:nvGraphicFramePr>
-          <p:cNvPr id="6" name="Launch year" descr=""/>
-          <p:cNvGraphicFramePr/>
-          <p:nvPr/>
-        </p:nvGraphicFramePr>
-        <p:xfrm>
-          <a:off x="6370168" y="1554480"/>
-          <a:ext cx="5272888" cy="3566160"/>
-        </p:xfrm>
-        <a:graphic xmlns:a="http://schemas.openxmlformats.org/drawingml/2006/main">
-          <a:graphicData uri="http://schemas.openxmlformats.org/drawingml/2006/chart">
-            <c:chart xmlns:c="http://schemas.openxmlformats.org/drawingml/2006/chart" r:id="rId2"/>
-          </a:graphicData>
-        </a:graphic>
-      </p:graphicFrame>
-      <p:sp>
-        <p:nvSpPr>
-          <p:cNvPr id="7" name="Text 2"/>
+      <p:sp>
+        <p:nvSpPr>
+          <p:cNvPr id="6" name="Card: takeaway"/>
+          <p:cNvSpPr/>
+          <p:nvPr/>
+        </p:nvSpPr>
+        <p:spPr>
+          <a:xfrm>
+            <a:off x="8503920" y="1828800"/>
+            <a:ext cx="3139135" cy="3291840"/>
+          </a:xfrm>
+          <a:prstGeom prst="roundRect">
+            <a:avLst>
+              <a:gd name="adj" fmla="val 3495"/>
+            </a:avLst>
+          </a:prstGeom>
+          <a:solidFill>
+            <a:srgbClr val="F2F4F8"/>
+          </a:solidFill>
+          <a:ln w="12700">
+            <a:solidFill>
+              <a:srgbClr val="F2F4F8"/>
+            </a:solidFill>
+            <a:prstDash val="solid"/>
+          </a:ln>
+        </p:spPr>
+      </p:sp>
+      <p:sp>
+        <p:nvSpPr>
+          <p:cNvPr id="7" name="Text 3"/>
           <p:cNvSpPr txBox="1"/>
           <p:nvPr/>
         </p:nvSpPr>
         <p:spPr>
           <a:xfrm>
-            <a:off x="548640" y="5257800"/>
-            <a:ext cx="5272888" cy="731520"/>
-          </a:xfrm>
-          <a:prstGeom prst="rect">
-            <a:avLst/>
-          </a:prstGeom>
-          <a:noFill/>
-          <a:ln/>
-        </p:spPr>
-        <p:txBody>
-          <a:bodyPr wrap="square" lIns="0" tIns="0" rIns="0" bIns="0" rtlCol="0" anchor="t"/>
+            <a:off x="8823960" y="2103120"/>
+            <a:ext cx="2499055" cy="457200"/>
+          </a:xfrm>
+          <a:prstGeom prst="rect">
+            <a:avLst/>
+          </a:prstGeom>
+          <a:noFill/>
+          <a:ln/>
+        </p:spPr>
+        <p:txBody>
+          <a:bodyPr wrap="square" lIns="0" tIns="0" rIns="0" bIns="0" rtlCol="0" anchor="ctr"/>
           <a:lstStyle/>
           <a:p>
             <a:pPr indent="0" marL="0">
               <a:buNone/>
             </a:pPr>
             <a:r>
-              <a:rPr lang="en-US" sz="1500" dirty="0">
-                <a:solidFill>
-                  <a:schemeClr val="tx2"/>
+              <a:rPr lang="en-US" sz="2000" b="1" dirty="0">
+                <a:solidFill>
+                  <a:schemeClr val="tx1"/>
                 </a:solidFill>
                 <a:latin typeface="Calibri" pitchFamily="34" charset="0"/>
                 <a:ea typeface="Calibri" pitchFamily="34" charset="-122"/>
                 <a:cs typeface="Calibri" pitchFamily="34" charset="-120"/>
               </a:rPr>
-              <a:t>Half of all campaigns use the 30-day default, and only 38% of those succeed. 60+ days: only 25%.</a:t>
-            </a:r>
-            <a:endParaRPr lang="en-US" sz="1500" dirty="0"/>
-          </a:p>
-        </p:txBody>
-      </p:sp>
-      <p:sp>
-        <p:nvSpPr>
-          <p:cNvPr id="8" name="Text 3"/>
+              <a:t>Why tech struggles</a:t>
+            </a:r>
+            <a:endParaRPr lang="en-US" sz="2000" dirty="0"/>
+          </a:p>
+        </p:txBody>
+      </p:sp>
+      <p:sp>
+        <p:nvSpPr>
+          <p:cNvPr id="8" name="Text 4"/>
           <p:cNvSpPr txBox="1"/>
           <p:nvPr/>
         </p:nvSpPr>
         <p:spPr>
           <a:xfrm>
-            <a:off x="6370168" y="5257800"/>
-            <a:ext cx="5272888" cy="731520"/>
+            <a:off x="8823960" y="2606040"/>
+            <a:ext cx="2499055" cy="1188720"/>
           </a:xfrm>
           <a:prstGeom prst="rect">
             <a:avLst/>
@@ -11854,23 +12880,62 @@
               <a:buNone/>
             </a:pPr>
             <a:r>
-              <a:rPr lang="en-US" sz="1500" dirty="0">
-                <a:solidFill>
-                  <a:schemeClr val="tx2"/>
+              <a:rPr lang="en-US" sz="1600" dirty="0">
+                <a:solidFill>
+                  <a:schemeClr val="tx1"/>
                 </a:solidFill>
                 <a:latin typeface="Calibri" pitchFamily="34" charset="0"/>
                 <a:ea typeface="Calibri" pitchFamily="34" charset="-122"/>
                 <a:cs typeface="Calibri" pitchFamily="34" charset="-120"/>
               </a:rPr>
-              <a:t>In 2014 the number of campaigns jumped by 44%, and success rates fell.</a:t>
-            </a:r>
-            <a:endParaRPr lang="en-US" sz="1500" dirty="0"/>
-          </a:p>
-        </p:txBody>
-      </p:sp>
-      <p:sp>
-        <p:nvSpPr>
-          <p:cNvPr id="9" name="Text 0"/>
+              <a:t>Tech projects ask for far more money: a typical successful one asked for $10,000, a failed one $20,000.</a:t>
+            </a:r>
+            <a:endParaRPr lang="en-US" sz="1600" dirty="0"/>
+          </a:p>
+        </p:txBody>
+      </p:sp>
+      <p:sp>
+        <p:nvSpPr>
+          <p:cNvPr id="9" name="Text 5"/>
+          <p:cNvSpPr txBox="1"/>
+          <p:nvPr/>
+        </p:nvSpPr>
+        <p:spPr>
+          <a:xfrm>
+            <a:off x="8823960" y="3931920"/>
+            <a:ext cx="2499055" cy="914400"/>
+          </a:xfrm>
+          <a:prstGeom prst="rect">
+            <a:avLst/>
+          </a:prstGeom>
+          <a:noFill/>
+          <a:ln/>
+        </p:spPr>
+        <p:txBody>
+          <a:bodyPr wrap="square" lIns="0" tIns="0" rIns="0" bIns="0" rtlCol="0" anchor="t"/>
+          <a:lstStyle/>
+          <a:p>
+            <a:pPr indent="0" marL="0">
+              <a:buNone/>
+            </a:pPr>
+            <a:r>
+              <a:rPr lang="en-US" sz="1600" dirty="0">
+                <a:solidFill>
+                  <a:schemeClr val="tx2"/>
+                </a:solidFill>
+                <a:latin typeface="Calibri" pitchFamily="34" charset="0"/>
+                <a:ea typeface="Calibri" pitchFamily="34" charset="-122"/>
+                <a:cs typeface="Calibri" pitchFamily="34" charset="-120"/>
+              </a:rPr>
+              <a:t>Arts projects often have a loyal community behind them.</a:t>
+            </a:r>
+            <a:endParaRPr lang="en-US" sz="1600" dirty="0"/>
+          </a:p>
+        </p:txBody>
+      </p:sp>
+      <p:sp>
+        <p:nvSpPr>
+          <p:cNvPr id="10" name="Text 0"/>
           <p:cNvSpPr/>
           <p:nvPr>
             <p:ph idx="102" type="body" hasCustomPrompt="1"/>
@@ -11900,7 +12965,7 @@
                   <a:srgbClr val="5B6472"/>
                 </a:solidFill>
               </a:rPr>
-              <a:t>Share of successful campaigns · training set, 265,340 campaigns · average 40%</a:t>
+              <a:t>Share of successful campaigns by main category · training set, 265,340 campaigns · average 40%</a:t>
             </a:r>
             <a:endParaRPr lang="en-US" sz="1100" dirty="0"/>
           </a:p>
@@ -12005,10 +13070,10 @@
             <a:r>
               <a:rPr lang="en-US" sz="1200" b="1" spc="200" kern="0" dirty="0">
                 <a:solidFill>
-                  <a:schemeClr val="accent5"/>
-                </a:solidFill>
-              </a:rPr>
-              <a:t>A KEY STEP</a:t>
+                  <a:schemeClr val="accent3"/>
+                </a:solidFill>
+              </a:rPr>
+              <a:t>FINDING 3 · TIMING</a:t>
             </a:r>
             <a:endParaRPr lang="en-US" sz="1200" dirty="0"/>
           </a:p>
@@ -12043,25 +13108,57 @@
             <a:r>
               <a:rPr lang="en-US" sz="3400" b="1" dirty="0">
                 <a:solidFill>
-                  <a:schemeClr val="bg1"/>
-                </a:solidFill>
-              </a:rPr>
-              <a:t>The trap: data from the future</a:t>
+                  <a:schemeClr val="tx1"/>
+                </a:solidFill>
+              </a:rPr>
+              <a:t>The 30-day default and 60+ days do worst</a:t>
             </a:r>
             <a:endParaRPr lang="en-US" sz="3400" dirty="0"/>
           </a:p>
         </p:txBody>
       </p:sp>
-      <p:sp>
-        <p:nvSpPr>
-          <p:cNvPr id="5" name="Text 2"/>
+      <p:graphicFrame>
+        <p:nvGraphicFramePr>
+          <p:cNvPr id="5" name="Campaign length" descr=""/>
+          <p:cNvGraphicFramePr/>
+          <p:nvPr/>
+        </p:nvGraphicFramePr>
+        <p:xfrm>
+          <a:off x="548640" y="1554480"/>
+          <a:ext cx="5272888" cy="3566160"/>
+        </p:xfrm>
+        <a:graphic xmlns:a="http://schemas.openxmlformats.org/drawingml/2006/main">
+          <a:graphicData uri="http://schemas.openxmlformats.org/drawingml/2006/chart">
+            <c:chart xmlns:c="http://schemas.openxmlformats.org/drawingml/2006/chart" r:id="rId1"/>
+          </a:graphicData>
+        </a:graphic>
+      </p:graphicFrame>
+      <p:graphicFrame>
+        <p:nvGraphicFramePr>
+          <p:cNvPr id="6" name="Launch year" descr=""/>
+          <p:cNvGraphicFramePr/>
+          <p:nvPr/>
+        </p:nvGraphicFramePr>
+        <p:xfrm>
+          <a:off x="6370168" y="1554480"/>
+          <a:ext cx="5272888" cy="3566160"/>
+        </p:xfrm>
+        <a:graphic xmlns:a="http://schemas.openxmlformats.org/drawingml/2006/main">
+          <a:graphicData uri="http://schemas.openxmlformats.org/drawingml/2006/chart">
+            <c:chart xmlns:c="http://schemas.openxmlformats.org/drawingml/2006/chart" r:id="rId2"/>
+          </a:graphicData>
+        </a:graphic>
+      </p:graphicFrame>
+      <p:sp>
+        <p:nvSpPr>
+          <p:cNvPr id="7" name="Text 2"/>
           <p:cNvSpPr txBox="1"/>
           <p:nvPr/>
         </p:nvSpPr>
         <p:spPr>
           <a:xfrm>
-            <a:off x="548640" y="2103120"/>
-            <a:ext cx="5669280" cy="2743200"/>
+            <a:off x="548640" y="5257800"/>
+            <a:ext cx="5272888" cy="731520"/>
           </a:xfrm>
           <a:prstGeom prst="rect">
             <a:avLst/>
@@ -12077,205 +13174,62 @@
               <a:buNone/>
             </a:pPr>
             <a:r>
-              <a:rPr lang="en-US" sz="2000" dirty="0">
-                <a:solidFill>
-                  <a:srgbClr val="C8D0DD"/>
+              <a:rPr lang="en-US" sz="1500" dirty="0">
+                <a:solidFill>
+                  <a:schemeClr val="tx2"/>
                 </a:solidFill>
                 <a:latin typeface="Calibri" pitchFamily="34" charset="0"/>
                 <a:ea typeface="Calibri" pitchFamily="34" charset="-122"/>
                 <a:cs typeface="Calibri" pitchFamily="34" charset="-120"/>
               </a:rPr>
-              <a:t>The dataset also holds the </a:t>
-            </a:r>
+              <a:t>Half of all campaigns use the 30-day default, and only 38% of those succeed. 60+ days: only 25%.</a:t>
+            </a:r>
+            <a:endParaRPr lang="en-US" sz="1500" dirty="0"/>
+          </a:p>
+        </p:txBody>
+      </p:sp>
+      <p:sp>
+        <p:nvSpPr>
+          <p:cNvPr id="8" name="Text 3"/>
+          <p:cNvSpPr txBox="1"/>
+          <p:nvPr/>
+        </p:nvSpPr>
+        <p:spPr>
+          <a:xfrm>
+            <a:off x="6370168" y="5257800"/>
+            <a:ext cx="5272888" cy="731520"/>
+          </a:xfrm>
+          <a:prstGeom prst="rect">
+            <a:avLst/>
+          </a:prstGeom>
+          <a:noFill/>
+          <a:ln/>
+        </p:spPr>
+        <p:txBody>
+          <a:bodyPr wrap="square" lIns="0" tIns="0" rIns="0" bIns="0" rtlCol="0" anchor="t"/>
+          <a:lstStyle/>
+          <a:p>
             <a:pPr indent="0" marL="0">
               <a:buNone/>
             </a:pPr>
             <a:r>
-              <a:rPr lang="en-US" sz="2000" b="1" dirty="0">
-                <a:solidFill>
-                  <a:srgbClr val="FFFFFF"/>
+              <a:rPr lang="en-US" sz="1500" dirty="0">
+                <a:solidFill>
+                  <a:schemeClr val="tx2"/>
                 </a:solidFill>
                 <a:latin typeface="Calibri" pitchFamily="34" charset="0"/>
                 <a:ea typeface="Calibri" pitchFamily="34" charset="-122"/>
                 <a:cs typeface="Calibri" pitchFamily="34" charset="-120"/>
               </a:rPr>
-              <a:t>money pledged</a:t>
-            </a:r>
-            <a:pPr indent="0" marL="0">
-              <a:buNone/>
-            </a:pPr>
-            <a:r>
-              <a:rPr lang="en-US" sz="2000" dirty="0">
-                <a:solidFill>
-                  <a:srgbClr val="C8D0DD"/>
-                </a:solidFill>
-                <a:latin typeface="Calibri" pitchFamily="34" charset="0"/>
-                <a:ea typeface="Calibri" pitchFamily="34" charset="-122"/>
-                <a:cs typeface="Calibri" pitchFamily="34" charset="-120"/>
-              </a:rPr>
-              <a:t> and the </a:t>
-            </a:r>
-            <a:pPr indent="0" marL="0">
-              <a:buNone/>
-            </a:pPr>
-            <a:r>
-              <a:rPr lang="en-US" sz="2000" b="1" dirty="0">
-                <a:solidFill>
-                  <a:srgbClr val="FFFFFF"/>
-                </a:solidFill>
-                <a:latin typeface="Calibri" pitchFamily="34" charset="0"/>
-                <a:ea typeface="Calibri" pitchFamily="34" charset="-122"/>
-                <a:cs typeface="Calibri" pitchFamily="34" charset="-120"/>
-              </a:rPr>
-              <a:t>number of backers</a:t>
-            </a:r>
-            <a:pPr indent="0" marL="0">
-              <a:buNone/>
-            </a:pPr>
-            <a:r>
-              <a:rPr lang="en-US" sz="2000" dirty="0">
-                <a:solidFill>
-                  <a:srgbClr val="C8D0DD"/>
-                </a:solidFill>
-                <a:latin typeface="Calibri" pitchFamily="34" charset="0"/>
-                <a:ea typeface="Calibri" pitchFamily="34" charset="-122"/>
-                <a:cs typeface="Calibri" pitchFamily="34" charset="-120"/>
-              </a:rPr>
-              <a:t>. Both are only known after the campaign ends.</a:t>
-            </a:r>
-            <a:endParaRPr lang="en-US" sz="2000" dirty="0"/>
-          </a:p>
-          <a:p>
-            <a:pPr indent="0" marL="0">
-              <a:buNone/>
-            </a:pPr>
-            <a:r>
-              <a:rPr lang="en-US" sz="2000" dirty="0">
-                <a:solidFill>
-                  <a:srgbClr val="C8D0DD"/>
-                </a:solidFill>
-                <a:latin typeface="Calibri" pitchFamily="34" charset="0"/>
-                <a:ea typeface="Calibri" pitchFamily="34" charset="-122"/>
-                <a:cs typeface="Calibri" pitchFamily="34" charset="-120"/>
-              </a:rPr>
-              <a:t> </a:t>
-            </a:r>
-            <a:endParaRPr lang="en-US" sz="2000" dirty="0"/>
-          </a:p>
-          <a:p>
-            <a:pPr indent="0" marL="0">
-              <a:buNone/>
-            </a:pPr>
-            <a:r>
-              <a:rPr lang="en-US" sz="2000" dirty="0">
-                <a:solidFill>
-                  <a:srgbClr val="C8D0DD"/>
-                </a:solidFill>
-                <a:latin typeface="Calibri" pitchFamily="34" charset="0"/>
-                <a:ea typeface="Calibri" pitchFamily="34" charset="-122"/>
-                <a:cs typeface="Calibri" pitchFamily="34" charset="-120"/>
-              </a:rPr>
-              <a:t>A model that uses them looks perfect, but is useless on launch day. </a:t>
-            </a:r>
-            <a:pPr indent="0" marL="0">
-              <a:buNone/>
-            </a:pPr>
-            <a:r>
-              <a:rPr lang="en-US" sz="2000" b="1" dirty="0">
-                <a:solidFill>
-                  <a:srgbClr val="FFFFFF"/>
-                </a:solidFill>
-                <a:latin typeface="Calibri" pitchFamily="34" charset="0"/>
-                <a:ea typeface="Calibri" pitchFamily="34" charset="-122"/>
-                <a:cs typeface="Calibri" pitchFamily="34" charset="-120"/>
-              </a:rPr>
-              <a:t>We removed them.</a:t>
-            </a:r>
-            <a:endParaRPr lang="en-US" sz="2000" dirty="0"/>
-          </a:p>
-        </p:txBody>
-      </p:sp>
-      <p:sp>
-        <p:nvSpPr>
-          <p:cNvPr id="6" name="Text 3"/>
-          <p:cNvSpPr txBox="1"/>
-          <p:nvPr/>
-        </p:nvSpPr>
-        <p:spPr>
-          <a:xfrm>
-            <a:off x="6675120" y="2103120"/>
-            <a:ext cx="4937760" cy="1371600"/>
-          </a:xfrm>
-          <a:prstGeom prst="rect">
-            <a:avLst/>
-          </a:prstGeom>
-          <a:noFill/>
-          <a:ln/>
-        </p:spPr>
-        <p:txBody>
-          <a:bodyPr wrap="square" lIns="0" tIns="0" rIns="0" bIns="0" rtlCol="0" anchor="t"/>
-          <a:lstStyle/>
-          <a:p>
-            <a:pPr indent="0" marL="0">
-              <a:buNone/>
-            </a:pPr>
-            <a:r>
-              <a:rPr lang="en-US" sz="8000" b="1" dirty="0">
-                <a:solidFill>
-                  <a:schemeClr val="accent5"/>
-                </a:solidFill>
-                <a:latin typeface="Arial" pitchFamily="34" charset="0"/>
-                <a:ea typeface="Arial" pitchFamily="34" charset="-122"/>
-                <a:cs typeface="Arial" pitchFamily="34" charset="-120"/>
-              </a:rPr>
-              <a:t>99.997%</a:t>
-            </a:r>
-            <a:endParaRPr lang="en-US" sz="8000" dirty="0"/>
-          </a:p>
-        </p:txBody>
-      </p:sp>
-      <p:sp>
-        <p:nvSpPr>
-          <p:cNvPr id="7" name="Text 4"/>
-          <p:cNvSpPr txBox="1"/>
-          <p:nvPr/>
-        </p:nvSpPr>
-        <p:spPr>
-          <a:xfrm>
-            <a:off x="6675120" y="3566160"/>
-            <a:ext cx="4754880" cy="914400"/>
-          </a:xfrm>
-          <a:prstGeom prst="rect">
-            <a:avLst/>
-          </a:prstGeom>
-          <a:noFill/>
-          <a:ln/>
-        </p:spPr>
-        <p:txBody>
-          <a:bodyPr wrap="square" lIns="0" tIns="0" rIns="0" bIns="0" rtlCol="0" anchor="t"/>
-          <a:lstStyle/>
-          <a:p>
-            <a:pPr indent="0" marL="0">
-              <a:buNone/>
-            </a:pPr>
-            <a:r>
-              <a:rPr lang="en-US" sz="1800" dirty="0">
-                <a:solidFill>
-                  <a:srgbClr val="C8D0DD"/>
-                </a:solidFill>
-                <a:latin typeface="Calibri" pitchFamily="34" charset="0"/>
-                <a:ea typeface="Calibri" pitchFamily="34" charset="-122"/>
-                <a:cs typeface="Calibri" pitchFamily="34" charset="-120"/>
-              </a:rPr>
-              <a:t>of outcomes are explained by one rule: “pledged at least the goal”</a:t>
-            </a:r>
-            <a:endParaRPr lang="en-US" sz="1800" dirty="0"/>
-          </a:p>
-        </p:txBody>
-      </p:sp>
-      <p:sp>
-        <p:nvSpPr>
-          <p:cNvPr id="8" name="Text 0"/>
+              <a:t>In 2014 the number of campaigns jumped by 44%, and success rates fell.</a:t>
+            </a:r>
+            <a:endParaRPr lang="en-US" sz="1500" dirty="0"/>
+          </a:p>
+        </p:txBody>
+      </p:sp>
+      <p:sp>
+        <p:nvSpPr>
+          <p:cNvPr id="9" name="Text 0"/>
           <p:cNvSpPr/>
           <p:nvPr>
             <p:ph idx="102" type="body" hasCustomPrompt="1"/>
@@ -12299,6 +13253,14 @@
             <a:pPr indent="0" marL="0">
               <a:buNone/>
             </a:pPr>
+            <a:r>
+              <a:rPr lang="en-US" sz="1100" dirty="0">
+                <a:solidFill>
+                  <a:srgbClr val="5B6472"/>
+                </a:solidFill>
+              </a:rPr>
+              <a:t>Share of successful campaigns · training set, 265,340 campaigns · average 40%</a:t>
+            </a:r>
             <a:endParaRPr lang="en-US" sz="1100" dirty="0"/>
           </a:p>
         </p:txBody>
@@ -12333,7 +13295,7 @@
             <a:lvl1pPr>
               <a:defRPr sz="1100">
                 <a:solidFill>
-                  <a:srgbClr val="C8D0DD"/>
+                  <a:srgbClr val="5B6472"/>
                 </a:solidFill>
               </a:defRPr>
             </a:lvl1pPr>
@@ -12402,10 +13364,10 @@
             <a:r>
               <a:rPr lang="en-US" sz="1200" b="1" spc="200" kern="0" dirty="0">
                 <a:solidFill>
-                  <a:schemeClr val="accent3"/>
-                </a:solidFill>
-              </a:rPr>
-              <a:t>OUR PROCESS</a:t>
+                  <a:schemeClr val="accent5"/>
+                </a:solidFill>
+              </a:rPr>
+              <a:t>A KEY STEP</a:t>
             </a:r>
             <a:endParaRPr lang="en-US" sz="1200" dirty="0"/>
           </a:p>
@@ -12440,10 +13402,10 @@
             <a:r>
               <a:rPr lang="en-US" sz="3400" b="1" dirty="0">
                 <a:solidFill>
-                  <a:schemeClr val="tx1"/>
-                </a:solidFill>
-              </a:rPr>
-              <a:t>How we built it, step by step</a:t>
+                  <a:schemeClr val="bg1"/>
+                </a:solidFill>
+              </a:rPr>
+              <a:t>The trap: data from the future</a:t>
             </a:r>
             <a:endParaRPr lang="en-US" sz="3400" dirty="0"/>
           </a:p>
@@ -12451,482 +13413,157 @@
       </p:sp>
       <p:sp>
         <p:nvSpPr>
-          <p:cNvPr id="5" name="Step card 1"/>
-          <p:cNvSpPr/>
-          <p:nvPr/>
-        </p:nvSpPr>
-        <p:spPr>
-          <a:xfrm>
-            <a:off x="548640" y="1828800"/>
-            <a:ext cx="2036003" cy="2834640"/>
-          </a:xfrm>
-          <a:prstGeom prst="roundRect">
-            <a:avLst>
-              <a:gd name="adj" fmla="val 5389"/>
-            </a:avLst>
-          </a:prstGeom>
-          <a:solidFill>
-            <a:srgbClr val="F2F4F8"/>
-          </a:solidFill>
-          <a:ln w="12700">
-            <a:solidFill>
-              <a:srgbClr val="F2F4F8"/>
-            </a:solidFill>
-            <a:prstDash val="solid"/>
-          </a:ln>
-        </p:spPr>
-      </p:sp>
-      <p:sp>
-        <p:nvSpPr>
-          <p:cNvPr id="6" name="Step number 1"/>
-          <p:cNvSpPr/>
-          <p:nvPr/>
-        </p:nvSpPr>
-        <p:spPr>
-          <a:xfrm>
-            <a:off x="822960" y="2103120"/>
-            <a:ext cx="594360" cy="594360"/>
-          </a:xfrm>
-          <a:prstGeom prst="ellipse">
-            <a:avLst/>
-          </a:prstGeom>
-          <a:solidFill>
-            <a:srgbClr val="2A78D6"/>
-          </a:solidFill>
-          <a:ln w="12700">
-            <a:solidFill>
-              <a:srgbClr val="2A78D6"/>
-            </a:solidFill>
-            <a:prstDash val="solid"/>
-          </a:ln>
-        </p:spPr>
-      </p:sp>
-      <p:sp>
-        <p:nvSpPr>
-          <p:cNvPr id="7" name="Text 4"/>
+          <p:cNvPr id="5" name="Text 2"/>
           <p:cNvSpPr txBox="1"/>
           <p:nvPr/>
         </p:nvSpPr>
         <p:spPr>
           <a:xfrm>
-            <a:off x="822960" y="2103120"/>
-            <a:ext cx="594360" cy="594360"/>
-          </a:xfrm>
-          <a:prstGeom prst="rect">
-            <a:avLst/>
-          </a:prstGeom>
-          <a:noFill/>
-          <a:ln/>
-        </p:spPr>
-        <p:txBody>
-          <a:bodyPr wrap="square" lIns="0" tIns="0" rIns="0" bIns="0" rtlCol="0" anchor="ctr"/>
-          <a:lstStyle/>
-          <a:p>
-            <a:pPr algn="ctr" indent="0" marL="0">
-              <a:buNone/>
-            </a:pPr>
-            <a:r>
-              <a:rPr lang="en-US" sz="2200" b="1" dirty="0">
-                <a:solidFill>
-                  <a:schemeClr val="bg1"/>
+            <a:off x="548640" y="2103120"/>
+            <a:ext cx="5669280" cy="2743200"/>
+          </a:xfrm>
+          <a:prstGeom prst="rect">
+            <a:avLst/>
+          </a:prstGeom>
+          <a:noFill/>
+          <a:ln/>
+        </p:spPr>
+        <p:txBody>
+          <a:bodyPr wrap="square" lIns="0" tIns="0" rIns="0" bIns="0" rtlCol="0" anchor="t"/>
+          <a:lstStyle/>
+          <a:p>
+            <a:pPr indent="0" marL="0">
+              <a:buNone/>
+            </a:pPr>
+            <a:r>
+              <a:rPr lang="en-US" sz="2000" dirty="0">
+                <a:solidFill>
+                  <a:srgbClr val="C8D0DD"/>
                 </a:solidFill>
                 <a:latin typeface="Calibri" pitchFamily="34" charset="0"/>
                 <a:ea typeface="Calibri" pitchFamily="34" charset="-122"/>
                 <a:cs typeface="Calibri" pitchFamily="34" charset="-120"/>
               </a:rPr>
-              <a:t>1</a:t>
-            </a:r>
-            <a:endParaRPr lang="en-US" sz="2200" dirty="0"/>
-          </a:p>
-        </p:txBody>
-      </p:sp>
-      <p:sp>
-        <p:nvSpPr>
-          <p:cNvPr id="8" name="Text 5"/>
-          <p:cNvSpPr txBox="1"/>
-          <p:nvPr/>
-        </p:nvSpPr>
-        <p:spPr>
-          <a:xfrm>
-            <a:off x="822960" y="2880360"/>
-            <a:ext cx="1578803" cy="685800"/>
-          </a:xfrm>
-          <a:prstGeom prst="rect">
-            <a:avLst/>
-          </a:prstGeom>
-          <a:noFill/>
-          <a:ln/>
-        </p:spPr>
-        <p:txBody>
-          <a:bodyPr wrap="square" lIns="0" tIns="0" rIns="0" bIns="0" rtlCol="0" anchor="t"/>
-          <a:lstStyle/>
-          <a:p>
+              <a:t>The dataset also holds the </a:t>
+            </a:r>
             <a:pPr indent="0" marL="0">
               <a:buNone/>
             </a:pPr>
             <a:r>
-              <a:rPr lang="en-US" sz="1800" b="1" dirty="0">
-                <a:solidFill>
-                  <a:schemeClr val="tx1"/>
+              <a:rPr lang="en-US" sz="2000" b="1" dirty="0">
+                <a:solidFill>
+                  <a:srgbClr val="FFFFFF"/>
                 </a:solidFill>
                 <a:latin typeface="Calibri" pitchFamily="34" charset="0"/>
                 <a:ea typeface="Calibri" pitchFamily="34" charset="-122"/>
                 <a:cs typeface="Calibri" pitchFamily="34" charset="-120"/>
               </a:rPr>
-              <a:t>Clean the data</a:t>
-            </a:r>
-            <a:endParaRPr lang="en-US" sz="1800" dirty="0"/>
-          </a:p>
-        </p:txBody>
-      </p:sp>
-      <p:sp>
-        <p:nvSpPr>
-          <p:cNvPr id="9" name="Text 6"/>
-          <p:cNvSpPr txBox="1"/>
-          <p:nvPr/>
-        </p:nvSpPr>
-        <p:spPr>
-          <a:xfrm>
-            <a:off x="822960" y="3566160"/>
-            <a:ext cx="1578803" cy="1005840"/>
-          </a:xfrm>
-          <a:prstGeom prst="rect">
-            <a:avLst/>
-          </a:prstGeom>
-          <a:noFill/>
-          <a:ln/>
-        </p:spPr>
-        <p:txBody>
-          <a:bodyPr wrap="square" lIns="0" tIns="0" rIns="0" bIns="0" rtlCol="0" anchor="t"/>
-          <a:lstStyle/>
-          <a:p>
+              <a:t>money pledged</a:t>
+            </a:r>
             <a:pPr indent="0" marL="0">
               <a:buNone/>
             </a:pPr>
             <a:r>
-              <a:rPr lang="en-US" sz="1400" dirty="0">
-                <a:solidFill>
-                  <a:schemeClr val="tx2"/>
+              <a:rPr lang="en-US" sz="2000" dirty="0">
+                <a:solidFill>
+                  <a:srgbClr val="C8D0DD"/>
                 </a:solidFill>
                 <a:latin typeface="Calibri" pitchFamily="34" charset="0"/>
                 <a:ea typeface="Calibri" pitchFamily="34" charset="-122"/>
                 <a:cs typeface="Calibri" pitchFamily="34" charset="-120"/>
               </a:rPr>
-              <a:t>Keep finished campaigns, remove future data, fix errors</a:t>
-            </a:r>
-            <a:endParaRPr lang="en-US" sz="1400" dirty="0"/>
-          </a:p>
-        </p:txBody>
-      </p:sp>
-      <p:sp>
-        <p:nvSpPr>
-          <p:cNvPr id="10" name="Step card 2"/>
-          <p:cNvSpPr/>
-          <p:nvPr/>
-        </p:nvSpPr>
-        <p:spPr>
-          <a:xfrm>
-            <a:off x="2813243" y="1828800"/>
-            <a:ext cx="2036003" cy="2834640"/>
-          </a:xfrm>
-          <a:prstGeom prst="roundRect">
-            <a:avLst>
-              <a:gd name="adj" fmla="val 5389"/>
-            </a:avLst>
-          </a:prstGeom>
-          <a:solidFill>
-            <a:srgbClr val="F2F4F8"/>
-          </a:solidFill>
-          <a:ln w="12700">
-            <a:solidFill>
-              <a:srgbClr val="F2F4F8"/>
-            </a:solidFill>
-            <a:prstDash val="solid"/>
-          </a:ln>
-        </p:spPr>
-      </p:sp>
-      <p:sp>
-        <p:nvSpPr>
-          <p:cNvPr id="11" name="Step number 2"/>
-          <p:cNvSpPr/>
-          <p:nvPr/>
-        </p:nvSpPr>
-        <p:spPr>
-          <a:xfrm>
-            <a:off x="3087563" y="2103120"/>
-            <a:ext cx="594360" cy="594360"/>
-          </a:xfrm>
-          <a:prstGeom prst="ellipse">
-            <a:avLst/>
-          </a:prstGeom>
-          <a:solidFill>
-            <a:srgbClr val="2A78D6"/>
-          </a:solidFill>
-          <a:ln w="12700">
-            <a:solidFill>
-              <a:srgbClr val="2A78D6"/>
-            </a:solidFill>
-            <a:prstDash val="solid"/>
-          </a:ln>
-        </p:spPr>
-      </p:sp>
-      <p:sp>
-        <p:nvSpPr>
-          <p:cNvPr id="12" name="Text 9"/>
-          <p:cNvSpPr txBox="1"/>
-          <p:nvPr/>
-        </p:nvSpPr>
-        <p:spPr>
-          <a:xfrm>
-            <a:off x="3087563" y="2103120"/>
-            <a:ext cx="594360" cy="594360"/>
-          </a:xfrm>
-          <a:prstGeom prst="rect">
-            <a:avLst/>
-          </a:prstGeom>
-          <a:noFill/>
-          <a:ln/>
-        </p:spPr>
-        <p:txBody>
-          <a:bodyPr wrap="square" lIns="0" tIns="0" rIns="0" bIns="0" rtlCol="0" anchor="ctr"/>
-          <a:lstStyle/>
-          <a:p>
-            <a:pPr algn="ctr" indent="0" marL="0">
-              <a:buNone/>
-            </a:pPr>
-            <a:r>
-              <a:rPr lang="en-US" sz="2200" b="1" dirty="0">
-                <a:solidFill>
-                  <a:schemeClr val="bg1"/>
+              <a:t> and the </a:t>
+            </a:r>
+            <a:pPr indent="0" marL="0">
+              <a:buNone/>
+            </a:pPr>
+            <a:r>
+              <a:rPr lang="en-US" sz="2000" b="1" dirty="0">
+                <a:solidFill>
+                  <a:srgbClr val="FFFFFF"/>
                 </a:solidFill>
                 <a:latin typeface="Calibri" pitchFamily="34" charset="0"/>
                 <a:ea typeface="Calibri" pitchFamily="34" charset="-122"/>
                 <a:cs typeface="Calibri" pitchFamily="34" charset="-120"/>
               </a:rPr>
-              <a:t>2</a:t>
-            </a:r>
-            <a:endParaRPr lang="en-US" sz="2200" dirty="0"/>
-          </a:p>
-        </p:txBody>
-      </p:sp>
-      <p:sp>
-        <p:nvSpPr>
-          <p:cNvPr id="13" name="Text 10"/>
-          <p:cNvSpPr txBox="1"/>
-          <p:nvPr/>
-        </p:nvSpPr>
-        <p:spPr>
-          <a:xfrm>
-            <a:off x="3087563" y="2880360"/>
-            <a:ext cx="1578803" cy="685800"/>
-          </a:xfrm>
-          <a:prstGeom prst="rect">
-            <a:avLst/>
-          </a:prstGeom>
-          <a:noFill/>
-          <a:ln/>
-        </p:spPr>
-        <p:txBody>
-          <a:bodyPr wrap="square" lIns="0" tIns="0" rIns="0" bIns="0" rtlCol="0" anchor="t"/>
-          <a:lstStyle/>
-          <a:p>
+              <a:t>number of backers</a:t>
+            </a:r>
             <a:pPr indent="0" marL="0">
               <a:buNone/>
             </a:pPr>
             <a:r>
-              <a:rPr lang="en-US" sz="1800" b="1" dirty="0">
-                <a:solidFill>
-                  <a:schemeClr val="tx1"/>
+              <a:rPr lang="en-US" sz="2000" dirty="0">
+                <a:solidFill>
+                  <a:srgbClr val="C8D0DD"/>
                 </a:solidFill>
                 <a:latin typeface="Calibri" pitchFamily="34" charset="0"/>
                 <a:ea typeface="Calibri" pitchFamily="34" charset="-122"/>
                 <a:cs typeface="Calibri" pitchFamily="34" charset="-120"/>
               </a:rPr>
-              <a:t>Hide a test set</a:t>
-            </a:r>
-            <a:endParaRPr lang="en-US" sz="1800" dirty="0"/>
-          </a:p>
-        </p:txBody>
-      </p:sp>
-      <p:sp>
-        <p:nvSpPr>
-          <p:cNvPr id="14" name="Text 11"/>
-          <p:cNvSpPr txBox="1"/>
-          <p:nvPr/>
-        </p:nvSpPr>
-        <p:spPr>
-          <a:xfrm>
-            <a:off x="3087563" y="3566160"/>
-            <a:ext cx="1578803" cy="1005840"/>
-          </a:xfrm>
-          <a:prstGeom prst="rect">
-            <a:avLst/>
-          </a:prstGeom>
-          <a:noFill/>
-          <a:ln/>
-        </p:spPr>
-        <p:txBody>
-          <a:bodyPr wrap="square" lIns="0" tIns="0" rIns="0" bIns="0" rtlCol="0" anchor="t"/>
-          <a:lstStyle/>
+              <a:t>. Both are only known after the campaign ends.</a:t>
+            </a:r>
+            <a:endParaRPr lang="en-US" sz="2000" dirty="0"/>
+          </a:p>
           <a:p>
             <a:pPr indent="0" marL="0">
               <a:buNone/>
             </a:pPr>
             <a:r>
-              <a:rPr lang="en-US" sz="1400" dirty="0">
-                <a:solidFill>
-                  <a:schemeClr val="tx2"/>
+              <a:rPr lang="en-US" sz="2000" dirty="0">
+                <a:solidFill>
+                  <a:srgbClr val="C8D0DD"/>
                 </a:solidFill>
                 <a:latin typeface="Calibri" pitchFamily="34" charset="0"/>
                 <a:ea typeface="Calibri" pitchFamily="34" charset="-122"/>
                 <a:cs typeface="Calibri" pitchFamily="34" charset="-120"/>
               </a:rPr>
-              <a:t>Lock away 20% of campaigns for the final exam</a:t>
-            </a:r>
-            <a:endParaRPr lang="en-US" sz="1400" dirty="0"/>
-          </a:p>
-        </p:txBody>
-      </p:sp>
-      <p:sp>
-        <p:nvSpPr>
-          <p:cNvPr id="15" name="Step card 3"/>
-          <p:cNvSpPr/>
-          <p:nvPr/>
-        </p:nvSpPr>
-        <p:spPr>
-          <a:xfrm>
-            <a:off x="5077846" y="1828800"/>
-            <a:ext cx="2036003" cy="2834640"/>
-          </a:xfrm>
-          <a:prstGeom prst="roundRect">
-            <a:avLst>
-              <a:gd name="adj" fmla="val 5389"/>
-            </a:avLst>
-          </a:prstGeom>
-          <a:solidFill>
-            <a:srgbClr val="F2F4F8"/>
-          </a:solidFill>
-          <a:ln w="12700">
-            <a:solidFill>
-              <a:srgbClr val="F2F4F8"/>
-            </a:solidFill>
-            <a:prstDash val="solid"/>
-          </a:ln>
-        </p:spPr>
-      </p:sp>
-      <p:sp>
-        <p:nvSpPr>
-          <p:cNvPr id="16" name="Step number 3"/>
-          <p:cNvSpPr/>
-          <p:nvPr/>
-        </p:nvSpPr>
-        <p:spPr>
-          <a:xfrm>
-            <a:off x="5352166" y="2103120"/>
-            <a:ext cx="594360" cy="594360"/>
-          </a:xfrm>
-          <a:prstGeom prst="ellipse">
-            <a:avLst/>
-          </a:prstGeom>
-          <a:solidFill>
-            <a:srgbClr val="2A78D6"/>
-          </a:solidFill>
-          <a:ln w="12700">
-            <a:solidFill>
-              <a:srgbClr val="2A78D6"/>
-            </a:solidFill>
-            <a:prstDash val="solid"/>
-          </a:ln>
-        </p:spPr>
-      </p:sp>
-      <p:sp>
-        <p:nvSpPr>
-          <p:cNvPr id="17" name="Text 14"/>
-          <p:cNvSpPr txBox="1"/>
-          <p:nvPr/>
-        </p:nvSpPr>
-        <p:spPr>
-          <a:xfrm>
-            <a:off x="5352166" y="2103120"/>
-            <a:ext cx="594360" cy="594360"/>
-          </a:xfrm>
-          <a:prstGeom prst="rect">
-            <a:avLst/>
-          </a:prstGeom>
-          <a:noFill/>
-          <a:ln/>
-        </p:spPr>
-        <p:txBody>
-          <a:bodyPr wrap="square" lIns="0" tIns="0" rIns="0" bIns="0" rtlCol="0" anchor="ctr"/>
-          <a:lstStyle/>
-          <a:p>
-            <a:pPr algn="ctr" indent="0" marL="0">
-              <a:buNone/>
-            </a:pPr>
-            <a:r>
-              <a:rPr lang="en-US" sz="2200" b="1" dirty="0">
-                <a:solidFill>
-                  <a:schemeClr val="bg1"/>
+              <a:t> </a:t>
+            </a:r>
+            <a:endParaRPr lang="en-US" sz="2000" dirty="0"/>
+          </a:p>
+          <a:p>
+            <a:pPr indent="0" marL="0">
+              <a:buNone/>
+            </a:pPr>
+            <a:r>
+              <a:rPr lang="en-US" sz="2000" dirty="0">
+                <a:solidFill>
+                  <a:srgbClr val="C8D0DD"/>
                 </a:solidFill>
                 <a:latin typeface="Calibri" pitchFamily="34" charset="0"/>
                 <a:ea typeface="Calibri" pitchFamily="34" charset="-122"/>
                 <a:cs typeface="Calibri" pitchFamily="34" charset="-120"/>
               </a:rPr>
-              <a:t>3</a:t>
-            </a:r>
-            <a:endParaRPr lang="en-US" sz="2200" dirty="0"/>
-          </a:p>
-        </p:txBody>
-      </p:sp>
-      <p:sp>
-        <p:nvSpPr>
-          <p:cNvPr id="18" name="Text 15"/>
-          <p:cNvSpPr txBox="1"/>
-          <p:nvPr/>
-        </p:nvSpPr>
-        <p:spPr>
-          <a:xfrm>
-            <a:off x="5352166" y="2880360"/>
-            <a:ext cx="1578803" cy="685800"/>
-          </a:xfrm>
-          <a:prstGeom prst="rect">
-            <a:avLst/>
-          </a:prstGeom>
-          <a:noFill/>
-          <a:ln/>
-        </p:spPr>
-        <p:txBody>
-          <a:bodyPr wrap="square" lIns="0" tIns="0" rIns="0" bIns="0" rtlCol="0" anchor="t"/>
-          <a:lstStyle/>
-          <a:p>
+              <a:t>A model that uses them looks perfect, but is useless on launch day. </a:t>
+            </a:r>
             <a:pPr indent="0" marL="0">
               <a:buNone/>
             </a:pPr>
             <a:r>
-              <a:rPr lang="en-US" sz="1800" b="1" dirty="0">
-                <a:solidFill>
-                  <a:schemeClr val="tx1"/>
+              <a:rPr lang="en-US" sz="2000" b="1" dirty="0">
+                <a:solidFill>
+                  <a:srgbClr val="FFFFFF"/>
                 </a:solidFill>
                 <a:latin typeface="Calibri" pitchFamily="34" charset="0"/>
                 <a:ea typeface="Calibri" pitchFamily="34" charset="-122"/>
                 <a:cs typeface="Calibri" pitchFamily="34" charset="-120"/>
               </a:rPr>
-              <a:t>Simple rules first</a:t>
-            </a:r>
-            <a:endParaRPr lang="en-US" sz="1800" dirty="0"/>
-          </a:p>
-        </p:txBody>
-      </p:sp>
-      <p:sp>
-        <p:nvSpPr>
-          <p:cNvPr id="19" name="Text 16"/>
+              <a:t>We removed them.</a:t>
+            </a:r>
+            <a:endParaRPr lang="en-US" sz="2000" dirty="0"/>
+          </a:p>
+        </p:txBody>
+      </p:sp>
+      <p:sp>
+        <p:nvSpPr>
+          <p:cNvPr id="6" name="Text 3"/>
           <p:cNvSpPr txBox="1"/>
           <p:nvPr/>
         </p:nvSpPr>
         <p:spPr>
           <a:xfrm>
-            <a:off x="5352166" y="3566160"/>
-            <a:ext cx="1578803" cy="1005840"/>
+            <a:off x="6675120" y="2103120"/>
+            <a:ext cx="4937760" cy="1371600"/>
           </a:xfrm>
           <a:prstGeom prst="rect">
             <a:avLst/>
@@ -12942,145 +13579,54 @@
               <a:buNone/>
             </a:pPr>
             <a:r>
-              <a:rPr lang="en-US" sz="1400" dirty="0">
-                <a:solidFill>
-                  <a:schemeClr val="tx2"/>
+              <a:rPr lang="en-US" sz="8000" b="1" dirty="0">
+                <a:solidFill>
+                  <a:schemeClr val="accent5"/>
+                </a:solidFill>
+                <a:latin typeface="Arial" pitchFamily="34" charset="0"/>
+                <a:ea typeface="Arial" pitchFamily="34" charset="-122"/>
+                <a:cs typeface="Arial" pitchFamily="34" charset="-120"/>
+              </a:rPr>
+              <a:t>99.997%</a:t>
+            </a:r>
+            <a:endParaRPr lang="en-US" sz="8000" dirty="0"/>
+          </a:p>
+        </p:txBody>
+      </p:sp>
+      <p:sp>
+        <p:nvSpPr>
+          <p:cNvPr id="7" name="Text 4"/>
+          <p:cNvSpPr txBox="1"/>
+          <p:nvPr/>
+        </p:nvSpPr>
+        <p:spPr>
+          <a:xfrm>
+            <a:off x="6675120" y="3566160"/>
+            <a:ext cx="4754880" cy="914400"/>
+          </a:xfrm>
+          <a:prstGeom prst="rect">
+            <a:avLst/>
+          </a:prstGeom>
+          <a:noFill/>
+          <a:ln/>
+        </p:spPr>
+        <p:txBody>
+          <a:bodyPr wrap="square" lIns="0" tIns="0" rIns="0" bIns="0" rtlCol="0" anchor="t"/>
+          <a:lstStyle/>
+          <a:p>
+            <a:pPr indent="0" marL="0">
+              <a:buNone/>
+            </a:pPr>
+            <a:r>
+              <a:rPr lang="en-US" sz="1800" dirty="0">
+                <a:solidFill>
+                  <a:srgbClr val="C8D0DD"/>
                 </a:solidFill>
                 <a:latin typeface="Calibri" pitchFamily="34" charset="0"/>
                 <a:ea typeface="Calibri" pitchFamily="34" charset="-122"/>
                 <a:cs typeface="Calibri" pitchFamily="34" charset="-120"/>
               </a:rPr>
-              <a:t>“Small goal = success”: the score to beat</a:t>
-            </a:r>
-            <a:endParaRPr lang="en-US" sz="1400" dirty="0"/>
-          </a:p>
-        </p:txBody>
-      </p:sp>
-      <p:sp>
-        <p:nvSpPr>
-          <p:cNvPr id="20" name="Step card 4"/>
-          <p:cNvSpPr/>
-          <p:nvPr/>
-        </p:nvSpPr>
-        <p:spPr>
-          <a:xfrm>
-            <a:off x="7342449" y="1828800"/>
-            <a:ext cx="2036003" cy="2834640"/>
-          </a:xfrm>
-          <a:prstGeom prst="roundRect">
-            <a:avLst>
-              <a:gd name="adj" fmla="val 5389"/>
-            </a:avLst>
-          </a:prstGeom>
-          <a:solidFill>
-            <a:srgbClr val="F2F4F8"/>
-          </a:solidFill>
-          <a:ln w="12700">
-            <a:solidFill>
-              <a:srgbClr val="F2F4F8"/>
-            </a:solidFill>
-            <a:prstDash val="solid"/>
-          </a:ln>
-        </p:spPr>
-      </p:sp>
-      <p:sp>
-        <p:nvSpPr>
-          <p:cNvPr id="21" name="Step number 4"/>
-          <p:cNvSpPr/>
-          <p:nvPr/>
-        </p:nvSpPr>
-        <p:spPr>
-          <a:xfrm>
-            <a:off x="7616769" y="2103120"/>
-            <a:ext cx="594360" cy="594360"/>
-          </a:xfrm>
-          <a:prstGeom prst="ellipse">
-            <a:avLst/>
-          </a:prstGeom>
-          <a:solidFill>
-            <a:srgbClr val="2A78D6"/>
-          </a:solidFill>
-          <a:ln w="12700">
-            <a:solidFill>
-              <a:srgbClr val="2A78D6"/>
-            </a:solidFill>
-            <a:prstDash val="solid"/>
-          </a:ln>
-        </p:spPr>
-      </p:sp>
-      <p:sp>
-        <p:nvSpPr>
-          <p:cNvPr id="22" name="Text 19"/>
-          <p:cNvSpPr txBox="1"/>
-          <p:nvPr/>
-        </p:nvSpPr>
-        <p:spPr>
-          <a:xfrm>
-            <a:off x="7616769" y="2103120"/>
-            <a:ext cx="594360" cy="594360"/>
-          </a:xfrm>
-          <a:prstGeom prst="rect">
-            <a:avLst/>
-          </a:prstGeom>
-          <a:noFill/>
-          <a:ln/>
-        </p:spPr>
-        <p:txBody>
-          <a:bodyPr wrap="square" lIns="0" tIns="0" rIns="0" bIns="0" rtlCol="0" anchor="ctr"/>
-          <a:lstStyle/>
-          <a:p>
-            <a:pPr algn="ctr" indent="0" marL="0">
-              <a:buNone/>
-            </a:pPr>
-            <a:r>
-              <a:rPr lang="en-US" sz="2200" b="1" dirty="0">
-                <a:solidFill>
-                  <a:schemeClr val="bg1"/>
-                </a:solidFill>
-                <a:latin typeface="Calibri" pitchFamily="34" charset="0"/>
-                <a:ea typeface="Calibri" pitchFamily="34" charset="-122"/>
-                <a:cs typeface="Calibri" pitchFamily="34" charset="-120"/>
-              </a:rPr>
-              <a:t>4</a:t>
-            </a:r>
-            <a:endParaRPr lang="en-US" sz="2200" dirty="0"/>
-          </a:p>
-        </p:txBody>
-      </p:sp>
-      <p:sp>
-        <p:nvSpPr>
-          <p:cNvPr id="23" name="Text 20"/>
-          <p:cNvSpPr txBox="1"/>
-          <p:nvPr/>
-        </p:nvSpPr>
-        <p:spPr>
-          <a:xfrm>
-            <a:off x="7616769" y="2880360"/>
-            <a:ext cx="1578803" cy="685800"/>
-          </a:xfrm>
-          <a:prstGeom prst="rect">
-            <a:avLst/>
-          </a:prstGeom>
-          <a:noFill/>
-          <a:ln/>
-        </p:spPr>
-        <p:txBody>
-          <a:bodyPr wrap="square" lIns="0" tIns="0" rIns="0" bIns="0" rtlCol="0" anchor="t"/>
-          <a:lstStyle/>
-          <a:p>
-            <a:pPr indent="0" marL="0">
-              <a:buNone/>
-            </a:pPr>
-            <a:r>
-              <a:rPr lang="en-US" sz="1800" b="1" dirty="0">
-                <a:solidFill>
-                  <a:schemeClr val="tx1"/>
-                </a:solidFill>
-                <a:latin typeface="Calibri" pitchFamily="34" charset="0"/>
-                <a:ea typeface="Calibri" pitchFamily="34" charset="-122"/>
-                <a:cs typeface="Calibri" pitchFamily="34" charset="-120"/>
-              </a:rPr>
-              <a:t>Compare 3 models</a:t>
+              <a:t>of outcomes are explained by one rule: “pledged at least the goal”</a:t>
             </a:r>
             <a:endParaRPr lang="en-US" sz="1800" dirty="0"/>
           </a:p>
@@ -13088,254 +13634,7 @@
       </p:sp>
       <p:sp>
         <p:nvSpPr>
-          <p:cNvPr id="24" name="Text 21"/>
-          <p:cNvSpPr txBox="1"/>
-          <p:nvPr/>
-        </p:nvSpPr>
-        <p:spPr>
-          <a:xfrm>
-            <a:off x="7616769" y="3566160"/>
-            <a:ext cx="1578803" cy="1005840"/>
-          </a:xfrm>
-          <a:prstGeom prst="rect">
-            <a:avLst/>
-          </a:prstGeom>
-          <a:noFill/>
-          <a:ln/>
-        </p:spPr>
-        <p:txBody>
-          <a:bodyPr wrap="square" lIns="0" tIns="0" rIns="0" bIns="0" rtlCol="0" anchor="t"/>
-          <a:lstStyle/>
-          <a:p>
-            <a:pPr indent="0" marL="0">
-              <a:buNone/>
-            </a:pPr>
-            <a:r>
-              <a:rPr lang="en-US" sz="1400" dirty="0">
-                <a:solidFill>
-                  <a:schemeClr val="tx2"/>
-                </a:solidFill>
-                <a:latin typeface="Calibri" pitchFamily="34" charset="0"/>
-                <a:ea typeface="Calibri" pitchFamily="34" charset="-122"/>
-                <a:cs typeface="Calibri" pitchFamily="34" charset="-120"/>
-              </a:rPr>
-              <a:t>Linear model, random forest, gradient boosting</a:t>
-            </a:r>
-            <a:endParaRPr lang="en-US" sz="1400" dirty="0"/>
-          </a:p>
-        </p:txBody>
-      </p:sp>
-      <p:sp>
-        <p:nvSpPr>
-          <p:cNvPr id="25" name="Step card 5"/>
-          <p:cNvSpPr/>
-          <p:nvPr/>
-        </p:nvSpPr>
-        <p:spPr>
-          <a:xfrm>
-            <a:off x="9607052" y="1828800"/>
-            <a:ext cx="2036003" cy="2834640"/>
-          </a:xfrm>
-          <a:prstGeom prst="roundRect">
-            <a:avLst>
-              <a:gd name="adj" fmla="val 5389"/>
-            </a:avLst>
-          </a:prstGeom>
-          <a:solidFill>
-            <a:srgbClr val="F2F4F8"/>
-          </a:solidFill>
-          <a:ln w="12700">
-            <a:solidFill>
-              <a:srgbClr val="F2F4F8"/>
-            </a:solidFill>
-            <a:prstDash val="solid"/>
-          </a:ln>
-        </p:spPr>
-      </p:sp>
-      <p:sp>
-        <p:nvSpPr>
-          <p:cNvPr id="26" name="Step number 5"/>
-          <p:cNvSpPr/>
-          <p:nvPr/>
-        </p:nvSpPr>
-        <p:spPr>
-          <a:xfrm>
-            <a:off x="9881372" y="2103120"/>
-            <a:ext cx="594360" cy="594360"/>
-          </a:xfrm>
-          <a:prstGeom prst="ellipse">
-            <a:avLst/>
-          </a:prstGeom>
-          <a:solidFill>
-            <a:srgbClr val="2A78D6"/>
-          </a:solidFill>
-          <a:ln w="12700">
-            <a:solidFill>
-              <a:srgbClr val="2A78D6"/>
-            </a:solidFill>
-            <a:prstDash val="solid"/>
-          </a:ln>
-        </p:spPr>
-      </p:sp>
-      <p:sp>
-        <p:nvSpPr>
-          <p:cNvPr id="27" name="Text 24"/>
-          <p:cNvSpPr txBox="1"/>
-          <p:nvPr/>
-        </p:nvSpPr>
-        <p:spPr>
-          <a:xfrm>
-            <a:off x="9881372" y="2103120"/>
-            <a:ext cx="594360" cy="594360"/>
-          </a:xfrm>
-          <a:prstGeom prst="rect">
-            <a:avLst/>
-          </a:prstGeom>
-          <a:noFill/>
-          <a:ln/>
-        </p:spPr>
-        <p:txBody>
-          <a:bodyPr wrap="square" lIns="0" tIns="0" rIns="0" bIns="0" rtlCol="0" anchor="ctr"/>
-          <a:lstStyle/>
-          <a:p>
-            <a:pPr algn="ctr" indent="0" marL="0">
-              <a:buNone/>
-            </a:pPr>
-            <a:r>
-              <a:rPr lang="en-US" sz="2200" b="1" dirty="0">
-                <a:solidFill>
-                  <a:schemeClr val="bg1"/>
-                </a:solidFill>
-                <a:latin typeface="Calibri" pitchFamily="34" charset="0"/>
-                <a:ea typeface="Calibri" pitchFamily="34" charset="-122"/>
-                <a:cs typeface="Calibri" pitchFamily="34" charset="-120"/>
-              </a:rPr>
-              <a:t>5</a:t>
-            </a:r>
-            <a:endParaRPr lang="en-US" sz="2200" dirty="0"/>
-          </a:p>
-        </p:txBody>
-      </p:sp>
-      <p:sp>
-        <p:nvSpPr>
-          <p:cNvPr id="28" name="Text 25"/>
-          <p:cNvSpPr txBox="1"/>
-          <p:nvPr/>
-        </p:nvSpPr>
-        <p:spPr>
-          <a:xfrm>
-            <a:off x="9881372" y="2880360"/>
-            <a:ext cx="1578803" cy="685800"/>
-          </a:xfrm>
-          <a:prstGeom prst="rect">
-            <a:avLst/>
-          </a:prstGeom>
-          <a:noFill/>
-          <a:ln/>
-        </p:spPr>
-        <p:txBody>
-          <a:bodyPr wrap="square" lIns="0" tIns="0" rIns="0" bIns="0" rtlCol="0" anchor="t"/>
-          <a:lstStyle/>
-          <a:p>
-            <a:pPr indent="0" marL="0">
-              <a:buNone/>
-            </a:pPr>
-            <a:r>
-              <a:rPr lang="en-US" sz="1800" b="1" dirty="0">
-                <a:solidFill>
-                  <a:schemeClr val="tx1"/>
-                </a:solidFill>
-                <a:latin typeface="Calibri" pitchFamily="34" charset="0"/>
-                <a:ea typeface="Calibri" pitchFamily="34" charset="-122"/>
-                <a:cs typeface="Calibri" pitchFamily="34" charset="-120"/>
-              </a:rPr>
-              <a:t>Tune and test</a:t>
-            </a:r>
-            <a:endParaRPr lang="en-US" sz="1800" dirty="0"/>
-          </a:p>
-        </p:txBody>
-      </p:sp>
-      <p:sp>
-        <p:nvSpPr>
-          <p:cNvPr id="29" name="Text 26"/>
-          <p:cNvSpPr txBox="1"/>
-          <p:nvPr/>
-        </p:nvSpPr>
-        <p:spPr>
-          <a:xfrm>
-            <a:off x="9881372" y="3566160"/>
-            <a:ext cx="1578803" cy="1005840"/>
-          </a:xfrm>
-          <a:prstGeom prst="rect">
-            <a:avLst/>
-          </a:prstGeom>
-          <a:noFill/>
-          <a:ln/>
-        </p:spPr>
-        <p:txBody>
-          <a:bodyPr wrap="square" lIns="0" tIns="0" rIns="0" bIns="0" rtlCol="0" anchor="t"/>
-          <a:lstStyle/>
-          <a:p>
-            <a:pPr indent="0" marL="0">
-              <a:buNone/>
-            </a:pPr>
-            <a:r>
-              <a:rPr lang="en-US" sz="1400" dirty="0">
-                <a:solidFill>
-                  <a:schemeClr val="tx2"/>
-                </a:solidFill>
-                <a:latin typeface="Calibri" pitchFamily="34" charset="0"/>
-                <a:ea typeface="Calibri" pitchFamily="34" charset="-122"/>
-                <a:cs typeface="Calibri" pitchFamily="34" charset="-120"/>
-              </a:rPr>
-              <a:t>Tune the best one, then take the exam once</a:t>
-            </a:r>
-            <a:endParaRPr lang="en-US" sz="1400" dirty="0"/>
-          </a:p>
-        </p:txBody>
-      </p:sp>
-      <p:sp>
-        <p:nvSpPr>
-          <p:cNvPr id="30" name="Text 27"/>
-          <p:cNvSpPr txBox="1"/>
-          <p:nvPr/>
-        </p:nvSpPr>
-        <p:spPr>
-          <a:xfrm>
-            <a:off x="548640" y="5029200"/>
-            <a:ext cx="11094415" cy="731520"/>
-          </a:xfrm>
-          <a:prstGeom prst="rect">
-            <a:avLst/>
-          </a:prstGeom>
-          <a:noFill/>
-          <a:ln/>
-        </p:spPr>
-        <p:txBody>
-          <a:bodyPr wrap="square" lIns="0" tIns="0" rIns="0" bIns="0" rtlCol="0" anchor="t"/>
-          <a:lstStyle/>
-          <a:p>
-            <a:pPr indent="0" marL="0">
-              <a:buNone/>
-            </a:pPr>
-            <a:r>
-              <a:rPr lang="en-US" sz="1600" dirty="0">
-                <a:solidFill>
-                  <a:schemeClr val="tx2"/>
-                </a:solidFill>
-                <a:latin typeface="Calibri" pitchFamily="34" charset="0"/>
-                <a:ea typeface="Calibri" pitchFamily="34" charset="-122"/>
-                <a:cs typeface="Calibri" pitchFamily="34" charset="-120"/>
-              </a:rPr>
-              <a:t>Every model was trained and compared on the other 80% only, using 5-fold cross-validation: train on four parts, check on the fifth, repeat.</a:t>
-            </a:r>
-            <a:endParaRPr lang="en-US" sz="1600" dirty="0"/>
-          </a:p>
-        </p:txBody>
-      </p:sp>
-      <p:sp>
-        <p:nvSpPr>
-          <p:cNvPr id="31" name="Text 0"/>
+          <p:cNvPr id="8" name="Text 0"/>
           <p:cNvSpPr/>
           <p:nvPr>
             <p:ph idx="102" type="body" hasCustomPrompt="1"/>
@@ -13393,7 +13692,7 @@
             <a:lvl1pPr>
               <a:defRPr sz="1100">
                 <a:solidFill>
-                  <a:srgbClr val="5B6472"/>
+                  <a:srgbClr val="C8D0DD"/>
                 </a:solidFill>
               </a:defRPr>
             </a:lvl1pPr>
@@ -13465,7 +13764,7 @@
                   <a:schemeClr val="accent3"/>
                 </a:solidFill>
               </a:rPr>
-              <a:t>RESULT · TESTED ON 66,335 UNSEEN CAMPAIGNS</a:t>
+              <a:t>OUR PROCESS</a:t>
             </a:r>
             <a:endParaRPr lang="en-US" sz="1200" dirty="0"/>
           </a:p>
@@ -13503,109 +13802,26 @@
                   <a:schemeClr val="tx1"/>
                 </a:solidFill>
               </a:rPr>
-              <a:t>The model separates risky from promising</a:t>
+              <a:t>How we built it, step by step</a:t>
             </a:r>
             <a:endParaRPr lang="en-US" sz="3400" dirty="0"/>
           </a:p>
         </p:txBody>
       </p:sp>
-      <p:graphicFrame>
-        <p:nvGraphicFramePr>
-          <p:cNvPr id="5" name="Ranking score (ROC-AUC)" descr=""/>
-          <p:cNvGraphicFramePr/>
-          <p:nvPr/>
-        </p:nvGraphicFramePr>
-        <p:xfrm>
-          <a:off x="548640" y="1645920"/>
-          <a:ext cx="6766560" cy="2926080"/>
-        </p:xfrm>
-        <a:graphic xmlns:a="http://schemas.openxmlformats.org/drawingml/2006/main">
-          <a:graphicData uri="http://schemas.openxmlformats.org/drawingml/2006/chart">
-            <c:chart xmlns:c="http://schemas.openxmlformats.org/drawingml/2006/chart" r:id="rId1"/>
-          </a:graphicData>
-        </a:graphic>
-      </p:graphicFrame>
-      <p:sp>
-        <p:nvSpPr>
-          <p:cNvPr id="6" name="Text 2"/>
-          <p:cNvSpPr txBox="1"/>
-          <p:nvPr/>
-        </p:nvSpPr>
-        <p:spPr>
-          <a:xfrm>
-            <a:off x="548640" y="4754880"/>
-            <a:ext cx="6583680" cy="822960"/>
-          </a:xfrm>
-          <a:prstGeom prst="rect">
-            <a:avLst/>
-          </a:prstGeom>
-          <a:noFill/>
-          <a:ln/>
-        </p:spPr>
-        <p:txBody>
-          <a:bodyPr wrap="square" lIns="0" tIns="0" rIns="0" bIns="0" rtlCol="0" anchor="t"/>
-          <a:lstStyle/>
-          <a:p>
-            <a:pPr indent="0" marL="0">
-              <a:buNone/>
-            </a:pPr>
-            <a:r>
-              <a:rPr lang="en-US" sz="1600" dirty="0">
-                <a:solidFill>
-                  <a:schemeClr val="tx2"/>
-                </a:solidFill>
-                <a:latin typeface="Calibri" pitchFamily="34" charset="0"/>
-                <a:ea typeface="Calibri" pitchFamily="34" charset="-122"/>
-                <a:cs typeface="Calibri" pitchFamily="34" charset="-120"/>
-              </a:rPr>
-              <a:t>Show the model one successful and one failed campaign: it ranks the successful one higher in about </a:t>
-            </a:r>
-            <a:pPr indent="0" marL="0">
-              <a:buNone/>
-            </a:pPr>
-            <a:r>
-              <a:rPr lang="en-US" sz="1600" b="1" dirty="0">
-                <a:solidFill>
-                  <a:srgbClr val="14213D"/>
-                </a:solidFill>
-                <a:latin typeface="Calibri" pitchFamily="34" charset="0"/>
-                <a:ea typeface="Calibri" pitchFamily="34" charset="-122"/>
-                <a:cs typeface="Calibri" pitchFamily="34" charset="-120"/>
-              </a:rPr>
-              <a:t>3 out of 4</a:t>
-            </a:r>
-            <a:pPr indent="0" marL="0">
-              <a:buNone/>
-            </a:pPr>
-            <a:r>
-              <a:rPr lang="en-US" sz="1600" dirty="0">
-                <a:solidFill>
-                  <a:schemeClr val="tx2"/>
-                </a:solidFill>
-                <a:latin typeface="Calibri" pitchFamily="34" charset="0"/>
-                <a:ea typeface="Calibri" pitchFamily="34" charset="-122"/>
-                <a:cs typeface="Calibri" pitchFamily="34" charset="-120"/>
-              </a:rPr>
-              <a:t> pairs.</a:t>
-            </a:r>
-            <a:endParaRPr lang="en-US" sz="1600" dirty="0"/>
-          </a:p>
-        </p:txBody>
-      </p:sp>
-      <p:sp>
-        <p:nvSpPr>
-          <p:cNvPr id="7" name="Card: most promising"/>
+      <p:sp>
+        <p:nvSpPr>
+          <p:cNvPr id="5" name="Step card 1"/>
           <p:cNvSpPr/>
           <p:nvPr/>
         </p:nvSpPr>
         <p:spPr>
           <a:xfrm>
-            <a:off x="7863840" y="1645920"/>
-            <a:ext cx="3779215" cy="1965960"/>
+            <a:off x="548640" y="1828800"/>
+            <a:ext cx="2036003" cy="2834640"/>
           </a:xfrm>
           <a:prstGeom prst="roundRect">
             <a:avLst>
-              <a:gd name="adj" fmla="val 5581"/>
+              <a:gd name="adj" fmla="val 5389"/>
             </a:avLst>
           </a:prstGeom>
           <a:solidFill>
@@ -13621,77 +13837,102 @@
       </p:sp>
       <p:sp>
         <p:nvSpPr>
-          <p:cNvPr id="8" name="Text 4"/>
+          <p:cNvPr id="6" name="Step number 1"/>
+          <p:cNvSpPr/>
+          <p:nvPr/>
+        </p:nvSpPr>
+        <p:spPr>
+          <a:xfrm>
+            <a:off x="822960" y="2103120"/>
+            <a:ext cx="594360" cy="594360"/>
+          </a:xfrm>
+          <a:prstGeom prst="ellipse">
+            <a:avLst/>
+          </a:prstGeom>
+          <a:solidFill>
+            <a:srgbClr val="2A78D6"/>
+          </a:solidFill>
+          <a:ln w="12700">
+            <a:solidFill>
+              <a:srgbClr val="2A78D6"/>
+            </a:solidFill>
+            <a:prstDash val="solid"/>
+          </a:ln>
+        </p:spPr>
+      </p:sp>
+      <p:sp>
+        <p:nvSpPr>
+          <p:cNvPr id="7" name="Text 4"/>
           <p:cNvSpPr txBox="1"/>
           <p:nvPr/>
         </p:nvSpPr>
         <p:spPr>
           <a:xfrm>
-            <a:off x="8183880" y="1783080"/>
-            <a:ext cx="3139135" cy="868680"/>
-          </a:xfrm>
-          <a:prstGeom prst="rect">
-            <a:avLst/>
-          </a:prstGeom>
-          <a:noFill/>
-          <a:ln/>
-        </p:spPr>
-        <p:txBody>
-          <a:bodyPr wrap="square" lIns="0" tIns="0" rIns="0" bIns="0" rtlCol="0" anchor="t"/>
-          <a:lstStyle/>
-          <a:p>
-            <a:pPr indent="0" marL="0">
-              <a:buNone/>
-            </a:pPr>
-            <a:r>
-              <a:rPr lang="en-US" sz="4800" b="1" dirty="0">
-                <a:solidFill>
-                  <a:schemeClr val="accent3"/>
-                </a:solidFill>
-                <a:latin typeface="Arial" pitchFamily="34" charset="0"/>
-                <a:ea typeface="Arial" pitchFamily="34" charset="-122"/>
-                <a:cs typeface="Arial" pitchFamily="34" charset="-120"/>
-              </a:rPr>
-              <a:t>77%</a:t>
-            </a:r>
-            <a:endParaRPr lang="en-US" sz="4800" dirty="0"/>
-          </a:p>
-        </p:txBody>
-      </p:sp>
-      <p:sp>
-        <p:nvSpPr>
-          <p:cNvPr id="9" name="Text 5"/>
-          <p:cNvSpPr txBox="1"/>
-          <p:nvPr/>
-        </p:nvSpPr>
-        <p:spPr>
-          <a:xfrm>
-            <a:off x="8183880" y="2697480"/>
-            <a:ext cx="3139135" cy="685800"/>
-          </a:xfrm>
-          <a:prstGeom prst="rect">
-            <a:avLst/>
-          </a:prstGeom>
-          <a:noFill/>
-          <a:ln/>
-        </p:spPr>
-        <p:txBody>
-          <a:bodyPr wrap="square" lIns="0" tIns="0" rIns="0" bIns="0" rtlCol="0" anchor="t"/>
-          <a:lstStyle/>
-          <a:p>
-            <a:pPr indent="0" marL="0">
-              <a:buNone/>
-            </a:pPr>
-            <a:r>
-              <a:rPr lang="en-US" sz="1800" b="1" dirty="0">
-                <a:solidFill>
-                  <a:schemeClr val="tx1"/>
+            <a:off x="822960" y="2103120"/>
+            <a:ext cx="594360" cy="594360"/>
+          </a:xfrm>
+          <a:prstGeom prst="rect">
+            <a:avLst/>
+          </a:prstGeom>
+          <a:noFill/>
+          <a:ln/>
+        </p:spPr>
+        <p:txBody>
+          <a:bodyPr wrap="square" lIns="0" tIns="0" rIns="0" bIns="0" rtlCol="0" anchor="ctr"/>
+          <a:lstStyle/>
+          <a:p>
+            <a:pPr algn="ctr" indent="0" marL="0">
+              <a:buNone/>
+            </a:pPr>
+            <a:r>
+              <a:rPr lang="en-US" sz="2200" b="1" dirty="0">
+                <a:solidFill>
+                  <a:schemeClr val="bg1"/>
                 </a:solidFill>
                 <a:latin typeface="Calibri" pitchFamily="34" charset="0"/>
                 <a:ea typeface="Calibri" pitchFamily="34" charset="-122"/>
                 <a:cs typeface="Calibri" pitchFamily="34" charset="-120"/>
               </a:rPr>
-              <a:t>succeeded among the 10% rated most promising</a:t>
+              <a:t>1</a:t>
+            </a:r>
+            <a:endParaRPr lang="en-US" sz="2200" dirty="0"/>
+          </a:p>
+        </p:txBody>
+      </p:sp>
+      <p:sp>
+        <p:nvSpPr>
+          <p:cNvPr id="8" name="Text 5"/>
+          <p:cNvSpPr txBox="1"/>
+          <p:nvPr/>
+        </p:nvSpPr>
+        <p:spPr>
+          <a:xfrm>
+            <a:off x="822960" y="2880360"/>
+            <a:ext cx="1578803" cy="685800"/>
+          </a:xfrm>
+          <a:prstGeom prst="rect">
+            <a:avLst/>
+          </a:prstGeom>
+          <a:noFill/>
+          <a:ln/>
+        </p:spPr>
+        <p:txBody>
+          <a:bodyPr wrap="square" lIns="0" tIns="0" rIns="0" bIns="0" rtlCol="0" anchor="t"/>
+          <a:lstStyle/>
+          <a:p>
+            <a:pPr indent="0" marL="0">
+              <a:buNone/>
+            </a:pPr>
+            <a:r>
+              <a:rPr lang="en-US" sz="1800" b="1" dirty="0">
+                <a:solidFill>
+                  <a:schemeClr val="tx1"/>
+                </a:solidFill>
+                <a:latin typeface="Calibri" pitchFamily="34" charset="0"/>
+                <a:ea typeface="Calibri" pitchFamily="34" charset="-122"/>
+                <a:cs typeface="Calibri" pitchFamily="34" charset="-120"/>
+              </a:rPr>
+              <a:t>Clean the data</a:t>
             </a:r>
             <a:endParaRPr lang="en-US" sz="1800" dirty="0"/>
           </a:p>
@@ -13699,18 +13940,57 @@
       </p:sp>
       <p:sp>
         <p:nvSpPr>
-          <p:cNvPr id="10" name="Card: most risky"/>
+          <p:cNvPr id="9" name="Text 6"/>
+          <p:cNvSpPr txBox="1"/>
+          <p:nvPr/>
+        </p:nvSpPr>
+        <p:spPr>
+          <a:xfrm>
+            <a:off x="822960" y="3566160"/>
+            <a:ext cx="1578803" cy="1005840"/>
+          </a:xfrm>
+          <a:prstGeom prst="rect">
+            <a:avLst/>
+          </a:prstGeom>
+          <a:noFill/>
+          <a:ln/>
+        </p:spPr>
+        <p:txBody>
+          <a:bodyPr wrap="square" lIns="0" tIns="0" rIns="0" bIns="0" rtlCol="0" anchor="t"/>
+          <a:lstStyle/>
+          <a:p>
+            <a:pPr indent="0" marL="0">
+              <a:buNone/>
+            </a:pPr>
+            <a:r>
+              <a:rPr lang="en-US" sz="1400" dirty="0">
+                <a:solidFill>
+                  <a:schemeClr val="tx2"/>
+                </a:solidFill>
+                <a:latin typeface="Calibri" pitchFamily="34" charset="0"/>
+                <a:ea typeface="Calibri" pitchFamily="34" charset="-122"/>
+                <a:cs typeface="Calibri" pitchFamily="34" charset="-120"/>
+              </a:rPr>
+              <a:t>Keep finished campaigns, remove future data, fix errors</a:t>
+            </a:r>
+            <a:endParaRPr lang="en-US" sz="1400" dirty="0"/>
+          </a:p>
+        </p:txBody>
+      </p:sp>
+      <p:sp>
+        <p:nvSpPr>
+          <p:cNvPr id="10" name="Step card 2"/>
           <p:cNvSpPr/>
           <p:nvPr/>
         </p:nvSpPr>
         <p:spPr>
           <a:xfrm>
-            <a:off x="7863840" y="3794760"/>
-            <a:ext cx="3779215" cy="1965960"/>
+            <a:off x="2813243" y="1828800"/>
+            <a:ext cx="2036003" cy="2834640"/>
           </a:xfrm>
           <a:prstGeom prst="roundRect">
             <a:avLst>
-              <a:gd name="adj" fmla="val 5581"/>
+              <a:gd name="adj" fmla="val 5389"/>
             </a:avLst>
           </a:prstGeom>
           <a:solidFill>
@@ -13726,77 +14006,102 @@
       </p:sp>
       <p:sp>
         <p:nvSpPr>
-          <p:cNvPr id="11" name="Text 7"/>
+          <p:cNvPr id="11" name="Step number 2"/>
+          <p:cNvSpPr/>
+          <p:nvPr/>
+        </p:nvSpPr>
+        <p:spPr>
+          <a:xfrm>
+            <a:off x="3087563" y="2103120"/>
+            <a:ext cx="594360" cy="594360"/>
+          </a:xfrm>
+          <a:prstGeom prst="ellipse">
+            <a:avLst/>
+          </a:prstGeom>
+          <a:solidFill>
+            <a:srgbClr val="2A78D6"/>
+          </a:solidFill>
+          <a:ln w="12700">
+            <a:solidFill>
+              <a:srgbClr val="2A78D6"/>
+            </a:solidFill>
+            <a:prstDash val="solid"/>
+          </a:ln>
+        </p:spPr>
+      </p:sp>
+      <p:sp>
+        <p:nvSpPr>
+          <p:cNvPr id="12" name="Text 9"/>
           <p:cNvSpPr txBox="1"/>
           <p:nvPr/>
         </p:nvSpPr>
         <p:spPr>
           <a:xfrm>
-            <a:off x="8183880" y="3931920"/>
-            <a:ext cx="3139135" cy="868680"/>
-          </a:xfrm>
-          <a:prstGeom prst="rect">
-            <a:avLst/>
-          </a:prstGeom>
-          <a:noFill/>
-          <a:ln/>
-        </p:spPr>
-        <p:txBody>
-          <a:bodyPr wrap="square" lIns="0" tIns="0" rIns="0" bIns="0" rtlCol="0" anchor="t"/>
-          <a:lstStyle/>
-          <a:p>
-            <a:pPr indent="0" marL="0">
-              <a:buNone/>
-            </a:pPr>
-            <a:r>
-              <a:rPr lang="en-US" sz="4800" b="1" dirty="0">
-                <a:solidFill>
-                  <a:schemeClr val="accent4"/>
-                </a:solidFill>
-                <a:latin typeface="Arial" pitchFamily="34" charset="0"/>
-                <a:ea typeface="Arial" pitchFamily="34" charset="-122"/>
-                <a:cs typeface="Arial" pitchFamily="34" charset="-120"/>
-              </a:rPr>
-              <a:t>5%</a:t>
-            </a:r>
-            <a:endParaRPr lang="en-US" sz="4800" dirty="0"/>
-          </a:p>
-        </p:txBody>
-      </p:sp>
-      <p:sp>
-        <p:nvSpPr>
-          <p:cNvPr id="12" name="Text 8"/>
-          <p:cNvSpPr txBox="1"/>
-          <p:nvPr/>
-        </p:nvSpPr>
-        <p:spPr>
-          <a:xfrm>
-            <a:off x="8183880" y="4846320"/>
-            <a:ext cx="3139135" cy="685800"/>
-          </a:xfrm>
-          <a:prstGeom prst="rect">
-            <a:avLst/>
-          </a:prstGeom>
-          <a:noFill/>
-          <a:ln/>
-        </p:spPr>
-        <p:txBody>
-          <a:bodyPr wrap="square" lIns="0" tIns="0" rIns="0" bIns="0" rtlCol="0" anchor="t"/>
-          <a:lstStyle/>
-          <a:p>
-            <a:pPr indent="0" marL="0">
-              <a:buNone/>
-            </a:pPr>
-            <a:r>
-              <a:rPr lang="en-US" sz="1800" b="1" dirty="0">
-                <a:solidFill>
-                  <a:schemeClr val="tx1"/>
+            <a:off x="3087563" y="2103120"/>
+            <a:ext cx="594360" cy="594360"/>
+          </a:xfrm>
+          <a:prstGeom prst="rect">
+            <a:avLst/>
+          </a:prstGeom>
+          <a:noFill/>
+          <a:ln/>
+        </p:spPr>
+        <p:txBody>
+          <a:bodyPr wrap="square" lIns="0" tIns="0" rIns="0" bIns="0" rtlCol="0" anchor="ctr"/>
+          <a:lstStyle/>
+          <a:p>
+            <a:pPr algn="ctr" indent="0" marL="0">
+              <a:buNone/>
+            </a:pPr>
+            <a:r>
+              <a:rPr lang="en-US" sz="2200" b="1" dirty="0">
+                <a:solidFill>
+                  <a:schemeClr val="bg1"/>
                 </a:solidFill>
                 <a:latin typeface="Calibri" pitchFamily="34" charset="0"/>
                 <a:ea typeface="Calibri" pitchFamily="34" charset="-122"/>
                 <a:cs typeface="Calibri" pitchFamily="34" charset="-120"/>
               </a:rPr>
-              <a:t>succeeded among the 10% rated most risky</a:t>
+              <a:t>2</a:t>
+            </a:r>
+            <a:endParaRPr lang="en-US" sz="2200" dirty="0"/>
+          </a:p>
+        </p:txBody>
+      </p:sp>
+      <p:sp>
+        <p:nvSpPr>
+          <p:cNvPr id="13" name="Text 10"/>
+          <p:cNvSpPr txBox="1"/>
+          <p:nvPr/>
+        </p:nvSpPr>
+        <p:spPr>
+          <a:xfrm>
+            <a:off x="3087563" y="2880360"/>
+            <a:ext cx="1578803" cy="685800"/>
+          </a:xfrm>
+          <a:prstGeom prst="rect">
+            <a:avLst/>
+          </a:prstGeom>
+          <a:noFill/>
+          <a:ln/>
+        </p:spPr>
+        <p:txBody>
+          <a:bodyPr wrap="square" lIns="0" tIns="0" rIns="0" bIns="0" rtlCol="0" anchor="t"/>
+          <a:lstStyle/>
+          <a:p>
+            <a:pPr indent="0" marL="0">
+              <a:buNone/>
+            </a:pPr>
+            <a:r>
+              <a:rPr lang="en-US" sz="1800" b="1" dirty="0">
+                <a:solidFill>
+                  <a:schemeClr val="tx1"/>
+                </a:solidFill>
+                <a:latin typeface="Calibri" pitchFamily="34" charset="0"/>
+                <a:ea typeface="Calibri" pitchFamily="34" charset="-122"/>
+                <a:cs typeface="Calibri" pitchFamily="34" charset="-120"/>
+              </a:rPr>
+              <a:t>Hide a test set</a:t>
             </a:r>
             <a:endParaRPr lang="en-US" sz="1800" dirty="0"/>
           </a:p>
@@ -13804,7 +14109,592 @@
       </p:sp>
       <p:sp>
         <p:nvSpPr>
-          <p:cNvPr id="13" name="Text 0"/>
+          <p:cNvPr id="14" name="Text 11"/>
+          <p:cNvSpPr txBox="1"/>
+          <p:nvPr/>
+        </p:nvSpPr>
+        <p:spPr>
+          <a:xfrm>
+            <a:off x="3087563" y="3566160"/>
+            <a:ext cx="1578803" cy="1005840"/>
+          </a:xfrm>
+          <a:prstGeom prst="rect">
+            <a:avLst/>
+          </a:prstGeom>
+          <a:noFill/>
+          <a:ln/>
+        </p:spPr>
+        <p:txBody>
+          <a:bodyPr wrap="square" lIns="0" tIns="0" rIns="0" bIns="0" rtlCol="0" anchor="t"/>
+          <a:lstStyle/>
+          <a:p>
+            <a:pPr indent="0" marL="0">
+              <a:buNone/>
+            </a:pPr>
+            <a:r>
+              <a:rPr lang="en-US" sz="1400" dirty="0">
+                <a:solidFill>
+                  <a:schemeClr val="tx2"/>
+                </a:solidFill>
+                <a:latin typeface="Calibri" pitchFamily="34" charset="0"/>
+                <a:ea typeface="Calibri" pitchFamily="34" charset="-122"/>
+                <a:cs typeface="Calibri" pitchFamily="34" charset="-120"/>
+              </a:rPr>
+              <a:t>Lock away 20% of campaigns for the final exam</a:t>
+            </a:r>
+            <a:endParaRPr lang="en-US" sz="1400" dirty="0"/>
+          </a:p>
+        </p:txBody>
+      </p:sp>
+      <p:sp>
+        <p:nvSpPr>
+          <p:cNvPr id="15" name="Step card 3"/>
+          <p:cNvSpPr/>
+          <p:nvPr/>
+        </p:nvSpPr>
+        <p:spPr>
+          <a:xfrm>
+            <a:off x="5077846" y="1828800"/>
+            <a:ext cx="2036003" cy="2834640"/>
+          </a:xfrm>
+          <a:prstGeom prst="roundRect">
+            <a:avLst>
+              <a:gd name="adj" fmla="val 5389"/>
+            </a:avLst>
+          </a:prstGeom>
+          <a:solidFill>
+            <a:srgbClr val="F2F4F8"/>
+          </a:solidFill>
+          <a:ln w="12700">
+            <a:solidFill>
+              <a:srgbClr val="F2F4F8"/>
+            </a:solidFill>
+            <a:prstDash val="solid"/>
+          </a:ln>
+        </p:spPr>
+      </p:sp>
+      <p:sp>
+        <p:nvSpPr>
+          <p:cNvPr id="16" name="Step number 3"/>
+          <p:cNvSpPr/>
+          <p:nvPr/>
+        </p:nvSpPr>
+        <p:spPr>
+          <a:xfrm>
+            <a:off x="5352166" y="2103120"/>
+            <a:ext cx="594360" cy="594360"/>
+          </a:xfrm>
+          <a:prstGeom prst="ellipse">
+            <a:avLst/>
+          </a:prstGeom>
+          <a:solidFill>
+            <a:srgbClr val="2A78D6"/>
+          </a:solidFill>
+          <a:ln w="12700">
+            <a:solidFill>
+              <a:srgbClr val="2A78D6"/>
+            </a:solidFill>
+            <a:prstDash val="solid"/>
+          </a:ln>
+        </p:spPr>
+      </p:sp>
+      <p:sp>
+        <p:nvSpPr>
+          <p:cNvPr id="17" name="Text 14"/>
+          <p:cNvSpPr txBox="1"/>
+          <p:nvPr/>
+        </p:nvSpPr>
+        <p:spPr>
+          <a:xfrm>
+            <a:off x="5352166" y="2103120"/>
+            <a:ext cx="594360" cy="594360"/>
+          </a:xfrm>
+          <a:prstGeom prst="rect">
+            <a:avLst/>
+          </a:prstGeom>
+          <a:noFill/>
+          <a:ln/>
+        </p:spPr>
+        <p:txBody>
+          <a:bodyPr wrap="square" lIns="0" tIns="0" rIns="0" bIns="0" rtlCol="0" anchor="ctr"/>
+          <a:lstStyle/>
+          <a:p>
+            <a:pPr algn="ctr" indent="0" marL="0">
+              <a:buNone/>
+            </a:pPr>
+            <a:r>
+              <a:rPr lang="en-US" sz="2200" b="1" dirty="0">
+                <a:solidFill>
+                  <a:schemeClr val="bg1"/>
+                </a:solidFill>
+                <a:latin typeface="Calibri" pitchFamily="34" charset="0"/>
+                <a:ea typeface="Calibri" pitchFamily="34" charset="-122"/>
+                <a:cs typeface="Calibri" pitchFamily="34" charset="-120"/>
+              </a:rPr>
+              <a:t>3</a:t>
+            </a:r>
+            <a:endParaRPr lang="en-US" sz="2200" dirty="0"/>
+          </a:p>
+        </p:txBody>
+      </p:sp>
+      <p:sp>
+        <p:nvSpPr>
+          <p:cNvPr id="18" name="Text 15"/>
+          <p:cNvSpPr txBox="1"/>
+          <p:nvPr/>
+        </p:nvSpPr>
+        <p:spPr>
+          <a:xfrm>
+            <a:off x="5352166" y="2880360"/>
+            <a:ext cx="1578803" cy="685800"/>
+          </a:xfrm>
+          <a:prstGeom prst="rect">
+            <a:avLst/>
+          </a:prstGeom>
+          <a:noFill/>
+          <a:ln/>
+        </p:spPr>
+        <p:txBody>
+          <a:bodyPr wrap="square" lIns="0" tIns="0" rIns="0" bIns="0" rtlCol="0" anchor="t"/>
+          <a:lstStyle/>
+          <a:p>
+            <a:pPr indent="0" marL="0">
+              <a:buNone/>
+            </a:pPr>
+            <a:r>
+              <a:rPr lang="en-US" sz="1800" b="1" dirty="0">
+                <a:solidFill>
+                  <a:schemeClr val="tx1"/>
+                </a:solidFill>
+                <a:latin typeface="Calibri" pitchFamily="34" charset="0"/>
+                <a:ea typeface="Calibri" pitchFamily="34" charset="-122"/>
+                <a:cs typeface="Calibri" pitchFamily="34" charset="-120"/>
+              </a:rPr>
+              <a:t>Simple rules first</a:t>
+            </a:r>
+            <a:endParaRPr lang="en-US" sz="1800" dirty="0"/>
+          </a:p>
+        </p:txBody>
+      </p:sp>
+      <p:sp>
+        <p:nvSpPr>
+          <p:cNvPr id="19" name="Text 16"/>
+          <p:cNvSpPr txBox="1"/>
+          <p:nvPr/>
+        </p:nvSpPr>
+        <p:spPr>
+          <a:xfrm>
+            <a:off x="5352166" y="3566160"/>
+            <a:ext cx="1578803" cy="1005840"/>
+          </a:xfrm>
+          <a:prstGeom prst="rect">
+            <a:avLst/>
+          </a:prstGeom>
+          <a:noFill/>
+          <a:ln/>
+        </p:spPr>
+        <p:txBody>
+          <a:bodyPr wrap="square" lIns="0" tIns="0" rIns="0" bIns="0" rtlCol="0" anchor="t"/>
+          <a:lstStyle/>
+          <a:p>
+            <a:pPr indent="0" marL="0">
+              <a:buNone/>
+            </a:pPr>
+            <a:r>
+              <a:rPr lang="en-US" sz="1400" dirty="0">
+                <a:solidFill>
+                  <a:schemeClr val="tx2"/>
+                </a:solidFill>
+                <a:latin typeface="Calibri" pitchFamily="34" charset="0"/>
+                <a:ea typeface="Calibri" pitchFamily="34" charset="-122"/>
+                <a:cs typeface="Calibri" pitchFamily="34" charset="-120"/>
+              </a:rPr>
+              <a:t>“Small goal = success”: the score to beat</a:t>
+            </a:r>
+            <a:endParaRPr lang="en-US" sz="1400" dirty="0"/>
+          </a:p>
+        </p:txBody>
+      </p:sp>
+      <p:sp>
+        <p:nvSpPr>
+          <p:cNvPr id="20" name="Step card 4"/>
+          <p:cNvSpPr/>
+          <p:nvPr/>
+        </p:nvSpPr>
+        <p:spPr>
+          <a:xfrm>
+            <a:off x="7342449" y="1828800"/>
+            <a:ext cx="2036003" cy="2834640"/>
+          </a:xfrm>
+          <a:prstGeom prst="roundRect">
+            <a:avLst>
+              <a:gd name="adj" fmla="val 5389"/>
+            </a:avLst>
+          </a:prstGeom>
+          <a:solidFill>
+            <a:srgbClr val="F2F4F8"/>
+          </a:solidFill>
+          <a:ln w="12700">
+            <a:solidFill>
+              <a:srgbClr val="F2F4F8"/>
+            </a:solidFill>
+            <a:prstDash val="solid"/>
+          </a:ln>
+        </p:spPr>
+      </p:sp>
+      <p:sp>
+        <p:nvSpPr>
+          <p:cNvPr id="21" name="Step number 4"/>
+          <p:cNvSpPr/>
+          <p:nvPr/>
+        </p:nvSpPr>
+        <p:spPr>
+          <a:xfrm>
+            <a:off x="7616769" y="2103120"/>
+            <a:ext cx="594360" cy="594360"/>
+          </a:xfrm>
+          <a:prstGeom prst="ellipse">
+            <a:avLst/>
+          </a:prstGeom>
+          <a:solidFill>
+            <a:srgbClr val="2A78D6"/>
+          </a:solidFill>
+          <a:ln w="12700">
+            <a:solidFill>
+              <a:srgbClr val="2A78D6"/>
+            </a:solidFill>
+            <a:prstDash val="solid"/>
+          </a:ln>
+        </p:spPr>
+      </p:sp>
+      <p:sp>
+        <p:nvSpPr>
+          <p:cNvPr id="22" name="Text 19"/>
+          <p:cNvSpPr txBox="1"/>
+          <p:nvPr/>
+        </p:nvSpPr>
+        <p:spPr>
+          <a:xfrm>
+            <a:off x="7616769" y="2103120"/>
+            <a:ext cx="594360" cy="594360"/>
+          </a:xfrm>
+          <a:prstGeom prst="rect">
+            <a:avLst/>
+          </a:prstGeom>
+          <a:noFill/>
+          <a:ln/>
+        </p:spPr>
+        <p:txBody>
+          <a:bodyPr wrap="square" lIns="0" tIns="0" rIns="0" bIns="0" rtlCol="0" anchor="ctr"/>
+          <a:lstStyle/>
+          <a:p>
+            <a:pPr algn="ctr" indent="0" marL="0">
+              <a:buNone/>
+            </a:pPr>
+            <a:r>
+              <a:rPr lang="en-US" sz="2200" b="1" dirty="0">
+                <a:solidFill>
+                  <a:schemeClr val="bg1"/>
+                </a:solidFill>
+                <a:latin typeface="Calibri" pitchFamily="34" charset="0"/>
+                <a:ea typeface="Calibri" pitchFamily="34" charset="-122"/>
+                <a:cs typeface="Calibri" pitchFamily="34" charset="-120"/>
+              </a:rPr>
+              <a:t>4</a:t>
+            </a:r>
+            <a:endParaRPr lang="en-US" sz="2200" dirty="0"/>
+          </a:p>
+        </p:txBody>
+      </p:sp>
+      <p:sp>
+        <p:nvSpPr>
+          <p:cNvPr id="23" name="Text 20"/>
+          <p:cNvSpPr txBox="1"/>
+          <p:nvPr/>
+        </p:nvSpPr>
+        <p:spPr>
+          <a:xfrm>
+            <a:off x="7616769" y="2880360"/>
+            <a:ext cx="1578803" cy="685800"/>
+          </a:xfrm>
+          <a:prstGeom prst="rect">
+            <a:avLst/>
+          </a:prstGeom>
+          <a:noFill/>
+          <a:ln/>
+        </p:spPr>
+        <p:txBody>
+          <a:bodyPr wrap="square" lIns="0" tIns="0" rIns="0" bIns="0" rtlCol="0" anchor="t"/>
+          <a:lstStyle/>
+          <a:p>
+            <a:pPr indent="0" marL="0">
+              <a:buNone/>
+            </a:pPr>
+            <a:r>
+              <a:rPr lang="en-US" sz="1800" b="1" dirty="0">
+                <a:solidFill>
+                  <a:schemeClr val="tx1"/>
+                </a:solidFill>
+                <a:latin typeface="Calibri" pitchFamily="34" charset="0"/>
+                <a:ea typeface="Calibri" pitchFamily="34" charset="-122"/>
+                <a:cs typeface="Calibri" pitchFamily="34" charset="-120"/>
+              </a:rPr>
+              <a:t>Compare 3 models</a:t>
+            </a:r>
+            <a:endParaRPr lang="en-US" sz="1800" dirty="0"/>
+          </a:p>
+        </p:txBody>
+      </p:sp>
+      <p:sp>
+        <p:nvSpPr>
+          <p:cNvPr id="24" name="Text 21"/>
+          <p:cNvSpPr txBox="1"/>
+          <p:nvPr/>
+        </p:nvSpPr>
+        <p:spPr>
+          <a:xfrm>
+            <a:off x="7616769" y="3566160"/>
+            <a:ext cx="1578803" cy="1005840"/>
+          </a:xfrm>
+          <a:prstGeom prst="rect">
+            <a:avLst/>
+          </a:prstGeom>
+          <a:noFill/>
+          <a:ln/>
+        </p:spPr>
+        <p:txBody>
+          <a:bodyPr wrap="square" lIns="0" tIns="0" rIns="0" bIns="0" rtlCol="0" anchor="t"/>
+          <a:lstStyle/>
+          <a:p>
+            <a:pPr indent="0" marL="0">
+              <a:buNone/>
+            </a:pPr>
+            <a:r>
+              <a:rPr lang="en-US" sz="1400" dirty="0">
+                <a:solidFill>
+                  <a:schemeClr val="tx2"/>
+                </a:solidFill>
+                <a:latin typeface="Calibri" pitchFamily="34" charset="0"/>
+                <a:ea typeface="Calibri" pitchFamily="34" charset="-122"/>
+                <a:cs typeface="Calibri" pitchFamily="34" charset="-120"/>
+              </a:rPr>
+              <a:t>Linear model, random forest, gradient boosting</a:t>
+            </a:r>
+            <a:endParaRPr lang="en-US" sz="1400" dirty="0"/>
+          </a:p>
+        </p:txBody>
+      </p:sp>
+      <p:sp>
+        <p:nvSpPr>
+          <p:cNvPr id="25" name="Step card 5"/>
+          <p:cNvSpPr/>
+          <p:nvPr/>
+        </p:nvSpPr>
+        <p:spPr>
+          <a:xfrm>
+            <a:off x="9607052" y="1828800"/>
+            <a:ext cx="2036003" cy="2834640"/>
+          </a:xfrm>
+          <a:prstGeom prst="roundRect">
+            <a:avLst>
+              <a:gd name="adj" fmla="val 5389"/>
+            </a:avLst>
+          </a:prstGeom>
+          <a:solidFill>
+            <a:srgbClr val="F2F4F8"/>
+          </a:solidFill>
+          <a:ln w="12700">
+            <a:solidFill>
+              <a:srgbClr val="F2F4F8"/>
+            </a:solidFill>
+            <a:prstDash val="solid"/>
+          </a:ln>
+        </p:spPr>
+      </p:sp>
+      <p:sp>
+        <p:nvSpPr>
+          <p:cNvPr id="26" name="Step number 5"/>
+          <p:cNvSpPr/>
+          <p:nvPr/>
+        </p:nvSpPr>
+        <p:spPr>
+          <a:xfrm>
+            <a:off x="9881372" y="2103120"/>
+            <a:ext cx="594360" cy="594360"/>
+          </a:xfrm>
+          <a:prstGeom prst="ellipse">
+            <a:avLst/>
+          </a:prstGeom>
+          <a:solidFill>
+            <a:srgbClr val="2A78D6"/>
+          </a:solidFill>
+          <a:ln w="12700">
+            <a:solidFill>
+              <a:srgbClr val="2A78D6"/>
+            </a:solidFill>
+            <a:prstDash val="solid"/>
+          </a:ln>
+        </p:spPr>
+      </p:sp>
+      <p:sp>
+        <p:nvSpPr>
+          <p:cNvPr id="27" name="Text 24"/>
+          <p:cNvSpPr txBox="1"/>
+          <p:nvPr/>
+        </p:nvSpPr>
+        <p:spPr>
+          <a:xfrm>
+            <a:off x="9881372" y="2103120"/>
+            <a:ext cx="594360" cy="594360"/>
+          </a:xfrm>
+          <a:prstGeom prst="rect">
+            <a:avLst/>
+          </a:prstGeom>
+          <a:noFill/>
+          <a:ln/>
+        </p:spPr>
+        <p:txBody>
+          <a:bodyPr wrap="square" lIns="0" tIns="0" rIns="0" bIns="0" rtlCol="0" anchor="ctr"/>
+          <a:lstStyle/>
+          <a:p>
+            <a:pPr algn="ctr" indent="0" marL="0">
+              <a:buNone/>
+            </a:pPr>
+            <a:r>
+              <a:rPr lang="en-US" sz="2200" b="1" dirty="0">
+                <a:solidFill>
+                  <a:schemeClr val="bg1"/>
+                </a:solidFill>
+                <a:latin typeface="Calibri" pitchFamily="34" charset="0"/>
+                <a:ea typeface="Calibri" pitchFamily="34" charset="-122"/>
+                <a:cs typeface="Calibri" pitchFamily="34" charset="-120"/>
+              </a:rPr>
+              <a:t>5</a:t>
+            </a:r>
+            <a:endParaRPr lang="en-US" sz="2200" dirty="0"/>
+          </a:p>
+        </p:txBody>
+      </p:sp>
+      <p:sp>
+        <p:nvSpPr>
+          <p:cNvPr id="28" name="Text 25"/>
+          <p:cNvSpPr txBox="1"/>
+          <p:nvPr/>
+        </p:nvSpPr>
+        <p:spPr>
+          <a:xfrm>
+            <a:off x="9881372" y="2880360"/>
+            <a:ext cx="1578803" cy="685800"/>
+          </a:xfrm>
+          <a:prstGeom prst="rect">
+            <a:avLst/>
+          </a:prstGeom>
+          <a:noFill/>
+          <a:ln/>
+        </p:spPr>
+        <p:txBody>
+          <a:bodyPr wrap="square" lIns="0" tIns="0" rIns="0" bIns="0" rtlCol="0" anchor="t"/>
+          <a:lstStyle/>
+          <a:p>
+            <a:pPr indent="0" marL="0">
+              <a:buNone/>
+            </a:pPr>
+            <a:r>
+              <a:rPr lang="en-US" sz="1800" b="1" dirty="0">
+                <a:solidFill>
+                  <a:schemeClr val="tx1"/>
+                </a:solidFill>
+                <a:latin typeface="Calibri" pitchFamily="34" charset="0"/>
+                <a:ea typeface="Calibri" pitchFamily="34" charset="-122"/>
+                <a:cs typeface="Calibri" pitchFamily="34" charset="-120"/>
+              </a:rPr>
+              <a:t>Tune and test</a:t>
+            </a:r>
+            <a:endParaRPr lang="en-US" sz="1800" dirty="0"/>
+          </a:p>
+        </p:txBody>
+      </p:sp>
+      <p:sp>
+        <p:nvSpPr>
+          <p:cNvPr id="29" name="Text 26"/>
+          <p:cNvSpPr txBox="1"/>
+          <p:nvPr/>
+        </p:nvSpPr>
+        <p:spPr>
+          <a:xfrm>
+            <a:off x="9881372" y="3566160"/>
+            <a:ext cx="1578803" cy="1005840"/>
+          </a:xfrm>
+          <a:prstGeom prst="rect">
+            <a:avLst/>
+          </a:prstGeom>
+          <a:noFill/>
+          <a:ln/>
+        </p:spPr>
+        <p:txBody>
+          <a:bodyPr wrap="square" lIns="0" tIns="0" rIns="0" bIns="0" rtlCol="0" anchor="t"/>
+          <a:lstStyle/>
+          <a:p>
+            <a:pPr indent="0" marL="0">
+              <a:buNone/>
+            </a:pPr>
+            <a:r>
+              <a:rPr lang="en-US" sz="1400" dirty="0">
+                <a:solidFill>
+                  <a:schemeClr val="tx2"/>
+                </a:solidFill>
+                <a:latin typeface="Calibri" pitchFamily="34" charset="0"/>
+                <a:ea typeface="Calibri" pitchFamily="34" charset="-122"/>
+                <a:cs typeface="Calibri" pitchFamily="34" charset="-120"/>
+              </a:rPr>
+              <a:t>Tune the best one, then take the exam once</a:t>
+            </a:r>
+            <a:endParaRPr lang="en-US" sz="1400" dirty="0"/>
+          </a:p>
+        </p:txBody>
+      </p:sp>
+      <p:sp>
+        <p:nvSpPr>
+          <p:cNvPr id="30" name="Text 27"/>
+          <p:cNvSpPr txBox="1"/>
+          <p:nvPr/>
+        </p:nvSpPr>
+        <p:spPr>
+          <a:xfrm>
+            <a:off x="548640" y="5029200"/>
+            <a:ext cx="11094415" cy="731520"/>
+          </a:xfrm>
+          <a:prstGeom prst="rect">
+            <a:avLst/>
+          </a:prstGeom>
+          <a:noFill/>
+          <a:ln/>
+        </p:spPr>
+        <p:txBody>
+          <a:bodyPr wrap="square" lIns="0" tIns="0" rIns="0" bIns="0" rtlCol="0" anchor="t"/>
+          <a:lstStyle/>
+          <a:p>
+            <a:pPr indent="0" marL="0">
+              <a:buNone/>
+            </a:pPr>
+            <a:r>
+              <a:rPr lang="en-US" sz="1600" dirty="0">
+                <a:solidFill>
+                  <a:schemeClr val="tx2"/>
+                </a:solidFill>
+                <a:latin typeface="Calibri" pitchFamily="34" charset="0"/>
+                <a:ea typeface="Calibri" pitchFamily="34" charset="-122"/>
+                <a:cs typeface="Calibri" pitchFamily="34" charset="-120"/>
+              </a:rPr>
+              <a:t>Every model was trained and compared on the other 80% only, using 5-fold cross-validation: train on four parts, check on the fifth, repeat.</a:t>
+            </a:r>
+            <a:endParaRPr lang="en-US" sz="1600" dirty="0"/>
+          </a:p>
+        </p:txBody>
+      </p:sp>
+      <p:sp>
+        <p:nvSpPr>
+          <p:cNvPr id="31" name="Text 0"/>
           <p:cNvSpPr/>
           <p:nvPr>
             <p:ph idx="102" type="body" hasCustomPrompt="1"/>
